--- a/Documentations/The-Inventory-EN.pptx
+++ b/Documentations/The-Inventory-EN.pptx
@@ -5,7 +5,7 @@
     <p:sldMasterId id="2147483648" r:id="rId1"/>
   </p:sldMasterIdLst>
   <p:notesMasterIdLst>
-    <p:notesMasterId r:id="rId10"/>
+    <p:notesMasterId r:id="rId11"/>
   </p:notesMasterIdLst>
   <p:sldIdLst>
     <p:sldId id="256" r:id="rId2"/>
@@ -15,7 +15,8 @@
     <p:sldId id="259" r:id="rId6"/>
     <p:sldId id="260" r:id="rId7"/>
     <p:sldId id="264" r:id="rId8"/>
-    <p:sldId id="261" r:id="rId9"/>
+    <p:sldId id="266" r:id="rId9"/>
+    <p:sldId id="261" r:id="rId10"/>
   </p:sldIdLst>
   <p:sldSz cx="9144000" cy="5143500" type="screen16x9"/>
   <p:notesSz cx="5143500" cy="9144000"/>
@@ -813,7 +814,7 @@
           <a:p>
             <a:fld id="{F7021451-1387-4CA6-816F-3879F97B5CBC}" type="slidenum">
               <a:rPr lang="en-US"/>
-              <a:t>8</a:t>
+              <a:t>9</a:t>
             </a:fld>
             <a:endParaRPr lang="en-US"/>
           </a:p>
@@ -9458,6 +9459,184 @@
 
 <file path=ppt/slides/slide8.xml><?xml version="1.0" encoding="utf-8"?>
 <p:sld xmlns:a="http://schemas.openxmlformats.org/drawingml/2006/main" xmlns:r="http://schemas.openxmlformats.org/officeDocument/2006/relationships" xmlns:p="http://schemas.openxmlformats.org/presentationml/2006/main">
+  <p:cSld>
+    <p:bg>
+      <p:bgPr>
+        <a:solidFill>
+          <a:srgbClr val="080D1A"/>
+        </a:solidFill>
+        <a:effectLst/>
+      </p:bgPr>
+    </p:bg>
+    <p:spTree>
+      <p:nvGrpSpPr>
+        <p:cNvPr id="1" name=""/>
+        <p:cNvGrpSpPr/>
+        <p:nvPr/>
+      </p:nvGrpSpPr>
+      <p:grpSpPr>
+        <a:xfrm>
+          <a:off x="0" y="0"/>
+          <a:ext cx="0" cy="0"/>
+          <a:chOff x="0" y="0"/>
+          <a:chExt cx="0" cy="0"/>
+        </a:xfrm>
+      </p:grpSpPr>
+      <p:pic>
+        <p:nvPicPr>
+          <p:cNvPr id="4" name="Imagine 3">
+            <a:extLst>
+              <a:ext uri="{FF2B5EF4-FFF2-40B4-BE49-F238E27FC236}">
+                <a16:creationId xmlns:a16="http://schemas.microsoft.com/office/drawing/2014/main" id="{41002AD1-67C7-CFC0-4279-979F8572D976}"/>
+              </a:ext>
+            </a:extLst>
+          </p:cNvPr>
+          <p:cNvPicPr>
+            <a:picLocks noChangeAspect="1"/>
+          </p:cNvPicPr>
+          <p:nvPr/>
+        </p:nvPicPr>
+        <p:blipFill>
+          <a:blip r:embed="rId2"/>
+          <a:stretch>
+            <a:fillRect/>
+          </a:stretch>
+        </p:blipFill>
+        <p:spPr>
+          <a:xfrm>
+            <a:off x="2894569" y="106680"/>
+            <a:ext cx="3354861" cy="1096781"/>
+          </a:xfrm>
+          <a:prstGeom prst="rect">
+            <a:avLst/>
+          </a:prstGeom>
+        </p:spPr>
+      </p:pic>
+      <p:sp>
+        <p:nvSpPr>
+          <p:cNvPr id="7" name="Shape 16">
+            <a:extLst>
+              <a:ext uri="{FF2B5EF4-FFF2-40B4-BE49-F238E27FC236}">
+                <a16:creationId xmlns:a16="http://schemas.microsoft.com/office/drawing/2014/main" id="{EAD13ABF-C891-C86B-7074-0FA17B0C1B9C}"/>
+              </a:ext>
+            </a:extLst>
+          </p:cNvPr>
+          <p:cNvSpPr/>
+          <p:nvPr/>
+        </p:nvSpPr>
+        <p:spPr>
+          <a:xfrm>
+            <a:off x="347471" y="1414248"/>
+            <a:ext cx="8449056" cy="384048"/>
+          </a:xfrm>
+          <a:prstGeom prst="rect">
+            <a:avLst/>
+          </a:prstGeom>
+          <a:solidFill>
+            <a:srgbClr val="0E1628"/>
+          </a:solidFill>
+          <a:ln w="38100">
+            <a:solidFill>
+              <a:srgbClr val="38BDF8"/>
+            </a:solidFill>
+            <a:prstDash val="solid"/>
+          </a:ln>
+        </p:spPr>
+      </p:sp>
+      <p:sp>
+        <p:nvSpPr>
+          <p:cNvPr id="9" name="CasetăText 8">
+            <a:extLst>
+              <a:ext uri="{FF2B5EF4-FFF2-40B4-BE49-F238E27FC236}">
+                <a16:creationId xmlns:a16="http://schemas.microsoft.com/office/drawing/2014/main" id="{3A7FA51B-09B4-967F-C1AC-878A9D6A71B7}"/>
+              </a:ext>
+            </a:extLst>
+          </p:cNvPr>
+          <p:cNvSpPr txBox="1"/>
+          <p:nvPr/>
+        </p:nvSpPr>
+        <p:spPr>
+          <a:xfrm>
+            <a:off x="2285998" y="1430988"/>
+            <a:ext cx="4572000" cy="369332"/>
+          </a:xfrm>
+          <a:prstGeom prst="rect">
+            <a:avLst/>
+          </a:prstGeom>
+          <a:noFill/>
+        </p:spPr>
+        <p:txBody>
+          <a:bodyPr wrap="square">
+            <a:spAutoFit/>
+          </a:bodyPr>
+          <a:lstStyle/>
+          <a:p>
+            <a:pPr algn="ctr"/>
+            <a:r>
+              <a:rPr lang="en-US" b="1" dirty="0">
+                <a:solidFill>
+                  <a:srgbClr val="8B96A8"/>
+                </a:solidFill>
+                <a:latin typeface="Calibri" pitchFamily="34" charset="0"/>
+                <a:ea typeface="Calibri" pitchFamily="34" charset="-122"/>
+                <a:cs typeface="Calibri" pitchFamily="34" charset="-120"/>
+                <a:hlinkClick r:id="rId3"/>
+              </a:rPr>
+              <a:t>https://fermo.top/The-inventory/</a:t>
+            </a:r>
+            <a:endParaRPr lang="en-US" sz="1800" b="1" dirty="0"/>
+          </a:p>
+        </p:txBody>
+      </p:sp>
+      <p:pic>
+        <p:nvPicPr>
+          <p:cNvPr id="19" name="Grafic 18">
+            <a:extLst>
+              <a:ext uri="{FF2B5EF4-FFF2-40B4-BE49-F238E27FC236}">
+                <a16:creationId xmlns:a16="http://schemas.microsoft.com/office/drawing/2014/main" id="{C82636AF-A776-4B45-A003-AD4C32B35C95}"/>
+              </a:ext>
+            </a:extLst>
+          </p:cNvPr>
+          <p:cNvPicPr>
+            <a:picLocks noChangeAspect="1"/>
+          </p:cNvPicPr>
+          <p:nvPr/>
+        </p:nvPicPr>
+        <p:blipFill>
+          <a:blip r:embed="rId4"/>
+          <a:srcRect/>
+          <a:stretch/>
+        </p:blipFill>
+        <p:spPr>
+          <a:xfrm>
+            <a:off x="3272332" y="2124535"/>
+            <a:ext cx="2599334" cy="2610652"/>
+          </a:xfrm>
+          <a:prstGeom prst="rect">
+            <a:avLst/>
+          </a:prstGeom>
+          <a:ln w="38100">
+            <a:solidFill>
+              <a:srgbClr val="38BDF8"/>
+            </a:solidFill>
+          </a:ln>
+        </p:spPr>
+      </p:pic>
+    </p:spTree>
+    <p:extLst>
+      <p:ext uri="{BB962C8B-B14F-4D97-AF65-F5344CB8AC3E}">
+        <p14:creationId xmlns:p14="http://schemas.microsoft.com/office/powerpoint/2010/main" val="1292600944"/>
+      </p:ext>
+    </p:extLst>
+  </p:cSld>
+  <p:clrMapOvr>
+    <a:masterClrMapping/>
+  </p:clrMapOvr>
+</p:sld>
+</file>
+
+<file path=ppt/slides/slide9.xml><?xml version="1.0" encoding="utf-8"?>
+<p:sld xmlns:a="http://schemas.openxmlformats.org/drawingml/2006/main" xmlns:r="http://schemas.openxmlformats.org/officeDocument/2006/relationships" xmlns:p="http://schemas.openxmlformats.org/presentationml/2006/main">
   <p:cSld name="Slide 6">
     <p:bg>
       <p:bgPr>
@@ -10525,31 +10704,6 @@
       </p:sp>
       <p:sp>
         <p:nvSpPr>
-          <p:cNvPr id="24" name="Shape 16"/>
-          <p:cNvSpPr/>
-          <p:nvPr/>
-        </p:nvSpPr>
-        <p:spPr>
-          <a:xfrm>
-            <a:off x="347472" y="4553712"/>
-            <a:ext cx="8449056" cy="384048"/>
-          </a:xfrm>
-          <a:prstGeom prst="rect">
-            <a:avLst/>
-          </a:prstGeom>
-          <a:solidFill>
-            <a:srgbClr val="0E1628"/>
-          </a:solidFill>
-          <a:ln w="12700">
-            <a:solidFill>
-              <a:srgbClr val="1C2A40"/>
-            </a:solidFill>
-            <a:prstDash val="solid"/>
-          </a:ln>
-        </p:spPr>
-      </p:sp>
-      <p:sp>
-        <p:nvSpPr>
           <p:cNvPr id="25" name="Text 17"/>
           <p:cNvSpPr/>
           <p:nvPr/>
@@ -10572,29 +10726,6 @@
             <a:pPr marL="0" indent="0" algn="ctr">
               <a:buNone/>
             </a:pPr>
-            <a:r>
-              <a:rPr lang="en-US" sz="1000" b="1" dirty="0">
-                <a:solidFill>
-                  <a:srgbClr val="8B96A8"/>
-                </a:solidFill>
-                <a:latin typeface="Calibri" pitchFamily="34" charset="0"/>
-                <a:ea typeface="Calibri" pitchFamily="34" charset="-122"/>
-                <a:cs typeface="Calibri" pitchFamily="34" charset="-120"/>
-                <a:hlinkClick r:id="rId8"/>
-              </a:rPr>
-              <a:t>fermo.top/The-inventory/  </a:t>
-            </a:r>
-            <a:r>
-              <a:rPr lang="en-US" sz="1000" b="1" dirty="0">
-                <a:solidFill>
-                  <a:srgbClr val="8B96A8"/>
-                </a:solidFill>
-                <a:latin typeface="Calibri" pitchFamily="34" charset="0"/>
-                <a:ea typeface="Calibri" pitchFamily="34" charset="-122"/>
-                <a:cs typeface="Calibri" pitchFamily="34" charset="-120"/>
-              </a:rPr>
-              <a:t>  ·  THE INVENTORY v1.0  ·  Strugariu Filip-Daniel  ·  © 2026</a:t>
-            </a:r>
             <a:endParaRPr lang="en-US" sz="1000" b="1" dirty="0"/>
           </a:p>
         </p:txBody>
@@ -10657,7 +10788,7 @@
           <p:nvPr/>
         </p:nvPicPr>
         <p:blipFill>
-          <a:blip r:embed="rId9"/>
+          <a:blip r:embed="rId8"/>
           <a:stretch>
             <a:fillRect/>
           </a:stretch>
@@ -10672,6 +10803,93 @@
           </a:prstGeom>
         </p:spPr>
       </p:pic>
+      <p:sp>
+        <p:nvSpPr>
+          <p:cNvPr id="29" name="Shape 16">
+            <a:extLst>
+              <a:ext uri="{FF2B5EF4-FFF2-40B4-BE49-F238E27FC236}">
+                <a16:creationId xmlns:a16="http://schemas.microsoft.com/office/drawing/2014/main" id="{48C4793F-E6AA-F4E8-02C1-136B68793BE3}"/>
+              </a:ext>
+            </a:extLst>
+          </p:cNvPr>
+          <p:cNvSpPr/>
+          <p:nvPr/>
+        </p:nvSpPr>
+        <p:spPr>
+          <a:xfrm>
+            <a:off x="375844" y="4494276"/>
+            <a:ext cx="8449056" cy="384048"/>
+          </a:xfrm>
+          <a:prstGeom prst="rect">
+            <a:avLst/>
+          </a:prstGeom>
+          <a:solidFill>
+            <a:srgbClr val="0E1628"/>
+          </a:solidFill>
+          <a:ln w="12700">
+            <a:solidFill>
+              <a:srgbClr val="1C2A40"/>
+            </a:solidFill>
+            <a:prstDash val="solid"/>
+          </a:ln>
+        </p:spPr>
+      </p:sp>
+      <p:sp>
+        <p:nvSpPr>
+          <p:cNvPr id="30" name="Text 17">
+            <a:extLst>
+              <a:ext uri="{FF2B5EF4-FFF2-40B4-BE49-F238E27FC236}">
+                <a16:creationId xmlns:a16="http://schemas.microsoft.com/office/drawing/2014/main" id="{0D760EAB-3D5A-80F4-FE1C-CA4AAE620F85}"/>
+              </a:ext>
+            </a:extLst>
+          </p:cNvPr>
+          <p:cNvSpPr/>
+          <p:nvPr/>
+        </p:nvSpPr>
+        <p:spPr>
+          <a:xfrm>
+            <a:off x="375844" y="4494276"/>
+            <a:ext cx="8449056" cy="384048"/>
+          </a:xfrm>
+          <a:prstGeom prst="rect">
+            <a:avLst/>
+          </a:prstGeom>
+          <a:noFill/>
+          <a:ln/>
+        </p:spPr>
+        <p:txBody>
+          <a:bodyPr wrap="square" rtlCol="0" anchor="ctr"/>
+          <a:lstStyle/>
+          <a:p>
+            <a:pPr marL="0" indent="0" algn="ctr">
+              <a:buNone/>
+            </a:pPr>
+            <a:r>
+              <a:rPr lang="en-US" sz="1000" b="1" dirty="0">
+                <a:solidFill>
+                  <a:srgbClr val="8B96A8"/>
+                </a:solidFill>
+                <a:latin typeface="Calibri" pitchFamily="34" charset="0"/>
+                <a:ea typeface="Calibri" pitchFamily="34" charset="-122"/>
+                <a:cs typeface="Calibri" pitchFamily="34" charset="-120"/>
+              </a:rPr>
+              <a:t>Thanks for your attention </a:t>
+            </a:r>
+            <a:r>
+              <a:rPr lang="ro-RO" sz="1000" b="1" dirty="0">
+                <a:solidFill>
+                  <a:srgbClr val="8B96A8"/>
+                </a:solidFill>
+                <a:latin typeface="Calibri" pitchFamily="34" charset="0"/>
+                <a:ea typeface="Calibri" pitchFamily="34" charset="-122"/>
+                <a:cs typeface="Calibri" pitchFamily="34" charset="-120"/>
+              </a:rPr>
+              <a:t>!</a:t>
+            </a:r>
+            <a:endParaRPr lang="en-US" sz="1000" b="1" dirty="0"/>
+          </a:p>
+        </p:txBody>
+      </p:sp>
     </p:spTree>
   </p:cSld>
   <p:clrMapOvr>

--- a/Documentations/The-Inventory-EN.pptx
+++ b/Documentations/The-Inventory-EN.pptx
@@ -9590,7 +9590,7 @@
       </p:sp>
       <p:pic>
         <p:nvPicPr>
-          <p:cNvPr id="19" name="Grafic 18">
+          <p:cNvPr id="2" name="Grafic 18">
             <a:extLst>
               <a:ext uri="{FF2B5EF4-FFF2-40B4-BE49-F238E27FC236}">
                 <a16:creationId xmlns:a16="http://schemas.microsoft.com/office/drawing/2014/main" id="{C82636AF-A776-4B45-A003-AD4C32B35C95}"/>
@@ -9604,13 +9604,15 @@
         </p:nvPicPr>
         <p:blipFill>
           <a:blip r:embed="rId4"/>
-          <a:srcRect/>
-          <a:stretch/>
+          <a:srcRect l="5148" t="5116" r="6613" b="6060"/>
+          <a:stretch>
+            <a:fillRect/>
+          </a:stretch>
         </p:blipFill>
         <p:spPr>
           <a:xfrm>
-            <a:off x="3272332" y="2124535"/>
-            <a:ext cx="2599334" cy="2610652"/>
+            <a:off x="3272331" y="2124535"/>
+            <a:ext cx="2599334" cy="2616605"/>
           </a:xfrm>
           <a:prstGeom prst="rect">
             <a:avLst/>

--- a/Documentations/The-Inventory-EN.pptx
+++ b/Documentations/The-Inventory-EN.pptx
@@ -5,7 +5,7 @@
     <p:sldMasterId id="2147483648" r:id="rId1"/>
   </p:sldMasterIdLst>
   <p:notesMasterIdLst>
-    <p:notesMasterId r:id="rId11"/>
+    <p:notesMasterId r:id="rId10"/>
   </p:notesMasterIdLst>
   <p:sldIdLst>
     <p:sldId id="256" r:id="rId2"/>
@@ -13,10 +13,9 @@
     <p:sldId id="257" r:id="rId4"/>
     <p:sldId id="258" r:id="rId5"/>
     <p:sldId id="259" r:id="rId6"/>
-    <p:sldId id="260" r:id="rId7"/>
-    <p:sldId id="264" r:id="rId8"/>
-    <p:sldId id="266" r:id="rId9"/>
-    <p:sldId id="261" r:id="rId10"/>
+    <p:sldId id="264" r:id="rId7"/>
+    <p:sldId id="266" r:id="rId8"/>
+    <p:sldId id="261" r:id="rId9"/>
   </p:sldIdLst>
   <p:sldSz cx="9144000" cy="5143500" type="screen16x9"/>
   <p:notesSz cx="5143500" cy="9144000"/>
@@ -730,91 +729,7 @@
           <a:p>
             <a:fld id="{F7021451-1387-4CA6-816F-3879F97B5CBC}" type="slidenum">
               <a:rPr lang="en-US"/>
-              <a:t>7</a:t>
-            </a:fld>
-            <a:endParaRPr lang="en-US"/>
-          </a:p>
-        </p:txBody>
-      </p:sp>
-    </p:spTree>
-    <p:extLst>
-      <p:ext uri="{BB962C8B-B14F-4D97-AF65-F5344CB8AC3E}">
-        <p14:creationId xmlns:p14="http://schemas.microsoft.com/office/powerpoint/2010/main" val="1024086991"/>
-      </p:ext>
-    </p:extLst>
-  </p:cSld>
-  <p:clrMapOvr>
-    <a:masterClrMapping/>
-  </p:clrMapOvr>
-</p:notes>
-</file>
-
-<file path=ppt/notesSlides/notesSlide7.xml><?xml version="1.0" encoding="utf-8"?>
-<p:notes xmlns:a="http://schemas.openxmlformats.org/drawingml/2006/main" xmlns:r="http://schemas.openxmlformats.org/officeDocument/2006/relationships" xmlns:p="http://schemas.openxmlformats.org/presentationml/2006/main">
-  <p:cSld>
-    <p:spTree>
-      <p:nvGrpSpPr>
-        <p:cNvPr id="1" name=""/>
-        <p:cNvGrpSpPr/>
-        <p:nvPr/>
-      </p:nvGrpSpPr>
-      <p:grpSpPr>
-        <a:xfrm>
-          <a:off x="0" y="0"/>
-          <a:ext cx="0" cy="0"/>
-          <a:chOff x="0" y="0"/>
-          <a:chExt cx="0" cy="0"/>
-        </a:xfrm>
-      </p:grpSpPr>
-      <p:sp>
-        <p:nvSpPr>
-          <p:cNvPr id="2" name="Slide Image Placeholder 1"/>
-          <p:cNvSpPr>
-            <a:spLocks noGrp="1" noRot="1" noChangeAspect="1"/>
-          </p:cNvSpPr>
-          <p:nvPr>
-            <p:ph type="sldImg"/>
-          </p:nvPr>
-        </p:nvSpPr>
-        <p:spPr/>
-      </p:sp>
-      <p:sp>
-        <p:nvSpPr>
-          <p:cNvPr id="3" name="Notes Placeholder 2"/>
-          <p:cNvSpPr>
-            <a:spLocks noGrp="1"/>
-          </p:cNvSpPr>
-          <p:nvPr>
-            <p:ph type="body" idx="1"/>
-          </p:nvPr>
-        </p:nvSpPr>
-        <p:spPr/>
-        <p:txBody>
-          <a:bodyPr/>
-          <a:lstStyle/>
-          <a:p>
-            <a:endParaRPr lang="en-US" dirty="0"/>
-          </a:p>
-        </p:txBody>
-      </p:sp>
-      <p:sp>
-        <p:nvSpPr>
-          <p:cNvPr id="4" name="Slide Number Placeholder 3"/>
-          <p:cNvSpPr>
-            <a:spLocks noGrp="1"/>
-          </p:cNvSpPr>
-          <p:nvPr>
-            <p:ph type="sldNum" sz="quarter" idx="10"/>
-          </p:nvPr>
-        </p:nvSpPr>
-        <p:spPr/>
-        <p:txBody>
-          <a:bodyPr/>
-          <a:lstStyle/>
-          <a:p>
-            <a:fld id="{F7021451-1387-4CA6-816F-3879F97B5CBC}" type="slidenum">
-              <a:rPr lang="en-US"/>
-              <a:t>9</a:t>
+              <a:t>8</a:t>
             </a:fld>
             <a:endParaRPr lang="en-US"/>
           </a:p>
@@ -6155,7 +6070,7 @@
 
 <file path=ppt/slides/slide6.xml><?xml version="1.0" encoding="utf-8"?>
 <p:sld xmlns:a="http://schemas.openxmlformats.org/drawingml/2006/main" xmlns:r="http://schemas.openxmlformats.org/officeDocument/2006/relationships" xmlns:p="http://schemas.openxmlformats.org/presentationml/2006/main">
-  <p:cSld name="Slide 5">
+  <p:cSld>
     <p:bg>
       <p:bgPr>
         <a:solidFill>
@@ -6186,18 +6101,18 @@
         </p:nvSpPr>
         <p:spPr>
           <a:xfrm>
-            <a:off x="228601" y="1688592"/>
-            <a:ext cx="4206240" cy="1417320"/>
+            <a:off x="462534" y="1127760"/>
+            <a:ext cx="2560320" cy="1645920"/>
           </a:xfrm>
           <a:prstGeom prst="rect">
             <a:avLst/>
           </a:prstGeom>
           <a:solidFill>
-            <a:srgbClr val="060C18"/>
+            <a:srgbClr val="0E1628"/>
           </a:solidFill>
-          <a:ln w="12700">
+          <a:ln w="19050">
             <a:solidFill>
-              <a:srgbClr val="1C2A40"/>
+              <a:srgbClr val="6366F1"/>
             </a:solidFill>
             <a:prstDash val="solid"/>
           </a:ln>
@@ -6211,8 +6126,96 @@
         </p:nvSpPr>
         <p:spPr>
           <a:xfrm>
-            <a:off x="411481" y="1761744"/>
-            <a:ext cx="3840480" cy="256032"/>
+            <a:off x="3045714" y="1737159"/>
+            <a:ext cx="274320" cy="365760"/>
+          </a:xfrm>
+          <a:prstGeom prst="rect">
+            <a:avLst/>
+          </a:prstGeom>
+          <a:noFill/>
+          <a:ln/>
+        </p:spPr>
+        <p:txBody>
+          <a:bodyPr wrap="square" rtlCol="0" anchor="ctr"/>
+          <a:lstStyle/>
+          <a:p>
+            <a:pPr marL="0" indent="0" algn="ctr">
+              <a:buNone/>
+            </a:pPr>
+            <a:r>
+              <a:rPr lang="en-US" sz="2200" b="1" dirty="0">
+                <a:solidFill>
+                  <a:srgbClr val="22D3EE"/>
+                </a:solidFill>
+              </a:rPr>
+              <a:t>➔</a:t>
+            </a:r>
+            <a:endParaRPr lang="en-US" sz="2200" dirty="0"/>
+          </a:p>
+        </p:txBody>
+      </p:sp>
+      <p:sp>
+        <p:nvSpPr>
+          <p:cNvPr id="5" name="Text 2"/>
+          <p:cNvSpPr/>
+          <p:nvPr/>
+        </p:nvSpPr>
+        <p:spPr>
+          <a:xfrm>
+            <a:off x="645414" y="1310640"/>
+            <a:ext cx="457200" cy="274320"/>
+          </a:xfrm>
+          <a:prstGeom prst="rect">
+            <a:avLst/>
+          </a:prstGeom>
+          <a:noFill/>
+          <a:ln/>
+        </p:spPr>
+        <p:txBody>
+          <a:bodyPr wrap="square" rtlCol="0" anchor="ctr"/>
+          <a:lstStyle/>
+          <a:p>
+            <a:pPr marL="0" indent="0" algn="ctr">
+              <a:buNone/>
+            </a:pPr>
+            <a:endParaRPr lang="en-US" sz="1000" b="1" dirty="0">
+              <a:solidFill>
+                <a:srgbClr val="6366F1"/>
+              </a:solidFill>
+              <a:latin typeface="Consolas" pitchFamily="34" charset="0"/>
+              <a:ea typeface="Consolas" pitchFamily="34" charset="-122"/>
+              <a:cs typeface="Consolas" pitchFamily="34" charset="-120"/>
+            </a:endParaRPr>
+          </a:p>
+          <a:p>
+            <a:pPr marL="0" indent="0" algn="ctr">
+              <a:buNone/>
+            </a:pPr>
+            <a:r>
+              <a:rPr lang="en-US" sz="1000" b="1" dirty="0">
+                <a:solidFill>
+                  <a:srgbClr val="6366F1"/>
+                </a:solidFill>
+                <a:latin typeface="Consolas" pitchFamily="34" charset="0"/>
+                <a:ea typeface="Consolas" pitchFamily="34" charset="-122"/>
+                <a:cs typeface="Consolas" pitchFamily="34" charset="-120"/>
+              </a:rPr>
+              <a:t>01</a:t>
+            </a:r>
+            <a:endParaRPr lang="en-US" sz="1000" dirty="0"/>
+          </a:p>
+        </p:txBody>
+      </p:sp>
+      <p:sp>
+        <p:nvSpPr>
+          <p:cNvPr id="6" name="Text 3"/>
+          <p:cNvSpPr/>
+          <p:nvPr/>
+        </p:nvSpPr>
+        <p:spPr>
+          <a:xfrm>
+            <a:off x="645414" y="1584960"/>
+            <a:ext cx="2194560" cy="365760"/>
           </a:xfrm>
           <a:prstGeom prst="rect">
             <a:avLst/>
@@ -6227,16 +6230,231 @@
             <a:pPr marL="0" indent="0">
               <a:buNone/>
             </a:pPr>
-            <a:r>
-              <a:rPr lang="en-US" sz="1000" dirty="0">
+            <a:endParaRPr lang="en-US" sz="1400" b="1" dirty="0">
+              <a:solidFill>
+                <a:srgbClr val="FFFFFF"/>
+              </a:solidFill>
+              <a:latin typeface="Segoe UI" pitchFamily="34" charset="0"/>
+              <a:ea typeface="Segoe UI" pitchFamily="34" charset="-122"/>
+              <a:cs typeface="Segoe UI" pitchFamily="34" charset="-120"/>
+            </a:endParaRPr>
+          </a:p>
+          <a:p>
+            <a:r>
+              <a:rPr lang="en-US" sz="1400" b="1" dirty="0">
+                <a:solidFill>
+                  <a:srgbClr val="FFFFFF"/>
+                </a:solidFill>
+                <a:latin typeface="Segoe UI" pitchFamily="34" charset="0"/>
+                <a:ea typeface="Segoe UI" pitchFamily="34" charset="-122"/>
+                <a:cs typeface="Segoe UI" pitchFamily="34" charset="-120"/>
+              </a:rPr>
+              <a:t>Environment setup</a:t>
+            </a:r>
+            <a:endParaRPr lang="en-US" sz="1400" dirty="0"/>
+          </a:p>
+        </p:txBody>
+      </p:sp>
+      <p:sp>
+        <p:nvSpPr>
+          <p:cNvPr id="7" name="Text 4"/>
+          <p:cNvSpPr/>
+          <p:nvPr/>
+        </p:nvSpPr>
+        <p:spPr>
+          <a:xfrm>
+            <a:off x="645414" y="1950720"/>
+            <a:ext cx="2366772" cy="640080"/>
+          </a:xfrm>
+          <a:prstGeom prst="rect">
+            <a:avLst/>
+          </a:prstGeom>
+          <a:noFill/>
+          <a:ln/>
+        </p:spPr>
+        <p:txBody>
+          <a:bodyPr wrap="square" rtlCol="0" anchor="ctr"/>
+          <a:lstStyle/>
+          <a:p>
+            <a:pPr algn="just"/>
+            <a:endParaRPr lang="en-US" sz="1000" dirty="0">
+              <a:solidFill>
+                <a:srgbClr val="8B96A8"/>
+              </a:solidFill>
+              <a:latin typeface="Segoe UI" pitchFamily="34" charset="0"/>
+              <a:ea typeface="Segoe UI" pitchFamily="34" charset="-122"/>
+              <a:cs typeface="Segoe UI" pitchFamily="34" charset="-120"/>
+            </a:endParaRPr>
+          </a:p>
+          <a:p>
+            <a:pPr algn="just"/>
+            <a:r>
+              <a:rPr lang="en-GB" sz="1000" dirty="0">
                 <a:solidFill>
                   <a:srgbClr val="8B96A8"/>
+                </a:solidFill>
+                <a:latin typeface="Segoe UI" pitchFamily="34" charset="0"/>
+                <a:ea typeface="Segoe UI" pitchFamily="34" charset="-122"/>
+                <a:cs typeface="Segoe UI" pitchFamily="34" charset="-120"/>
+              </a:rPr>
+              <a:t>Establishing the project in </a:t>
+            </a:r>
+            <a:r>
+              <a:rPr lang="en-GB" sz="1000" b="1" dirty="0">
+                <a:solidFill>
+                  <a:srgbClr val="8B96A8"/>
+                </a:solidFill>
+                <a:latin typeface="Segoe UI" pitchFamily="34" charset="0"/>
+                <a:ea typeface="Segoe UI" pitchFamily="34" charset="-122"/>
+                <a:cs typeface="Segoe UI" pitchFamily="34" charset="-120"/>
+              </a:rPr>
+              <a:t>Python</a:t>
+            </a:r>
+            <a:r>
+              <a:rPr lang="en-GB" sz="1000" dirty="0">
+                <a:solidFill>
+                  <a:srgbClr val="8B96A8"/>
+                </a:solidFill>
+                <a:latin typeface="Segoe UI" pitchFamily="34" charset="0"/>
+                <a:ea typeface="Segoe UI" pitchFamily="34" charset="-122"/>
+                <a:cs typeface="Segoe UI" pitchFamily="34" charset="-120"/>
+              </a:rPr>
+              <a:t> and initializing the </a:t>
+            </a:r>
+            <a:r>
+              <a:rPr lang="en-GB" sz="1000" b="1" dirty="0" err="1">
+                <a:solidFill>
+                  <a:srgbClr val="8B96A8"/>
+                </a:solidFill>
+                <a:latin typeface="Segoe UI" pitchFamily="34" charset="0"/>
+                <a:ea typeface="Segoe UI" pitchFamily="34" charset="-122"/>
+                <a:cs typeface="Segoe UI" pitchFamily="34" charset="-120"/>
+              </a:rPr>
+              <a:t>FastAPI</a:t>
+            </a:r>
+            <a:r>
+              <a:rPr lang="en-GB" sz="1000" dirty="0">
+                <a:solidFill>
+                  <a:srgbClr val="8B96A8"/>
+                </a:solidFill>
+                <a:latin typeface="Segoe UI" pitchFamily="34" charset="0"/>
+                <a:ea typeface="Segoe UI" pitchFamily="34" charset="-122"/>
+                <a:cs typeface="Segoe UI" pitchFamily="34" charset="-120"/>
+              </a:rPr>
+              <a:t> framework for scalable and asynchronous development.</a:t>
+            </a:r>
+            <a:endParaRPr lang="en-US" sz="1000" b="1" dirty="0"/>
+          </a:p>
+        </p:txBody>
+      </p:sp>
+      <p:sp>
+        <p:nvSpPr>
+          <p:cNvPr id="8" name="Shape 5"/>
+          <p:cNvSpPr/>
+          <p:nvPr/>
+        </p:nvSpPr>
+        <p:spPr>
+          <a:xfrm>
+            <a:off x="3342894" y="1127760"/>
+            <a:ext cx="2560320" cy="1645920"/>
+          </a:xfrm>
+          <a:prstGeom prst="rect">
+            <a:avLst/>
+          </a:prstGeom>
+          <a:solidFill>
+            <a:srgbClr val="0E1628"/>
+          </a:solidFill>
+          <a:ln w="19050">
+            <a:solidFill>
+              <a:srgbClr val="22D3EE"/>
+            </a:solidFill>
+            <a:prstDash val="solid"/>
+          </a:ln>
+        </p:spPr>
+      </p:sp>
+      <p:sp>
+        <p:nvSpPr>
+          <p:cNvPr id="9" name="Text 6"/>
+          <p:cNvSpPr/>
+          <p:nvPr/>
+        </p:nvSpPr>
+        <p:spPr>
+          <a:xfrm>
+            <a:off x="5926074" y="1744579"/>
+            <a:ext cx="274320" cy="365760"/>
+          </a:xfrm>
+          <a:prstGeom prst="rect">
+            <a:avLst/>
+          </a:prstGeom>
+          <a:noFill/>
+          <a:ln/>
+        </p:spPr>
+        <p:txBody>
+          <a:bodyPr wrap="square" rtlCol="0" anchor="ctr"/>
+          <a:lstStyle/>
+          <a:p>
+            <a:pPr marL="0" indent="0" algn="ctr">
+              <a:buNone/>
+            </a:pPr>
+            <a:r>
+              <a:rPr lang="en-US" sz="2200" b="1" dirty="0">
+                <a:solidFill>
+                  <a:srgbClr val="22D3EE"/>
+                </a:solidFill>
+              </a:rPr>
+              <a:t>➔</a:t>
+            </a:r>
+            <a:endParaRPr lang="en-US" sz="2200" dirty="0"/>
+          </a:p>
+        </p:txBody>
+      </p:sp>
+      <p:sp>
+        <p:nvSpPr>
+          <p:cNvPr id="10" name="Text 7"/>
+          <p:cNvSpPr/>
+          <p:nvPr/>
+        </p:nvSpPr>
+        <p:spPr>
+          <a:xfrm>
+            <a:off x="3525774" y="1264920"/>
+            <a:ext cx="457200" cy="274320"/>
+          </a:xfrm>
+          <a:prstGeom prst="rect">
+            <a:avLst/>
+          </a:prstGeom>
+          <a:noFill/>
+          <a:ln/>
+        </p:spPr>
+        <p:txBody>
+          <a:bodyPr wrap="square" rtlCol="0" anchor="ctr"/>
+          <a:lstStyle/>
+          <a:p>
+            <a:pPr marL="0" indent="0" algn="ctr">
+              <a:buNone/>
+            </a:pPr>
+            <a:endParaRPr lang="en-US" sz="1000" b="1" dirty="0">
+              <a:solidFill>
+                <a:srgbClr val="22D3EE"/>
+              </a:solidFill>
+              <a:latin typeface="Consolas" pitchFamily="34" charset="0"/>
+              <a:ea typeface="Consolas" pitchFamily="34" charset="-122"/>
+              <a:cs typeface="Consolas" pitchFamily="34" charset="-120"/>
+            </a:endParaRPr>
+          </a:p>
+          <a:p>
+            <a:pPr marL="0" indent="0" algn="ctr">
+              <a:buNone/>
+            </a:pPr>
+            <a:r>
+              <a:rPr lang="en-US" sz="1000" b="1" dirty="0">
+                <a:solidFill>
+                  <a:srgbClr val="22D3EE"/>
                 </a:solidFill>
                 <a:latin typeface="Consolas" pitchFamily="34" charset="0"/>
                 <a:ea typeface="Consolas" pitchFamily="34" charset="-122"/>
                 <a:cs typeface="Consolas" pitchFamily="34" charset="-120"/>
               </a:rPr>
-              <a:t># Backend</a:t>
+              <a:t>02</a:t>
             </a:r>
             <a:endParaRPr lang="en-US" sz="1000" dirty="0"/>
           </a:p>
@@ -6244,14 +6462,14 @@
       </p:sp>
       <p:sp>
         <p:nvSpPr>
-          <p:cNvPr id="5" name="Text 2"/>
-          <p:cNvSpPr/>
-          <p:nvPr/>
-        </p:nvSpPr>
-        <p:spPr>
-          <a:xfrm>
-            <a:off x="411481" y="2054352"/>
-            <a:ext cx="3840480" cy="292608"/>
+          <p:cNvPr id="11" name="Text 8"/>
+          <p:cNvSpPr/>
+          <p:nvPr/>
+        </p:nvSpPr>
+        <p:spPr>
+          <a:xfrm>
+            <a:off x="3525774" y="1584960"/>
+            <a:ext cx="2194560" cy="365760"/>
           </a:xfrm>
           <a:prstGeom prst="rect">
             <a:avLst/>
@@ -6266,8 +6484,190 @@
             <a:pPr marL="0" indent="0">
               <a:buNone/>
             </a:pPr>
-            <a:r>
-              <a:rPr lang="en-US" sz="1050" dirty="0">
+            <a:endParaRPr lang="en-US" sz="1400" b="1" dirty="0">
+              <a:solidFill>
+                <a:srgbClr val="FFFFFF"/>
+              </a:solidFill>
+              <a:latin typeface="Segoe UI" pitchFamily="34" charset="0"/>
+              <a:ea typeface="Segoe UI" pitchFamily="34" charset="-122"/>
+              <a:cs typeface="Segoe UI" pitchFamily="34" charset="-120"/>
+            </a:endParaRPr>
+          </a:p>
+          <a:p>
+            <a:pPr marL="0" indent="0">
+              <a:buNone/>
+            </a:pPr>
+            <a:r>
+              <a:rPr lang="en-US" sz="1400" b="1" dirty="0">
+                <a:solidFill>
+                  <a:srgbClr val="FFFFFF"/>
+                </a:solidFill>
+                <a:latin typeface="Segoe UI" pitchFamily="34" charset="0"/>
+                <a:ea typeface="Segoe UI" pitchFamily="34" charset="-122"/>
+                <a:cs typeface="Segoe UI" pitchFamily="34" charset="-120"/>
+              </a:rPr>
+              <a:t>Backend development</a:t>
+            </a:r>
+            <a:endParaRPr lang="en-US" sz="1400" dirty="0"/>
+          </a:p>
+        </p:txBody>
+      </p:sp>
+      <p:sp>
+        <p:nvSpPr>
+          <p:cNvPr id="12" name="Text 9"/>
+          <p:cNvSpPr/>
+          <p:nvPr/>
+        </p:nvSpPr>
+        <p:spPr>
+          <a:xfrm>
+            <a:off x="3525774" y="1950720"/>
+            <a:ext cx="2194560" cy="640080"/>
+          </a:xfrm>
+          <a:prstGeom prst="rect">
+            <a:avLst/>
+          </a:prstGeom>
+          <a:noFill/>
+          <a:ln/>
+        </p:spPr>
+        <p:txBody>
+          <a:bodyPr wrap="square" rtlCol="0" anchor="ctr"/>
+          <a:lstStyle/>
+          <a:p>
+            <a:pPr algn="just"/>
+            <a:endParaRPr lang="en-US" sz="1000" dirty="0">
+              <a:solidFill>
+                <a:srgbClr val="8B96A8"/>
+              </a:solidFill>
+              <a:latin typeface="Segoe UI" pitchFamily="34" charset="0"/>
+              <a:ea typeface="Segoe UI" pitchFamily="34" charset="-122"/>
+              <a:cs typeface="Segoe UI" pitchFamily="34" charset="-120"/>
+            </a:endParaRPr>
+          </a:p>
+          <a:p>
+            <a:pPr algn="just"/>
+            <a:r>
+              <a:rPr lang="en-GB" sz="1000" dirty="0">
+                <a:solidFill>
+                  <a:srgbClr val="8B96A8"/>
+                </a:solidFill>
+                <a:latin typeface="Segoe UI" pitchFamily="34" charset="0"/>
+                <a:ea typeface="Segoe UI" pitchFamily="34" charset="-122"/>
+                <a:cs typeface="Segoe UI" pitchFamily="34" charset="-120"/>
+              </a:rPr>
+              <a:t>Integrating the </a:t>
+            </a:r>
+            <a:r>
+              <a:rPr lang="en-GB" sz="1000" b="1" dirty="0" err="1">
+                <a:solidFill>
+                  <a:srgbClr val="8B96A8"/>
+                </a:solidFill>
+                <a:latin typeface="Segoe UI" pitchFamily="34" charset="0"/>
+                <a:ea typeface="Segoe UI" pitchFamily="34" charset="-122"/>
+                <a:cs typeface="Segoe UI" pitchFamily="34" charset="-120"/>
+              </a:rPr>
+              <a:t>SQLAlchemy</a:t>
+            </a:r>
+            <a:r>
+              <a:rPr lang="en-GB" sz="1000" dirty="0">
+                <a:solidFill>
+                  <a:srgbClr val="8B96A8"/>
+                </a:solidFill>
+                <a:latin typeface="Segoe UI" pitchFamily="34" charset="0"/>
+                <a:ea typeface="Segoe UI" pitchFamily="34" charset="-122"/>
+                <a:cs typeface="Segoe UI" pitchFamily="34" charset="-120"/>
+              </a:rPr>
+              <a:t> engine for database management and using </a:t>
+            </a:r>
+            <a:r>
+              <a:rPr lang="en-GB" sz="1000" b="1" dirty="0" err="1">
+                <a:solidFill>
+                  <a:srgbClr val="8B96A8"/>
+                </a:solidFill>
+                <a:latin typeface="Segoe UI" pitchFamily="34" charset="0"/>
+                <a:ea typeface="Segoe UI" pitchFamily="34" charset="-122"/>
+                <a:cs typeface="Segoe UI" pitchFamily="34" charset="-120"/>
+              </a:rPr>
+              <a:t>Pydantic</a:t>
+            </a:r>
+            <a:r>
+              <a:rPr lang="en-GB" sz="1000" dirty="0">
+                <a:solidFill>
+                  <a:srgbClr val="8B96A8"/>
+                </a:solidFill>
+                <a:latin typeface="Segoe UI" pitchFamily="34" charset="0"/>
+                <a:ea typeface="Segoe UI" pitchFamily="34" charset="-122"/>
+                <a:cs typeface="Segoe UI" pitchFamily="34" charset="-120"/>
+              </a:rPr>
+              <a:t> for strict data validation.</a:t>
+            </a:r>
+            <a:endParaRPr lang="en-US" sz="1000" dirty="0"/>
+          </a:p>
+        </p:txBody>
+      </p:sp>
+      <p:sp>
+        <p:nvSpPr>
+          <p:cNvPr id="13" name="Shape 10"/>
+          <p:cNvSpPr/>
+          <p:nvPr/>
+        </p:nvSpPr>
+        <p:spPr>
+          <a:xfrm>
+            <a:off x="6223254" y="1127760"/>
+            <a:ext cx="2560320" cy="1645920"/>
+          </a:xfrm>
+          <a:prstGeom prst="rect">
+            <a:avLst/>
+          </a:prstGeom>
+          <a:solidFill>
+            <a:srgbClr val="0E1628"/>
+          </a:solidFill>
+          <a:ln w="19050">
+            <a:solidFill>
+              <a:srgbClr val="10B981"/>
+            </a:solidFill>
+            <a:prstDash val="solid"/>
+          </a:ln>
+        </p:spPr>
+      </p:sp>
+      <p:sp>
+        <p:nvSpPr>
+          <p:cNvPr id="14" name="Text 11"/>
+          <p:cNvSpPr/>
+          <p:nvPr/>
+        </p:nvSpPr>
+        <p:spPr>
+          <a:xfrm>
+            <a:off x="6406134" y="1264920"/>
+            <a:ext cx="457200" cy="274320"/>
+          </a:xfrm>
+          <a:prstGeom prst="rect">
+            <a:avLst/>
+          </a:prstGeom>
+          <a:noFill/>
+          <a:ln/>
+        </p:spPr>
+        <p:txBody>
+          <a:bodyPr wrap="square" rtlCol="0" anchor="ctr"/>
+          <a:lstStyle/>
+          <a:p>
+            <a:pPr marL="0" indent="0" algn="ctr">
+              <a:buNone/>
+            </a:pPr>
+            <a:endParaRPr lang="en-US" sz="1000" b="1" dirty="0">
+              <a:solidFill>
+                <a:srgbClr val="10B981"/>
+              </a:solidFill>
+              <a:latin typeface="Consolas" pitchFamily="34" charset="0"/>
+              <a:ea typeface="Consolas" pitchFamily="34" charset="-122"/>
+              <a:cs typeface="Consolas" pitchFamily="34" charset="-120"/>
+            </a:endParaRPr>
+          </a:p>
+          <a:p>
+            <a:pPr marL="0" indent="0" algn="ctr">
+              <a:buNone/>
+            </a:pPr>
+            <a:r>
+              <a:rPr lang="en-US" sz="1000" b="1" dirty="0">
                 <a:solidFill>
                   <a:srgbClr val="10B981"/>
                 </a:solidFill>
@@ -6275,22 +6675,22 @@
                 <a:ea typeface="Consolas" pitchFamily="34" charset="-122"/>
                 <a:cs typeface="Consolas" pitchFamily="34" charset="-120"/>
               </a:rPr>
-              <a:t>.\venv\Scripts\activate</a:t>
-            </a:r>
-            <a:endParaRPr lang="en-US" sz="1050" dirty="0"/>
-          </a:p>
-        </p:txBody>
-      </p:sp>
-      <p:sp>
-        <p:nvSpPr>
-          <p:cNvPr id="6" name="Text 3"/>
-          <p:cNvSpPr/>
-          <p:nvPr/>
-        </p:nvSpPr>
-        <p:spPr>
-          <a:xfrm>
-            <a:off x="411481" y="2374392"/>
-            <a:ext cx="3840480" cy="292608"/>
+              <a:t>03</a:t>
+            </a:r>
+            <a:endParaRPr lang="en-US" sz="1000" dirty="0"/>
+          </a:p>
+        </p:txBody>
+      </p:sp>
+      <p:sp>
+        <p:nvSpPr>
+          <p:cNvPr id="15" name="Text 12"/>
+          <p:cNvSpPr/>
+          <p:nvPr/>
+        </p:nvSpPr>
+        <p:spPr>
+          <a:xfrm>
+            <a:off x="6406134" y="1584960"/>
+            <a:ext cx="2194560" cy="365760"/>
           </a:xfrm>
           <a:prstGeom prst="rect">
             <a:avLst/>
@@ -6305,31 +6705,254 @@
             <a:pPr marL="0" indent="0">
               <a:buNone/>
             </a:pPr>
-            <a:r>
-              <a:rPr lang="en-US" sz="1050" dirty="0">
+            <a:endParaRPr lang="en-US" sz="1400" b="1" dirty="0">
+              <a:solidFill>
+                <a:srgbClr val="FFFFFF"/>
+              </a:solidFill>
+              <a:latin typeface="Segoe UI" pitchFamily="34" charset="0"/>
+              <a:ea typeface="Segoe UI" pitchFamily="34" charset="-122"/>
+              <a:cs typeface="Segoe UI" pitchFamily="34" charset="-120"/>
+            </a:endParaRPr>
+          </a:p>
+          <a:p>
+            <a:pPr marL="0" indent="0">
+              <a:buNone/>
+            </a:pPr>
+            <a:r>
+              <a:rPr lang="en-US" sz="1400" b="1" dirty="0">
+                <a:solidFill>
+                  <a:srgbClr val="FFFFFF"/>
+                </a:solidFill>
+                <a:latin typeface="Segoe UI" pitchFamily="34" charset="0"/>
+                <a:cs typeface="Segoe UI" pitchFamily="34" charset="-120"/>
+              </a:rPr>
+              <a:t>Data management</a:t>
+            </a:r>
+          </a:p>
+        </p:txBody>
+      </p:sp>
+      <p:sp>
+        <p:nvSpPr>
+          <p:cNvPr id="16" name="Text 13"/>
+          <p:cNvSpPr/>
+          <p:nvPr/>
+        </p:nvSpPr>
+        <p:spPr>
+          <a:xfrm>
+            <a:off x="6418326" y="1996239"/>
+            <a:ext cx="2331720" cy="640080"/>
+          </a:xfrm>
+          <a:prstGeom prst="rect">
+            <a:avLst/>
+          </a:prstGeom>
+          <a:noFill/>
+          <a:ln/>
+        </p:spPr>
+        <p:txBody>
+          <a:bodyPr wrap="square" rtlCol="0" anchor="ctr"/>
+          <a:lstStyle/>
+          <a:p>
+            <a:pPr algn="just"/>
+            <a:endParaRPr lang="en-GB" sz="1000" dirty="0">
+              <a:solidFill>
+                <a:srgbClr val="8B96A8"/>
+              </a:solidFill>
+              <a:latin typeface="Segoe UI" pitchFamily="34" charset="0"/>
+              <a:ea typeface="Segoe UI" pitchFamily="34" charset="-122"/>
+              <a:cs typeface="Segoe UI" pitchFamily="34" charset="-120"/>
+            </a:endParaRPr>
+          </a:p>
+          <a:p>
+            <a:pPr algn="just"/>
+            <a:r>
+              <a:rPr lang="en-GB" sz="1000" dirty="0">
+                <a:solidFill>
+                  <a:srgbClr val="8B96A8"/>
+                </a:solidFill>
+                <a:latin typeface="Segoe UI" pitchFamily="34" charset="0"/>
+                <a:ea typeface="Segoe UI" pitchFamily="34" charset="-122"/>
+                <a:cs typeface="Segoe UI" pitchFamily="34" charset="-120"/>
+              </a:rPr>
+              <a:t>Designing the </a:t>
+            </a:r>
+            <a:r>
+              <a:rPr lang="en-GB" sz="1000" b="1" dirty="0">
+                <a:solidFill>
+                  <a:srgbClr val="8B96A8"/>
+                </a:solidFill>
+                <a:latin typeface="Segoe UI" pitchFamily="34" charset="0"/>
+                <a:ea typeface="Segoe UI" pitchFamily="34" charset="-122"/>
+                <a:cs typeface="Segoe UI" pitchFamily="34" charset="-120"/>
+              </a:rPr>
+              <a:t>PostgreSQL</a:t>
+            </a:r>
+            <a:r>
+              <a:rPr lang="en-GB" sz="1000" dirty="0">
+                <a:solidFill>
+                  <a:srgbClr val="8B96A8"/>
+                </a:solidFill>
+                <a:latin typeface="Segoe UI" pitchFamily="34" charset="0"/>
+                <a:ea typeface="Segoe UI" pitchFamily="34" charset="-122"/>
+                <a:cs typeface="Segoe UI" pitchFamily="34" charset="-120"/>
+              </a:rPr>
+              <a:t> structure and generating interactive documentation via </a:t>
+            </a:r>
+            <a:r>
+              <a:rPr lang="en-GB" sz="1000" b="1" dirty="0">
+                <a:solidFill>
+                  <a:srgbClr val="8B96A8"/>
+                </a:solidFill>
+                <a:latin typeface="Segoe UI" pitchFamily="34" charset="0"/>
+                <a:ea typeface="Segoe UI" pitchFamily="34" charset="-122"/>
+                <a:cs typeface="Segoe UI" pitchFamily="34" charset="-120"/>
+              </a:rPr>
+              <a:t>Swagger</a:t>
+            </a:r>
+            <a:r>
+              <a:rPr lang="en-GB" sz="1000" dirty="0">
+                <a:solidFill>
+                  <a:srgbClr val="8B96A8"/>
+                </a:solidFill>
+                <a:latin typeface="Segoe UI" pitchFamily="34" charset="0"/>
+                <a:ea typeface="Segoe UI" pitchFamily="34" charset="-122"/>
+                <a:cs typeface="Segoe UI" pitchFamily="34" charset="-120"/>
+              </a:rPr>
+              <a:t> for endpoint testing.</a:t>
+            </a:r>
+            <a:endParaRPr lang="en-US" sz="1000" dirty="0">
+              <a:solidFill>
+                <a:srgbClr val="8B96A8"/>
+              </a:solidFill>
+              <a:latin typeface="Segoe UI" pitchFamily="34" charset="0"/>
+              <a:ea typeface="Segoe UI" pitchFamily="34" charset="-122"/>
+              <a:cs typeface="Segoe UI" pitchFamily="34" charset="-120"/>
+            </a:endParaRPr>
+          </a:p>
+        </p:txBody>
+      </p:sp>
+      <p:sp>
+        <p:nvSpPr>
+          <p:cNvPr id="17" name="Shape 14"/>
+          <p:cNvSpPr/>
+          <p:nvPr/>
+        </p:nvSpPr>
+        <p:spPr>
+          <a:xfrm>
+            <a:off x="462534" y="3139440"/>
+            <a:ext cx="2560320" cy="1645920"/>
+          </a:xfrm>
+          <a:prstGeom prst="rect">
+            <a:avLst/>
+          </a:prstGeom>
+          <a:solidFill>
+            <a:srgbClr val="0E1628"/>
+          </a:solidFill>
+          <a:ln w="19050">
+            <a:solidFill>
+              <a:srgbClr val="6366F1"/>
+            </a:solidFill>
+            <a:prstDash val="solid"/>
+          </a:ln>
+        </p:spPr>
+      </p:sp>
+      <p:sp>
+        <p:nvSpPr>
+          <p:cNvPr id="18" name="Text 15"/>
+          <p:cNvSpPr/>
+          <p:nvPr/>
+        </p:nvSpPr>
+        <p:spPr>
+          <a:xfrm>
+            <a:off x="3045714" y="3779520"/>
+            <a:ext cx="274320" cy="365760"/>
+          </a:xfrm>
+          <a:prstGeom prst="rect">
+            <a:avLst/>
+          </a:prstGeom>
+          <a:noFill/>
+          <a:ln/>
+        </p:spPr>
+        <p:txBody>
+          <a:bodyPr wrap="square" rtlCol="0" anchor="ctr"/>
+          <a:lstStyle/>
+          <a:p>
+            <a:pPr marL="0" indent="0" algn="ctr">
+              <a:buNone/>
+            </a:pPr>
+            <a:r>
+              <a:rPr lang="en-US" sz="2200" b="1" dirty="0">
                 <a:solidFill>
                   <a:srgbClr val="22D3EE"/>
+                </a:solidFill>
+              </a:rPr>
+              <a:t>➔</a:t>
+            </a:r>
+            <a:endParaRPr lang="en-US" sz="2200" dirty="0"/>
+          </a:p>
+        </p:txBody>
+      </p:sp>
+      <p:sp>
+        <p:nvSpPr>
+          <p:cNvPr id="19" name="Text 16"/>
+          <p:cNvSpPr/>
+          <p:nvPr/>
+        </p:nvSpPr>
+        <p:spPr>
+          <a:xfrm>
+            <a:off x="645414" y="3276600"/>
+            <a:ext cx="457200" cy="274320"/>
+          </a:xfrm>
+          <a:prstGeom prst="rect">
+            <a:avLst/>
+          </a:prstGeom>
+          <a:noFill/>
+          <a:ln/>
+        </p:spPr>
+        <p:txBody>
+          <a:bodyPr wrap="square" rtlCol="0" anchor="ctr"/>
+          <a:lstStyle/>
+          <a:p>
+            <a:pPr marL="0" indent="0" algn="ctr">
+              <a:buNone/>
+            </a:pPr>
+            <a:endParaRPr lang="en-US" sz="1000" b="1" dirty="0">
+              <a:solidFill>
+                <a:srgbClr val="6366F1"/>
+              </a:solidFill>
+              <a:latin typeface="Consolas" pitchFamily="34" charset="0"/>
+              <a:ea typeface="Consolas" pitchFamily="34" charset="-122"/>
+              <a:cs typeface="Consolas" pitchFamily="34" charset="-120"/>
+            </a:endParaRPr>
+          </a:p>
+          <a:p>
+            <a:pPr marL="0" indent="0" algn="ctr">
+              <a:buNone/>
+            </a:pPr>
+            <a:r>
+              <a:rPr lang="en-US" sz="1000" b="1" dirty="0">
+                <a:solidFill>
+                  <a:srgbClr val="6366F1"/>
                 </a:solidFill>
                 <a:latin typeface="Consolas" pitchFamily="34" charset="0"/>
                 <a:ea typeface="Consolas" pitchFamily="34" charset="-122"/>
                 <a:cs typeface="Consolas" pitchFamily="34" charset="-120"/>
               </a:rPr>
-              <a:t>pip install -r requirements.txt</a:t>
-            </a:r>
-            <a:endParaRPr lang="en-US" sz="1050" dirty="0"/>
-          </a:p>
-        </p:txBody>
-      </p:sp>
-      <p:sp>
-        <p:nvSpPr>
-          <p:cNvPr id="7" name="Text 4"/>
-          <p:cNvSpPr/>
-          <p:nvPr/>
-        </p:nvSpPr>
-        <p:spPr>
-          <a:xfrm>
-            <a:off x="411481" y="2694432"/>
-            <a:ext cx="3840480" cy="292608"/>
+              <a:t>04</a:t>
+            </a:r>
+            <a:endParaRPr lang="en-US" sz="1000" dirty="0"/>
+          </a:p>
+        </p:txBody>
+      </p:sp>
+      <p:sp>
+        <p:nvSpPr>
+          <p:cNvPr id="20" name="Text 17"/>
+          <p:cNvSpPr/>
+          <p:nvPr/>
+        </p:nvSpPr>
+        <p:spPr>
+          <a:xfrm>
+            <a:off x="645414" y="3596640"/>
+            <a:ext cx="2194560" cy="365760"/>
           </a:xfrm>
           <a:prstGeom prst="rect">
             <a:avLst/>
@@ -6344,41 +6967,422 @@
             <a:pPr marL="0" indent="0">
               <a:buNone/>
             </a:pPr>
-            <a:r>
-              <a:rPr lang="en-US" sz="1050" dirty="0">
-                <a:solidFill>
-                  <a:srgbClr val="6366F1"/>
+            <a:endParaRPr lang="en-US" sz="1400" b="1" dirty="0">
+              <a:solidFill>
+                <a:srgbClr val="FFFFFF"/>
+              </a:solidFill>
+              <a:latin typeface="Segoe UI" pitchFamily="34" charset="0"/>
+              <a:ea typeface="Segoe UI" pitchFamily="34" charset="-122"/>
+              <a:cs typeface="Segoe UI" pitchFamily="34" charset="-120"/>
+            </a:endParaRPr>
+          </a:p>
+          <a:p>
+            <a:pPr marL="0" indent="0">
+              <a:buNone/>
+            </a:pPr>
+            <a:r>
+              <a:rPr lang="en-US" sz="1400" b="1" dirty="0">
+                <a:solidFill>
+                  <a:srgbClr val="FFFFFF"/>
+                </a:solidFill>
+                <a:latin typeface="Segoe UI" pitchFamily="34" charset="0"/>
+                <a:ea typeface="Segoe UI" pitchFamily="34" charset="-122"/>
+                <a:cs typeface="Segoe UI" pitchFamily="34" charset="-120"/>
+              </a:rPr>
+              <a:t>React interface</a:t>
+            </a:r>
+            <a:endParaRPr lang="en-US" sz="1400" dirty="0"/>
+          </a:p>
+        </p:txBody>
+      </p:sp>
+      <p:sp>
+        <p:nvSpPr>
+          <p:cNvPr id="21" name="Text 18"/>
+          <p:cNvSpPr/>
+          <p:nvPr/>
+        </p:nvSpPr>
+        <p:spPr>
+          <a:xfrm>
+            <a:off x="645414" y="3962400"/>
+            <a:ext cx="2194560" cy="640080"/>
+          </a:xfrm>
+          <a:prstGeom prst="rect">
+            <a:avLst/>
+          </a:prstGeom>
+          <a:noFill/>
+          <a:ln/>
+        </p:spPr>
+        <p:txBody>
+          <a:bodyPr wrap="square" rtlCol="0" anchor="ctr"/>
+          <a:lstStyle/>
+          <a:p>
+            <a:pPr algn="just"/>
+            <a:endParaRPr lang="en-US" sz="1000" dirty="0">
+              <a:solidFill>
+                <a:srgbClr val="8B96A8"/>
+              </a:solidFill>
+              <a:latin typeface="Segoe UI" pitchFamily="34" charset="0"/>
+              <a:ea typeface="Segoe UI" pitchFamily="34" charset="-122"/>
+              <a:cs typeface="Segoe UI" pitchFamily="34" charset="-120"/>
+            </a:endParaRPr>
+          </a:p>
+          <a:p>
+            <a:pPr algn="just"/>
+            <a:r>
+              <a:rPr lang="en-GB" sz="1000" dirty="0">
+                <a:solidFill>
+                  <a:srgbClr val="8B96A8"/>
+                </a:solidFill>
+                <a:latin typeface="Segoe UI" pitchFamily="34" charset="0"/>
+                <a:ea typeface="Segoe UI" pitchFamily="34" charset="-122"/>
+                <a:cs typeface="Segoe UI" pitchFamily="34" charset="-120"/>
+              </a:rPr>
+              <a:t>Building </a:t>
+            </a:r>
+            <a:r>
+              <a:rPr lang="en-GB" sz="1000" b="1" dirty="0">
+                <a:solidFill>
+                  <a:srgbClr val="8B96A8"/>
+                </a:solidFill>
+                <a:latin typeface="Segoe UI" pitchFamily="34" charset="0"/>
+                <a:ea typeface="Segoe UI" pitchFamily="34" charset="-122"/>
+                <a:cs typeface="Segoe UI" pitchFamily="34" charset="-120"/>
+              </a:rPr>
+              <a:t>UI</a:t>
+            </a:r>
+            <a:r>
+              <a:rPr lang="en-GB" sz="1000" dirty="0">
+                <a:solidFill>
+                  <a:srgbClr val="8B96A8"/>
+                </a:solidFill>
+                <a:latin typeface="Segoe UI" pitchFamily="34" charset="0"/>
+                <a:ea typeface="Segoe UI" pitchFamily="34" charset="-122"/>
+                <a:cs typeface="Segoe UI" pitchFamily="34" charset="-120"/>
+              </a:rPr>
+              <a:t> components with </a:t>
+            </a:r>
+            <a:r>
+              <a:rPr lang="en-GB" sz="1000" b="1" dirty="0">
+                <a:solidFill>
+                  <a:srgbClr val="8B96A8"/>
+                </a:solidFill>
+                <a:latin typeface="Segoe UI" pitchFamily="34" charset="0"/>
+                <a:ea typeface="Segoe UI" pitchFamily="34" charset="-122"/>
+                <a:cs typeface="Segoe UI" pitchFamily="34" charset="-120"/>
+              </a:rPr>
+              <a:t>Tailwind CSS</a:t>
+            </a:r>
+            <a:r>
+              <a:rPr lang="en-GB" sz="1000" dirty="0">
+                <a:solidFill>
+                  <a:srgbClr val="8B96A8"/>
+                </a:solidFill>
+                <a:latin typeface="Segoe UI" pitchFamily="34" charset="0"/>
+                <a:ea typeface="Segoe UI" pitchFamily="34" charset="-122"/>
+                <a:cs typeface="Segoe UI" pitchFamily="34" charset="-120"/>
+              </a:rPr>
+              <a:t> and integrating the </a:t>
+            </a:r>
+            <a:r>
+              <a:rPr lang="en-GB" sz="1000" b="1" dirty="0">
+                <a:solidFill>
+                  <a:srgbClr val="8B96A8"/>
+                </a:solidFill>
+                <a:latin typeface="Segoe UI" pitchFamily="34" charset="0"/>
+                <a:ea typeface="Segoe UI" pitchFamily="34" charset="-122"/>
+                <a:cs typeface="Segoe UI" pitchFamily="34" charset="-120"/>
+              </a:rPr>
+              <a:t>REST API</a:t>
+            </a:r>
+            <a:r>
+              <a:rPr lang="en-GB" sz="1000" dirty="0">
+                <a:solidFill>
+                  <a:srgbClr val="8B96A8"/>
+                </a:solidFill>
+                <a:latin typeface="Segoe UI" pitchFamily="34" charset="0"/>
+                <a:ea typeface="Segoe UI" pitchFamily="34" charset="-122"/>
+                <a:cs typeface="Segoe UI" pitchFamily="34" charset="-120"/>
+              </a:rPr>
+              <a:t> logic.</a:t>
+            </a:r>
+            <a:endParaRPr lang="en-US" sz="1000" dirty="0"/>
+          </a:p>
+        </p:txBody>
+      </p:sp>
+      <p:sp>
+        <p:nvSpPr>
+          <p:cNvPr id="22" name="Shape 19"/>
+          <p:cNvSpPr/>
+          <p:nvPr/>
+        </p:nvSpPr>
+        <p:spPr>
+          <a:xfrm>
+            <a:off x="3342894" y="3139440"/>
+            <a:ext cx="2560320" cy="1645920"/>
+          </a:xfrm>
+          <a:prstGeom prst="rect">
+            <a:avLst/>
+          </a:prstGeom>
+          <a:solidFill>
+            <a:srgbClr val="0E1628"/>
+          </a:solidFill>
+          <a:ln w="19050">
+            <a:solidFill>
+              <a:srgbClr val="FFFFFF"/>
+            </a:solidFill>
+            <a:prstDash val="solid"/>
+          </a:ln>
+        </p:spPr>
+      </p:sp>
+      <p:sp>
+        <p:nvSpPr>
+          <p:cNvPr id="23" name="Text 20"/>
+          <p:cNvSpPr/>
+          <p:nvPr/>
+        </p:nvSpPr>
+        <p:spPr>
+          <a:xfrm>
+            <a:off x="5931408" y="3771900"/>
+            <a:ext cx="274320" cy="365760"/>
+          </a:xfrm>
+          <a:prstGeom prst="rect">
+            <a:avLst/>
+          </a:prstGeom>
+          <a:noFill/>
+          <a:ln/>
+        </p:spPr>
+        <p:txBody>
+          <a:bodyPr wrap="square" rtlCol="0" anchor="ctr"/>
+          <a:lstStyle/>
+          <a:p>
+            <a:pPr marL="0" indent="0" algn="ctr">
+              <a:buNone/>
+            </a:pPr>
+            <a:r>
+              <a:rPr lang="en-US" sz="2200" b="1" dirty="0">
+                <a:solidFill>
+                  <a:srgbClr val="22D3EE"/>
+                </a:solidFill>
+              </a:rPr>
+              <a:t>➔</a:t>
+            </a:r>
+            <a:endParaRPr lang="en-US" sz="2200" dirty="0"/>
+          </a:p>
+        </p:txBody>
+      </p:sp>
+      <p:sp>
+        <p:nvSpPr>
+          <p:cNvPr id="24" name="Text 21"/>
+          <p:cNvSpPr/>
+          <p:nvPr/>
+        </p:nvSpPr>
+        <p:spPr>
+          <a:xfrm>
+            <a:off x="3525774" y="3276600"/>
+            <a:ext cx="457200" cy="274320"/>
+          </a:xfrm>
+          <a:prstGeom prst="rect">
+            <a:avLst/>
+          </a:prstGeom>
+          <a:noFill/>
+          <a:ln/>
+        </p:spPr>
+        <p:txBody>
+          <a:bodyPr wrap="square" rtlCol="0" anchor="ctr"/>
+          <a:lstStyle/>
+          <a:p>
+            <a:pPr marL="0" indent="0" algn="ctr">
+              <a:buNone/>
+            </a:pPr>
+            <a:endParaRPr lang="en-US" sz="1000" b="1" dirty="0">
+              <a:solidFill>
+                <a:srgbClr val="FFFFFF"/>
+              </a:solidFill>
+              <a:latin typeface="Consolas" pitchFamily="34" charset="0"/>
+              <a:ea typeface="Consolas" pitchFamily="34" charset="-122"/>
+              <a:cs typeface="Consolas" pitchFamily="34" charset="-120"/>
+            </a:endParaRPr>
+          </a:p>
+          <a:p>
+            <a:pPr marL="0" indent="0" algn="ctr">
+              <a:buNone/>
+            </a:pPr>
+            <a:r>
+              <a:rPr lang="en-US" sz="1000" b="1" dirty="0">
+                <a:solidFill>
+                  <a:srgbClr val="FFFFFF"/>
                 </a:solidFill>
                 <a:latin typeface="Consolas" pitchFamily="34" charset="0"/>
                 <a:ea typeface="Consolas" pitchFamily="34" charset="-122"/>
                 <a:cs typeface="Consolas" pitchFamily="34" charset="-120"/>
               </a:rPr>
-              <a:t>uvicorn app.main:app --reload</a:t>
-            </a:r>
-            <a:endParaRPr lang="en-US" sz="1050" dirty="0"/>
-          </a:p>
-        </p:txBody>
-      </p:sp>
-      <p:sp>
-        <p:nvSpPr>
-          <p:cNvPr id="8" name="Shape 5"/>
-          <p:cNvSpPr/>
-          <p:nvPr/>
-        </p:nvSpPr>
-        <p:spPr>
-          <a:xfrm>
-            <a:off x="228601" y="3261360"/>
-            <a:ext cx="4206240" cy="1417320"/>
+              <a:t>05</a:t>
+            </a:r>
+            <a:endParaRPr lang="en-US" sz="1000" dirty="0"/>
+          </a:p>
+        </p:txBody>
+      </p:sp>
+      <p:sp>
+        <p:nvSpPr>
+          <p:cNvPr id="25" name="Text 22"/>
+          <p:cNvSpPr/>
+          <p:nvPr/>
+        </p:nvSpPr>
+        <p:spPr>
+          <a:xfrm>
+            <a:off x="3525774" y="3596640"/>
+            <a:ext cx="2194560" cy="365760"/>
+          </a:xfrm>
+          <a:prstGeom prst="rect">
+            <a:avLst/>
+          </a:prstGeom>
+          <a:noFill/>
+          <a:ln/>
+        </p:spPr>
+        <p:txBody>
+          <a:bodyPr wrap="square" rtlCol="0" anchor="ctr"/>
+          <a:lstStyle/>
+          <a:p>
+            <a:pPr marL="0" indent="0">
+              <a:buNone/>
+            </a:pPr>
+            <a:endParaRPr lang="en-US" sz="1400" b="1" dirty="0">
+              <a:solidFill>
+                <a:srgbClr val="FFFFFF"/>
+              </a:solidFill>
+              <a:latin typeface="Segoe UI" pitchFamily="34" charset="0"/>
+              <a:ea typeface="Segoe UI" pitchFamily="34" charset="-122"/>
+              <a:cs typeface="Segoe UI" pitchFamily="34" charset="-120"/>
+            </a:endParaRPr>
+          </a:p>
+          <a:p>
+            <a:r>
+              <a:rPr lang="en-US" sz="1400" b="1" dirty="0">
+                <a:solidFill>
+                  <a:srgbClr val="FFFFFF"/>
+                </a:solidFill>
+                <a:latin typeface="Segoe UI" pitchFamily="34" charset="0"/>
+                <a:ea typeface="Segoe UI" pitchFamily="34" charset="-122"/>
+                <a:cs typeface="Segoe UI" pitchFamily="34" charset="-120"/>
+              </a:rPr>
+              <a:t>Git synchronization</a:t>
+            </a:r>
+            <a:endParaRPr lang="en-US" sz="1400" dirty="0"/>
+          </a:p>
+        </p:txBody>
+      </p:sp>
+      <p:sp>
+        <p:nvSpPr>
+          <p:cNvPr id="26" name="Text 23"/>
+          <p:cNvSpPr/>
+          <p:nvPr/>
+        </p:nvSpPr>
+        <p:spPr>
+          <a:xfrm>
+            <a:off x="3525774" y="3962400"/>
+            <a:ext cx="2194560" cy="640080"/>
+          </a:xfrm>
+          <a:prstGeom prst="rect">
+            <a:avLst/>
+          </a:prstGeom>
+          <a:noFill/>
+          <a:ln/>
+        </p:spPr>
+        <p:txBody>
+          <a:bodyPr wrap="square" rtlCol="0" anchor="ctr"/>
+          <a:lstStyle/>
+          <a:p>
+            <a:pPr algn="just"/>
+            <a:endParaRPr lang="en-US" sz="1000" dirty="0">
+              <a:solidFill>
+                <a:srgbClr val="8B96A8"/>
+              </a:solidFill>
+              <a:latin typeface="Segoe UI" pitchFamily="34" charset="0"/>
+              <a:ea typeface="Segoe UI" pitchFamily="34" charset="-122"/>
+              <a:cs typeface="Segoe UI" pitchFamily="34" charset="-120"/>
+            </a:endParaRPr>
+          </a:p>
+          <a:p>
+            <a:pPr algn="just"/>
+            <a:r>
+              <a:rPr lang="en-GB" sz="1000" dirty="0">
+                <a:solidFill>
+                  <a:srgbClr val="8B96A8"/>
+                </a:solidFill>
+                <a:latin typeface="Segoe UI" pitchFamily="34" charset="0"/>
+                <a:ea typeface="Segoe UI" pitchFamily="34" charset="-122"/>
+                <a:cs typeface="Segoe UI" pitchFamily="34" charset="-120"/>
+              </a:rPr>
+              <a:t>Source code versioning using </a:t>
+            </a:r>
+            <a:r>
+              <a:rPr lang="en-GB" sz="1000" b="1" dirty="0">
+                <a:solidFill>
+                  <a:srgbClr val="8B96A8"/>
+                </a:solidFill>
+                <a:latin typeface="Segoe UI" pitchFamily="34" charset="0"/>
+                <a:ea typeface="Segoe UI" pitchFamily="34" charset="-122"/>
+                <a:cs typeface="Segoe UI" pitchFamily="34" charset="-120"/>
+              </a:rPr>
+              <a:t>GitHub</a:t>
+            </a:r>
+            <a:r>
+              <a:rPr lang="en-GB" sz="1000" dirty="0">
+                <a:solidFill>
+                  <a:srgbClr val="8B96A8"/>
+                </a:solidFill>
+                <a:latin typeface="Segoe UI" pitchFamily="34" charset="0"/>
+                <a:ea typeface="Segoe UI" pitchFamily="34" charset="-122"/>
+                <a:cs typeface="Segoe UI" pitchFamily="34" charset="-120"/>
+              </a:rPr>
+              <a:t> and configuring the relational database instance in </a:t>
+            </a:r>
+            <a:r>
+              <a:rPr lang="en-GB" sz="1000" b="1" dirty="0" err="1">
+                <a:solidFill>
+                  <a:srgbClr val="8B96A8"/>
+                </a:solidFill>
+                <a:latin typeface="Segoe UI" pitchFamily="34" charset="0"/>
+                <a:ea typeface="Segoe UI" pitchFamily="34" charset="-122"/>
+                <a:cs typeface="Segoe UI" pitchFamily="34" charset="-120"/>
+              </a:rPr>
+              <a:t>Supabase</a:t>
+            </a:r>
+            <a:r>
+              <a:rPr lang="en-GB" sz="1000" dirty="0">
+                <a:solidFill>
+                  <a:srgbClr val="8B96A8"/>
+                </a:solidFill>
+                <a:latin typeface="Segoe UI" pitchFamily="34" charset="0"/>
+                <a:ea typeface="Segoe UI" pitchFamily="34" charset="-122"/>
+                <a:cs typeface="Segoe UI" pitchFamily="34" charset="-120"/>
+              </a:rPr>
+              <a:t>.</a:t>
+            </a:r>
+            <a:endParaRPr lang="en-US" sz="1000" dirty="0"/>
+          </a:p>
+        </p:txBody>
+      </p:sp>
+      <p:sp>
+        <p:nvSpPr>
+          <p:cNvPr id="27" name="Shape 24"/>
+          <p:cNvSpPr/>
+          <p:nvPr/>
+        </p:nvSpPr>
+        <p:spPr>
+          <a:xfrm>
+            <a:off x="6223254" y="3139440"/>
+            <a:ext cx="2560320" cy="1645920"/>
           </a:xfrm>
           <a:prstGeom prst="rect">
             <a:avLst/>
           </a:prstGeom>
           <a:solidFill>
-            <a:srgbClr val="060C18"/>
+            <a:srgbClr val="0E1628"/>
           </a:solidFill>
-          <a:ln w="12700">
+          <a:ln w="19050">
             <a:solidFill>
-              <a:srgbClr val="1C2A40"/>
+              <a:srgbClr val="F59E0B"/>
             </a:solidFill>
             <a:prstDash val="solid"/>
           </a:ln>
@@ -6386,14 +7390,66 @@
       </p:sp>
       <p:sp>
         <p:nvSpPr>
-          <p:cNvPr id="9" name="Text 6"/>
-          <p:cNvSpPr/>
-          <p:nvPr/>
-        </p:nvSpPr>
-        <p:spPr>
-          <a:xfrm>
-            <a:off x="411481" y="3334512"/>
-            <a:ext cx="3840480" cy="256032"/>
+          <p:cNvPr id="28" name="Text 25"/>
+          <p:cNvSpPr/>
+          <p:nvPr/>
+        </p:nvSpPr>
+        <p:spPr>
+          <a:xfrm>
+            <a:off x="6406134" y="3276600"/>
+            <a:ext cx="457200" cy="274320"/>
+          </a:xfrm>
+          <a:prstGeom prst="rect">
+            <a:avLst/>
+          </a:prstGeom>
+          <a:noFill/>
+          <a:ln/>
+        </p:spPr>
+        <p:txBody>
+          <a:bodyPr wrap="square" rtlCol="0" anchor="ctr"/>
+          <a:lstStyle/>
+          <a:p>
+            <a:pPr marL="0" indent="0" algn="ctr">
+              <a:buNone/>
+            </a:pPr>
+            <a:endParaRPr lang="en-US" sz="1000" b="1" dirty="0">
+              <a:solidFill>
+                <a:srgbClr val="F59E0B"/>
+              </a:solidFill>
+              <a:latin typeface="Consolas" pitchFamily="34" charset="0"/>
+              <a:ea typeface="Consolas" pitchFamily="34" charset="-122"/>
+              <a:cs typeface="Consolas" pitchFamily="34" charset="-120"/>
+            </a:endParaRPr>
+          </a:p>
+          <a:p>
+            <a:pPr marL="0" indent="0" algn="ctr">
+              <a:buNone/>
+            </a:pPr>
+            <a:r>
+              <a:rPr lang="en-US" sz="1000" b="1" dirty="0">
+                <a:solidFill>
+                  <a:srgbClr val="F59E0B"/>
+                </a:solidFill>
+                <a:latin typeface="Consolas" pitchFamily="34" charset="0"/>
+                <a:ea typeface="Consolas" pitchFamily="34" charset="-122"/>
+                <a:cs typeface="Consolas" pitchFamily="34" charset="-120"/>
+              </a:rPr>
+              <a:t>06</a:t>
+            </a:r>
+            <a:endParaRPr lang="en-US" sz="1000" dirty="0"/>
+          </a:p>
+        </p:txBody>
+      </p:sp>
+      <p:sp>
+        <p:nvSpPr>
+          <p:cNvPr id="29" name="Text 26"/>
+          <p:cNvSpPr/>
+          <p:nvPr/>
+        </p:nvSpPr>
+        <p:spPr>
+          <a:xfrm>
+            <a:off x="6406134" y="3596640"/>
+            <a:ext cx="2194560" cy="365760"/>
           </a:xfrm>
           <a:prstGeom prst="rect">
             <a:avLst/>
@@ -6408,70 +7464,44 @@
             <a:pPr marL="0" indent="0">
               <a:buNone/>
             </a:pPr>
-            <a:r>
-              <a:rPr lang="en-US" sz="1000" dirty="0">
-                <a:solidFill>
-                  <a:srgbClr val="8B96A8"/>
-                </a:solidFill>
-                <a:latin typeface="Consolas" pitchFamily="34" charset="0"/>
-                <a:ea typeface="Consolas" pitchFamily="34" charset="-122"/>
-                <a:cs typeface="Consolas" pitchFamily="34" charset="-120"/>
-              </a:rPr>
-              <a:t># Frontend</a:t>
-            </a:r>
-            <a:endParaRPr lang="en-US" sz="1000" dirty="0"/>
-          </a:p>
-        </p:txBody>
-      </p:sp>
-      <p:sp>
-        <p:nvSpPr>
-          <p:cNvPr id="10" name="Text 7"/>
-          <p:cNvSpPr/>
-          <p:nvPr/>
-        </p:nvSpPr>
-        <p:spPr>
-          <a:xfrm>
-            <a:off x="411481" y="3627120"/>
-            <a:ext cx="3840480" cy="256032"/>
-          </a:xfrm>
-          <a:prstGeom prst="rect">
-            <a:avLst/>
-          </a:prstGeom>
-          <a:noFill/>
-          <a:ln/>
-        </p:spPr>
-        <p:txBody>
-          <a:bodyPr wrap="square" rtlCol="0" anchor="ctr"/>
-          <a:lstStyle/>
+            <a:endParaRPr lang="en-US" sz="1400" b="1" dirty="0">
+              <a:solidFill>
+                <a:srgbClr val="FFFFFF"/>
+              </a:solidFill>
+              <a:latin typeface="Segoe UI" pitchFamily="34" charset="0"/>
+              <a:ea typeface="Segoe UI" pitchFamily="34" charset="-122"/>
+              <a:cs typeface="Segoe UI" pitchFamily="34" charset="-120"/>
+            </a:endParaRPr>
+          </a:p>
           <a:p>
             <a:pPr marL="0" indent="0">
               <a:buNone/>
             </a:pPr>
             <a:r>
-              <a:rPr lang="en-US" sz="1050" dirty="0">
-                <a:solidFill>
-                  <a:srgbClr val="10B981"/>
-                </a:solidFill>
-                <a:latin typeface="Consolas" pitchFamily="34" charset="0"/>
-                <a:ea typeface="Consolas" pitchFamily="34" charset="-122"/>
-                <a:cs typeface="Consolas" pitchFamily="34" charset="-120"/>
-              </a:rPr>
-              <a:t>npm install</a:t>
-            </a:r>
-            <a:endParaRPr lang="en-US" sz="1050" dirty="0"/>
-          </a:p>
-        </p:txBody>
-      </p:sp>
-      <p:sp>
-        <p:nvSpPr>
-          <p:cNvPr id="11" name="Text 8"/>
-          <p:cNvSpPr/>
-          <p:nvPr/>
-        </p:nvSpPr>
-        <p:spPr>
-          <a:xfrm>
-            <a:off x="411481" y="3901440"/>
-            <a:ext cx="3840480" cy="256032"/>
+              <a:rPr lang="en-US" sz="1400" b="1" dirty="0">
+                <a:solidFill>
+                  <a:srgbClr val="FFFFFF"/>
+                </a:solidFill>
+                <a:latin typeface="Segoe UI" pitchFamily="34" charset="0"/>
+                <a:ea typeface="Segoe UI" pitchFamily="34" charset="-122"/>
+                <a:cs typeface="Segoe UI" pitchFamily="34" charset="-120"/>
+              </a:rPr>
+              <a:t>Cloud launch</a:t>
+            </a:r>
+            <a:endParaRPr lang="en-US" sz="1400" dirty="0"/>
+          </a:p>
+        </p:txBody>
+      </p:sp>
+      <p:sp>
+        <p:nvSpPr>
+          <p:cNvPr id="30" name="Text 27"/>
+          <p:cNvSpPr/>
+          <p:nvPr/>
+        </p:nvSpPr>
+        <p:spPr>
+          <a:xfrm>
+            <a:off x="6406134" y="3962400"/>
+            <a:ext cx="2343912" cy="640080"/>
           </a:xfrm>
           <a:prstGeom prst="rect">
             <a:avLst/>
@@ -6483,91 +7513,75 @@
           <a:bodyPr wrap="square" rtlCol="0" anchor="ctr"/>
           <a:lstStyle/>
           <a:p>
-            <a:pPr marL="0" indent="0">
-              <a:buNone/>
-            </a:pPr>
-            <a:r>
-              <a:rPr lang="en-US" sz="1050" dirty="0">
-                <a:solidFill>
-                  <a:srgbClr val="22D3EE"/>
-                </a:solidFill>
-                <a:latin typeface="Consolas" pitchFamily="34" charset="0"/>
-                <a:ea typeface="Consolas" pitchFamily="34" charset="-122"/>
-                <a:cs typeface="Consolas" pitchFamily="34" charset="-120"/>
-              </a:rPr>
-              <a:t>npm run dev        # local</a:t>
-            </a:r>
-            <a:endParaRPr lang="en-US" sz="1050" dirty="0"/>
-          </a:p>
-        </p:txBody>
-      </p:sp>
-      <p:sp>
-        <p:nvSpPr>
-          <p:cNvPr id="12" name="Text 9"/>
-          <p:cNvSpPr/>
-          <p:nvPr/>
-        </p:nvSpPr>
-        <p:spPr>
-          <a:xfrm>
-            <a:off x="411481" y="4175760"/>
-            <a:ext cx="3840480" cy="256032"/>
-          </a:xfrm>
-          <a:prstGeom prst="rect">
-            <a:avLst/>
-          </a:prstGeom>
-          <a:noFill/>
-          <a:ln/>
-        </p:spPr>
-        <p:txBody>
-          <a:bodyPr wrap="square" rtlCol="0" anchor="ctr"/>
-          <a:lstStyle/>
-          <a:p>
-            <a:pPr marL="0" indent="0">
-              <a:buNone/>
-            </a:pPr>
-            <a:r>
-              <a:rPr lang="en-US" sz="1050" dirty="0">
-                <a:solidFill>
-                  <a:srgbClr val="6366F1"/>
-                </a:solidFill>
-                <a:latin typeface="Consolas" pitchFamily="34" charset="0"/>
-                <a:ea typeface="Consolas" pitchFamily="34" charset="-122"/>
-                <a:cs typeface="Consolas" pitchFamily="34" charset="-120"/>
-              </a:rPr>
-              <a:t>npm run build      # production</a:t>
-            </a:r>
-            <a:endParaRPr lang="en-US" sz="1050" dirty="0"/>
-          </a:p>
-        </p:txBody>
-      </p:sp>
-      <p:sp>
-        <p:nvSpPr>
-          <p:cNvPr id="14" name="Shape 10"/>
-          <p:cNvSpPr/>
-          <p:nvPr/>
-        </p:nvSpPr>
-        <p:spPr>
-          <a:xfrm>
-            <a:off x="4853940" y="1527048"/>
-            <a:ext cx="1874520" cy="1554480"/>
-          </a:xfrm>
-          <a:prstGeom prst="rect">
-            <a:avLst/>
-          </a:prstGeom>
-          <a:solidFill>
-            <a:srgbClr val="0E1628"/>
-          </a:solidFill>
-          <a:ln w="12700">
-            <a:solidFill>
-              <a:srgbClr val="1C2A40"/>
-            </a:solidFill>
-            <a:prstDash val="solid"/>
-          </a:ln>
-        </p:spPr>
+            <a:pPr algn="just"/>
+            <a:r>
+              <a:rPr lang="en-GB" sz="1000" dirty="0">
+                <a:solidFill>
+                  <a:srgbClr val="8B96A8"/>
+                </a:solidFill>
+                <a:latin typeface="Segoe UI" pitchFamily="34" charset="0"/>
+                <a:ea typeface="Segoe UI" pitchFamily="34" charset="-122"/>
+                <a:cs typeface="Segoe UI" pitchFamily="34" charset="-120"/>
+              </a:rPr>
+              <a:t>Hosting the frontend application on </a:t>
+            </a:r>
+            <a:r>
+              <a:rPr lang="en-GB" sz="1000" b="1" dirty="0" err="1">
+                <a:solidFill>
+                  <a:srgbClr val="8B96A8"/>
+                </a:solidFill>
+                <a:latin typeface="Segoe UI" pitchFamily="34" charset="0"/>
+                <a:ea typeface="Segoe UI" pitchFamily="34" charset="-122"/>
+                <a:cs typeface="Segoe UI" pitchFamily="34" charset="-120"/>
+              </a:rPr>
+              <a:t>Hostinger</a:t>
+            </a:r>
+            <a:r>
+              <a:rPr lang="en-GB" sz="1000" dirty="0">
+                <a:solidFill>
+                  <a:srgbClr val="8B96A8"/>
+                </a:solidFill>
+                <a:latin typeface="Segoe UI" pitchFamily="34" charset="0"/>
+                <a:ea typeface="Segoe UI" pitchFamily="34" charset="-122"/>
+                <a:cs typeface="Segoe UI" pitchFamily="34" charset="-120"/>
+              </a:rPr>
+              <a:t> and deploying the backend service on the </a:t>
+            </a:r>
+            <a:r>
+              <a:rPr lang="en-GB" sz="1000" b="1" dirty="0">
+                <a:solidFill>
+                  <a:srgbClr val="8B96A8"/>
+                </a:solidFill>
+                <a:latin typeface="Segoe UI" pitchFamily="34" charset="0"/>
+                <a:ea typeface="Segoe UI" pitchFamily="34" charset="-122"/>
+                <a:cs typeface="Segoe UI" pitchFamily="34" charset="-120"/>
+              </a:rPr>
+              <a:t>Render</a:t>
+            </a:r>
+            <a:r>
+              <a:rPr lang="en-GB" sz="1000" dirty="0">
+                <a:solidFill>
+                  <a:srgbClr val="8B96A8"/>
+                </a:solidFill>
+                <a:latin typeface="Segoe UI" pitchFamily="34" charset="0"/>
+                <a:ea typeface="Segoe UI" pitchFamily="34" charset="-122"/>
+                <a:cs typeface="Segoe UI" pitchFamily="34" charset="-120"/>
+              </a:rPr>
+              <a:t> platform.</a:t>
+            </a:r>
+            <a:endParaRPr lang="en-US" sz="1000" dirty="0"/>
+          </a:p>
+        </p:txBody>
       </p:sp>
       <p:pic>
         <p:nvPicPr>
-          <p:cNvPr id="15" name="Image 2"/>
+          <p:cNvPr id="32" name="Image 2">
+            <a:extLst>
+              <a:ext uri="{FF2B5EF4-FFF2-40B4-BE49-F238E27FC236}">
+                <a16:creationId xmlns:a16="http://schemas.microsoft.com/office/drawing/2014/main" id="{E3B6C81A-DA29-EE96-4060-522DD42A02C5}"/>
+              </a:ext>
+            </a:extLst>
+          </p:cNvPr>
           <p:cNvPicPr>
             <a:picLocks noChangeAspect="1"/>
           </p:cNvPicPr>
@@ -6575,12 +7589,324 @@
         </p:nvPicPr>
         <p:blipFill>
           <a:blip r:embed="rId3"/>
+          <a:srcRect l="25333" r="25333"/>
+          <a:stretch/>
+        </p:blipFill>
+        <p:spPr>
+          <a:xfrm>
+            <a:off x="1914144" y="1211580"/>
+            <a:ext cx="571500" cy="530352"/>
+          </a:xfrm>
+          <a:prstGeom prst="ellipse">
+            <a:avLst/>
+          </a:prstGeom>
+          <a:ln w="63500" cap="rnd">
+            <a:noFill/>
+          </a:ln>
+          <a:effectLst>
+            <a:outerShdw blurRad="381000" dist="292100" dir="5400000" sx="-80000" sy="-18000" rotWithShape="0">
+              <a:srgbClr val="000000">
+                <a:alpha val="22000"/>
+              </a:srgbClr>
+            </a:outerShdw>
+          </a:effectLst>
+        </p:spPr>
+      </p:pic>
+      <p:pic>
+        <p:nvPicPr>
+          <p:cNvPr id="33" name="Image 3">
+            <a:extLst>
+              <a:ext uri="{FF2B5EF4-FFF2-40B4-BE49-F238E27FC236}">
+                <a16:creationId xmlns:a16="http://schemas.microsoft.com/office/drawing/2014/main" id="{02F8A32E-CEFF-4100-A2BF-7813295BD274}"/>
+              </a:ext>
+            </a:extLst>
+          </p:cNvPr>
+          <p:cNvPicPr>
+            <a:picLocks noChangeAspect="1"/>
+          </p:cNvPicPr>
+          <p:nvPr/>
+        </p:nvPicPr>
+        <p:blipFill>
+          <a:blip r:embed="rId4"/>
           <a:srcRect/>
           <a:stretch/>
         </p:blipFill>
         <p:spPr>
           <a:xfrm>
-            <a:off x="4991100" y="1691640"/>
+            <a:off x="1166622" y="1222558"/>
+            <a:ext cx="530352" cy="537462"/>
+          </a:xfrm>
+          <a:prstGeom prst="ellipse">
+            <a:avLst/>
+          </a:prstGeom>
+          <a:ln w="63500" cap="rnd">
+            <a:noFill/>
+          </a:ln>
+          <a:effectLst>
+            <a:outerShdw blurRad="381000" dist="292100" dir="5400000" sx="-80000" sy="-18000" rotWithShape="0">
+              <a:srgbClr val="000000">
+                <a:alpha val="22000"/>
+              </a:srgbClr>
+            </a:outerShdw>
+          </a:effectLst>
+        </p:spPr>
+      </p:pic>
+      <p:pic>
+        <p:nvPicPr>
+          <p:cNvPr id="34" name="Image 6">
+            <a:extLst>
+              <a:ext uri="{FF2B5EF4-FFF2-40B4-BE49-F238E27FC236}">
+                <a16:creationId xmlns:a16="http://schemas.microsoft.com/office/drawing/2014/main" id="{B7EF75AA-A841-85D5-CE82-04929CB7DFC8}"/>
+              </a:ext>
+            </a:extLst>
+          </p:cNvPr>
+          <p:cNvPicPr>
+            <a:picLocks noChangeAspect="1"/>
+          </p:cNvPicPr>
+          <p:nvPr/>
+        </p:nvPicPr>
+        <p:blipFill>
+          <a:blip r:embed="rId5"/>
+          <a:srcRect/>
+          <a:stretch/>
+        </p:blipFill>
+        <p:spPr>
+          <a:xfrm>
+            <a:off x="4891279" y="1211580"/>
+            <a:ext cx="530352" cy="530352"/>
+          </a:xfrm>
+          <a:prstGeom prst="ellipse">
+            <a:avLst/>
+          </a:prstGeom>
+          <a:ln w="63500" cap="rnd">
+            <a:noFill/>
+          </a:ln>
+          <a:effectLst>
+            <a:outerShdw blurRad="381000" dist="292100" dir="5400000" sx="-80000" sy="-18000" rotWithShape="0">
+              <a:srgbClr val="000000">
+                <a:alpha val="22000"/>
+              </a:srgbClr>
+            </a:outerShdw>
+          </a:effectLst>
+        </p:spPr>
+      </p:pic>
+      <p:pic>
+        <p:nvPicPr>
+          <p:cNvPr id="35" name="Image 2">
+            <a:extLst>
+              <a:ext uri="{FF2B5EF4-FFF2-40B4-BE49-F238E27FC236}">
+                <a16:creationId xmlns:a16="http://schemas.microsoft.com/office/drawing/2014/main" id="{47AC1677-18BA-E0A2-BDB1-DF44A52C5F11}"/>
+              </a:ext>
+            </a:extLst>
+          </p:cNvPr>
+          <p:cNvPicPr>
+            <a:picLocks noChangeAspect="1"/>
+          </p:cNvPicPr>
+          <p:nvPr/>
+        </p:nvPicPr>
+        <p:blipFill>
+          <a:blip r:embed="rId6"/>
+          <a:srcRect l="1535" r="1535"/>
+          <a:stretch/>
+        </p:blipFill>
+        <p:spPr>
+          <a:xfrm>
+            <a:off x="6881622" y="1215645"/>
+            <a:ext cx="530352" cy="530352"/>
+          </a:xfrm>
+          <a:prstGeom prst="ellipse">
+            <a:avLst/>
+          </a:prstGeom>
+          <a:ln w="63500" cap="rnd">
+            <a:noFill/>
+          </a:ln>
+          <a:effectLst>
+            <a:outerShdw blurRad="381000" dist="292100" dir="5400000" sx="-80000" sy="-18000" rotWithShape="0">
+              <a:srgbClr val="000000">
+                <a:alpha val="22000"/>
+              </a:srgbClr>
+            </a:outerShdw>
+          </a:effectLst>
+        </p:spPr>
+      </p:pic>
+      <p:pic>
+        <p:nvPicPr>
+          <p:cNvPr id="36" name="Image 4">
+            <a:extLst>
+              <a:ext uri="{FF2B5EF4-FFF2-40B4-BE49-F238E27FC236}">
+                <a16:creationId xmlns:a16="http://schemas.microsoft.com/office/drawing/2014/main" id="{8B2D23A7-7B36-281D-0FAF-6FA1CD42EFC9}"/>
+              </a:ext>
+            </a:extLst>
+          </p:cNvPr>
+          <p:cNvPicPr>
+            <a:picLocks noChangeAspect="1"/>
+          </p:cNvPicPr>
+          <p:nvPr/>
+        </p:nvPicPr>
+        <p:blipFill>
+          <a:blip r:embed="rId7"/>
+          <a:srcRect/>
+          <a:stretch/>
+        </p:blipFill>
+        <p:spPr>
+          <a:xfrm>
+            <a:off x="4895851" y="3205493"/>
+            <a:ext cx="521208" cy="530352"/>
+          </a:xfrm>
+          <a:prstGeom prst="ellipse">
+            <a:avLst/>
+          </a:prstGeom>
+          <a:ln w="63500" cap="rnd">
+            <a:noFill/>
+          </a:ln>
+          <a:effectLst>
+            <a:outerShdw blurRad="381000" dist="292100" dir="5400000" sx="-80000" sy="-18000" rotWithShape="0">
+              <a:srgbClr val="000000">
+                <a:alpha val="22000"/>
+              </a:srgbClr>
+            </a:outerShdw>
+          </a:effectLst>
+        </p:spPr>
+      </p:pic>
+      <p:pic>
+        <p:nvPicPr>
+          <p:cNvPr id="37" name="Image 6">
+            <a:extLst>
+              <a:ext uri="{FF2B5EF4-FFF2-40B4-BE49-F238E27FC236}">
+                <a16:creationId xmlns:a16="http://schemas.microsoft.com/office/drawing/2014/main" id="{2E046956-BF6C-90EB-1DB1-36B2AE3E0BAE}"/>
+              </a:ext>
+            </a:extLst>
+          </p:cNvPr>
+          <p:cNvPicPr>
+            <a:picLocks noChangeAspect="1"/>
+          </p:cNvPicPr>
+          <p:nvPr/>
+        </p:nvPicPr>
+        <p:blipFill>
+          <a:blip r:embed="rId8"/>
+          <a:srcRect/>
+          <a:stretch/>
+        </p:blipFill>
+        <p:spPr>
+          <a:xfrm>
+            <a:off x="1168908" y="3215239"/>
+            <a:ext cx="530352" cy="530352"/>
+          </a:xfrm>
+          <a:prstGeom prst="ellipse">
+            <a:avLst/>
+          </a:prstGeom>
+          <a:ln w="63500" cap="rnd">
+            <a:noFill/>
+          </a:ln>
+          <a:effectLst>
+            <a:outerShdw blurRad="381000" dist="292100" dir="5400000" sx="-80000" sy="-18000" rotWithShape="0">
+              <a:srgbClr val="000000">
+                <a:alpha val="22000"/>
+              </a:srgbClr>
+            </a:outerShdw>
+          </a:effectLst>
+        </p:spPr>
+      </p:pic>
+      <p:pic>
+        <p:nvPicPr>
+          <p:cNvPr id="38" name="Image 7">
+            <a:extLst>
+              <a:ext uri="{FF2B5EF4-FFF2-40B4-BE49-F238E27FC236}">
+                <a16:creationId xmlns:a16="http://schemas.microsoft.com/office/drawing/2014/main" id="{9B38ED17-2A60-13D2-651F-ACAC4543EC24}"/>
+              </a:ext>
+            </a:extLst>
+          </p:cNvPr>
+          <p:cNvPicPr>
+            <a:picLocks noChangeAspect="1"/>
+          </p:cNvPicPr>
+          <p:nvPr/>
+        </p:nvPicPr>
+        <p:blipFill>
+          <a:blip r:embed="rId9"/>
+          <a:srcRect/>
+          <a:stretch/>
+        </p:blipFill>
+        <p:spPr>
+          <a:xfrm>
+            <a:off x="1934718" y="3199598"/>
+            <a:ext cx="530352" cy="545993"/>
+          </a:xfrm>
+          <a:prstGeom prst="ellipse">
+            <a:avLst/>
+          </a:prstGeom>
+          <a:ln w="63500" cap="rnd">
+            <a:noFill/>
+          </a:ln>
+          <a:effectLst>
+            <a:outerShdw blurRad="381000" dist="292100" dir="5400000" sx="-80000" sy="-18000" rotWithShape="0">
+              <a:srgbClr val="000000">
+                <a:alpha val="22000"/>
+              </a:srgbClr>
+            </a:outerShdw>
+          </a:effectLst>
+        </p:spPr>
+      </p:pic>
+      <p:pic>
+        <p:nvPicPr>
+          <p:cNvPr id="39" name="Image 6">
+            <a:extLst>
+              <a:ext uri="{FF2B5EF4-FFF2-40B4-BE49-F238E27FC236}">
+                <a16:creationId xmlns:a16="http://schemas.microsoft.com/office/drawing/2014/main" id="{8E1625A9-48D3-F507-CA8C-02DBB2E499C7}"/>
+              </a:ext>
+            </a:extLst>
+          </p:cNvPr>
+          <p:cNvPicPr>
+            <a:picLocks noChangeAspect="1"/>
+          </p:cNvPicPr>
+          <p:nvPr/>
+        </p:nvPicPr>
+        <p:blipFill>
+          <a:blip r:embed="rId10"/>
+          <a:srcRect/>
+          <a:stretch/>
+        </p:blipFill>
+        <p:spPr>
+          <a:xfrm>
+            <a:off x="4045459" y="3207418"/>
+            <a:ext cx="530352" cy="530352"/>
+          </a:xfrm>
+          <a:prstGeom prst="ellipse">
+            <a:avLst/>
+          </a:prstGeom>
+          <a:ln w="63500" cap="rnd">
+            <a:noFill/>
+          </a:ln>
+          <a:effectLst>
+            <a:outerShdw blurRad="381000" dist="292100" dir="5400000" sx="-80000" sy="-18000" rotWithShape="0">
+              <a:srgbClr val="000000">
+                <a:alpha val="22000"/>
+              </a:srgbClr>
+            </a:outerShdw>
+          </a:effectLst>
+        </p:spPr>
+      </p:pic>
+      <p:pic>
+        <p:nvPicPr>
+          <p:cNvPr id="40" name="Image 3">
+            <a:extLst>
+              <a:ext uri="{FF2B5EF4-FFF2-40B4-BE49-F238E27FC236}">
+                <a16:creationId xmlns:a16="http://schemas.microsoft.com/office/drawing/2014/main" id="{065C9701-9649-0B2B-AA42-1CE53D99DDBB}"/>
+              </a:ext>
+            </a:extLst>
+          </p:cNvPr>
+          <p:cNvPicPr>
+            <a:picLocks noChangeAspect="1"/>
+          </p:cNvPicPr>
+          <p:nvPr/>
+        </p:nvPicPr>
+        <p:blipFill>
+          <a:blip r:embed="rId11"/>
+          <a:srcRect/>
+          <a:stretch/>
+        </p:blipFill>
+        <p:spPr>
+          <a:xfrm>
+            <a:off x="6918198" y="3257910"/>
             <a:ext cx="493776" cy="493776"/>
           </a:xfrm>
           <a:prstGeom prst="ellipse">
@@ -6610,178 +7936,29 @@
           </a:sp3d>
         </p:spPr>
       </p:pic>
-      <p:sp>
-        <p:nvSpPr>
-          <p:cNvPr id="16" name="Text 11"/>
-          <p:cNvSpPr/>
-          <p:nvPr/>
-        </p:nvSpPr>
-        <p:spPr>
-          <a:xfrm>
-            <a:off x="5567172" y="1691640"/>
-            <a:ext cx="1078992" cy="274320"/>
-          </a:xfrm>
-          <a:prstGeom prst="rect">
-            <a:avLst/>
-          </a:prstGeom>
-          <a:noFill/>
-          <a:ln/>
-        </p:spPr>
-        <p:txBody>
-          <a:bodyPr wrap="square" rtlCol="0" anchor="ctr"/>
-          <a:lstStyle/>
-          <a:p>
-            <a:pPr marL="0" indent="0">
-              <a:buNone/>
-            </a:pPr>
-            <a:endParaRPr lang="ro-RO" sz="1200" b="1" dirty="0">
-              <a:solidFill>
-                <a:srgbClr val="FFFFFF"/>
-              </a:solidFill>
-              <a:latin typeface="Arial Black" pitchFamily="34" charset="0"/>
-              <a:ea typeface="Arial Black" pitchFamily="34" charset="-122"/>
-              <a:cs typeface="Arial Black" pitchFamily="34" charset="-120"/>
-            </a:endParaRPr>
-          </a:p>
-          <a:p>
-            <a:pPr marL="0" indent="0">
-              <a:buNone/>
-            </a:pPr>
-            <a:r>
-              <a:rPr lang="en-US" sz="1200" b="1" dirty="0">
-                <a:solidFill>
-                  <a:srgbClr val="FFFFFF"/>
-                </a:solidFill>
-                <a:latin typeface="Arial Black" pitchFamily="34" charset="0"/>
-                <a:ea typeface="Arial Black" pitchFamily="34" charset="-122"/>
-                <a:cs typeface="Arial Black" pitchFamily="34" charset="-120"/>
-              </a:rPr>
-              <a:t>Render</a:t>
-            </a:r>
-            <a:endParaRPr lang="en-US" sz="1200" dirty="0"/>
-          </a:p>
-        </p:txBody>
-      </p:sp>
-      <p:sp>
-        <p:nvSpPr>
-          <p:cNvPr id="17" name="Text 12"/>
-          <p:cNvSpPr/>
-          <p:nvPr/>
-        </p:nvSpPr>
-        <p:spPr>
-          <a:xfrm>
-            <a:off x="4991100" y="2276856"/>
-            <a:ext cx="1645920" cy="685800"/>
-          </a:xfrm>
-          <a:prstGeom prst="rect">
-            <a:avLst/>
-          </a:prstGeom>
-          <a:noFill/>
-          <a:ln/>
-        </p:spPr>
-        <p:txBody>
-          <a:bodyPr wrap="square" rtlCol="0" anchor="ctr"/>
-          <a:lstStyle/>
-          <a:p>
-            <a:pPr marL="0" indent="0">
-              <a:buNone/>
-            </a:pPr>
-            <a:r>
-              <a:rPr lang="en-US" sz="1000" dirty="0">
-                <a:solidFill>
-                  <a:srgbClr val="8B96A8"/>
-                </a:solidFill>
-                <a:latin typeface="Calibri" pitchFamily="34" charset="0"/>
-                <a:ea typeface="Calibri" pitchFamily="34" charset="-122"/>
-                <a:cs typeface="Calibri" pitchFamily="34" charset="-120"/>
-              </a:rPr>
-              <a:t>Backend auto-deploy</a:t>
-            </a:r>
-            <a:endParaRPr lang="en-US" sz="1000" dirty="0"/>
-          </a:p>
-          <a:p>
-            <a:pPr marL="0" indent="0">
-              <a:buNone/>
-            </a:pPr>
-            <a:r>
-              <a:rPr lang="en-US" sz="1000" dirty="0">
-                <a:solidFill>
-                  <a:srgbClr val="8B96A8"/>
-                </a:solidFill>
-                <a:latin typeface="Calibri" pitchFamily="34" charset="0"/>
-                <a:ea typeface="Calibri" pitchFamily="34" charset="-122"/>
-                <a:cs typeface="Calibri" pitchFamily="34" charset="-120"/>
-              </a:rPr>
-              <a:t>din </a:t>
-            </a:r>
-            <a:r>
-              <a:rPr lang="en-US" sz="1000" b="1" dirty="0">
-                <a:solidFill>
-                  <a:srgbClr val="8B96A8"/>
-                </a:solidFill>
-                <a:latin typeface="Calibri" pitchFamily="34" charset="0"/>
-                <a:ea typeface="Calibri" pitchFamily="34" charset="-122"/>
-                <a:cs typeface="Calibri" pitchFamily="34" charset="-120"/>
-              </a:rPr>
-              <a:t>GitHub</a:t>
-            </a:r>
-            <a:r>
-              <a:rPr lang="en-US" sz="1000" dirty="0">
-                <a:solidFill>
-                  <a:srgbClr val="8B96A8"/>
-                </a:solidFill>
-                <a:latin typeface="Calibri" pitchFamily="34" charset="0"/>
-                <a:ea typeface="Calibri" pitchFamily="34" charset="-122"/>
-                <a:cs typeface="Calibri" pitchFamily="34" charset="-120"/>
-              </a:rPr>
-              <a:t> on every push</a:t>
-            </a:r>
-            <a:endParaRPr lang="en-US" sz="1000" dirty="0"/>
-          </a:p>
-        </p:txBody>
-      </p:sp>
-      <p:sp>
-        <p:nvSpPr>
-          <p:cNvPr id="18" name="Shape 13"/>
-          <p:cNvSpPr/>
-          <p:nvPr/>
-        </p:nvSpPr>
-        <p:spPr>
-          <a:xfrm>
-            <a:off x="6911340" y="1527048"/>
-            <a:ext cx="1874520" cy="1554480"/>
-          </a:xfrm>
-          <a:prstGeom prst="rect">
-            <a:avLst/>
-          </a:prstGeom>
-          <a:solidFill>
-            <a:srgbClr val="0E1628"/>
-          </a:solidFill>
-          <a:ln w="12700">
-            <a:solidFill>
-              <a:srgbClr val="1C2A40"/>
-            </a:solidFill>
-            <a:prstDash val="solid"/>
-          </a:ln>
-        </p:spPr>
-      </p:sp>
       <p:pic>
         <p:nvPicPr>
-          <p:cNvPr id="19" name="Image 3"/>
+          <p:cNvPr id="41" name="Image 2">
+            <a:extLst>
+              <a:ext uri="{FF2B5EF4-FFF2-40B4-BE49-F238E27FC236}">
+                <a16:creationId xmlns:a16="http://schemas.microsoft.com/office/drawing/2014/main" id="{49E388BF-3A6E-DCD1-570B-6CE28A844C7F}"/>
+              </a:ext>
+            </a:extLst>
+          </p:cNvPr>
           <p:cNvPicPr>
             <a:picLocks noChangeAspect="1"/>
           </p:cNvPicPr>
           <p:nvPr/>
         </p:nvPicPr>
         <p:blipFill>
-          <a:blip r:embed="rId4"/>
+          <a:blip r:embed="rId12"/>
           <a:srcRect/>
           <a:stretch/>
         </p:blipFill>
         <p:spPr>
           <a:xfrm>
-            <a:off x="7048500" y="1691640"/>
-            <a:ext cx="493776" cy="493776"/>
+            <a:off x="7777734" y="3257910"/>
+            <a:ext cx="493776" cy="508339"/>
           </a:xfrm>
           <a:prstGeom prst="ellipse">
             <a:avLst/>
@@ -6796,181 +7973,31 @@
               </a:srgbClr>
             </a:outerShdw>
           </a:effectLst>
-          <a:scene3d>
-            <a:camera prst="orthographicFront"/>
-            <a:lightRig rig="contrasting" dir="t">
-              <a:rot lat="0" lon="0" rev="3000000"/>
-            </a:lightRig>
-          </a:scene3d>
-          <a:sp3d contourW="7620">
-            <a:bevelT w="95250" h="31750"/>
-            <a:contourClr>
-              <a:srgbClr val="333333"/>
-            </a:contourClr>
-          </a:sp3d>
         </p:spPr>
       </p:pic>
-      <p:sp>
-        <p:nvSpPr>
-          <p:cNvPr id="20" name="Text 14"/>
-          <p:cNvSpPr/>
-          <p:nvPr/>
-        </p:nvSpPr>
-        <p:spPr>
-          <a:xfrm>
-            <a:off x="7624572" y="1691640"/>
-            <a:ext cx="1078992" cy="274320"/>
-          </a:xfrm>
-          <a:prstGeom prst="rect">
-            <a:avLst/>
-          </a:prstGeom>
-          <a:noFill/>
-          <a:ln/>
-        </p:spPr>
-        <p:txBody>
-          <a:bodyPr wrap="square" rtlCol="0" anchor="ctr"/>
-          <a:lstStyle/>
-          <a:p>
-            <a:pPr marL="0" indent="0">
-              <a:buNone/>
-            </a:pPr>
-            <a:endParaRPr lang="ro-RO" sz="1200" b="1" dirty="0">
-              <a:solidFill>
-                <a:srgbClr val="FFFFFF"/>
-              </a:solidFill>
-              <a:latin typeface="Arial Black" pitchFamily="34" charset="0"/>
-              <a:ea typeface="Arial Black" pitchFamily="34" charset="-122"/>
-              <a:cs typeface="Arial Black" pitchFamily="34" charset="-120"/>
-            </a:endParaRPr>
-          </a:p>
-          <a:p>
-            <a:pPr marL="0" indent="0">
-              <a:buNone/>
-            </a:pPr>
-            <a:r>
-              <a:rPr lang="en-US" sz="1200" b="1" dirty="0" err="1">
-                <a:solidFill>
-                  <a:srgbClr val="FFFFFF"/>
-                </a:solidFill>
-                <a:latin typeface="Arial Black" pitchFamily="34" charset="0"/>
-                <a:ea typeface="Arial Black" pitchFamily="34" charset="-122"/>
-                <a:cs typeface="Arial Black" pitchFamily="34" charset="-120"/>
-              </a:rPr>
-              <a:t>Hostinger</a:t>
-            </a:r>
-            <a:endParaRPr lang="en-US" sz="1200" dirty="0"/>
-          </a:p>
-        </p:txBody>
-      </p:sp>
-      <p:sp>
-        <p:nvSpPr>
-          <p:cNvPr id="21" name="Text 15"/>
-          <p:cNvSpPr/>
-          <p:nvPr/>
-        </p:nvSpPr>
-        <p:spPr>
-          <a:xfrm>
-            <a:off x="7048500" y="2276856"/>
-            <a:ext cx="1645920" cy="685800"/>
-          </a:xfrm>
-          <a:prstGeom prst="rect">
-            <a:avLst/>
-          </a:prstGeom>
-          <a:noFill/>
-          <a:ln/>
-        </p:spPr>
-        <p:txBody>
-          <a:bodyPr wrap="square" rtlCol="0" anchor="ctr"/>
-          <a:lstStyle/>
-          <a:p>
-            <a:pPr marL="0" indent="0">
-              <a:buNone/>
-            </a:pPr>
-            <a:r>
-              <a:rPr lang="en-US" sz="1000" dirty="0">
-                <a:solidFill>
-                  <a:srgbClr val="8B96A8"/>
-                </a:solidFill>
-                <a:latin typeface="Calibri" pitchFamily="34" charset="0"/>
-                <a:ea typeface="Calibri" pitchFamily="34" charset="-122"/>
-                <a:cs typeface="Calibri" pitchFamily="34" charset="-120"/>
-              </a:rPr>
-              <a:t>Frontend hosting</a:t>
-            </a:r>
-            <a:endParaRPr lang="en-US" sz="1000" dirty="0"/>
-          </a:p>
-          <a:p>
-            <a:pPr marL="0" indent="0">
-              <a:buNone/>
-            </a:pPr>
-            <a:r>
-              <a:rPr lang="en-US" sz="1000" dirty="0">
-                <a:solidFill>
-                  <a:srgbClr val="8B96A8"/>
-                </a:solidFill>
-                <a:latin typeface="Calibri" pitchFamily="34" charset="0"/>
-                <a:ea typeface="Calibri" pitchFamily="34" charset="-122"/>
-                <a:cs typeface="Calibri" pitchFamily="34" charset="-120"/>
-              </a:rPr>
-              <a:t>npm </a:t>
-            </a:r>
-            <a:r>
-              <a:rPr lang="en-US" sz="1000" b="1" dirty="0">
-                <a:solidFill>
-                  <a:srgbClr val="8B96A8"/>
-                </a:solidFill>
-                <a:latin typeface="Calibri" pitchFamily="34" charset="0"/>
-                <a:ea typeface="Calibri" pitchFamily="34" charset="-122"/>
-                <a:cs typeface="Calibri" pitchFamily="34" charset="-120"/>
-              </a:rPr>
-              <a:t>run build → dist/</a:t>
-            </a:r>
-            <a:endParaRPr lang="en-US" sz="1000" b="1" dirty="0"/>
-          </a:p>
-        </p:txBody>
-      </p:sp>
-      <p:sp>
-        <p:nvSpPr>
-          <p:cNvPr id="22" name="Shape 16"/>
-          <p:cNvSpPr/>
-          <p:nvPr/>
-        </p:nvSpPr>
-        <p:spPr>
-          <a:xfrm>
-            <a:off x="4853940" y="3310128"/>
-            <a:ext cx="1874520" cy="1554480"/>
-          </a:xfrm>
-          <a:prstGeom prst="rect">
-            <a:avLst/>
-          </a:prstGeom>
-          <a:solidFill>
-            <a:srgbClr val="0E1628"/>
-          </a:solidFill>
-          <a:ln w="12700">
-            <a:solidFill>
-              <a:srgbClr val="1C2A40"/>
-            </a:solidFill>
-            <a:prstDash val="solid"/>
-          </a:ln>
-        </p:spPr>
-      </p:sp>
       <p:pic>
         <p:nvPicPr>
-          <p:cNvPr id="23" name="Image 4"/>
+          <p:cNvPr id="42" name="Image 6">
+            <a:extLst>
+              <a:ext uri="{FF2B5EF4-FFF2-40B4-BE49-F238E27FC236}">
+                <a16:creationId xmlns:a16="http://schemas.microsoft.com/office/drawing/2014/main" id="{83849437-EF2E-8967-F329-73C299DBFF46}"/>
+              </a:ext>
+            </a:extLst>
+          </p:cNvPr>
           <p:cNvPicPr>
             <a:picLocks noChangeAspect="1"/>
           </p:cNvPicPr>
           <p:nvPr/>
         </p:nvPicPr>
         <p:blipFill>
-          <a:blip r:embed="rId5"/>
+          <a:blip r:embed="rId13"/>
           <a:srcRect/>
           <a:stretch/>
         </p:blipFill>
         <p:spPr>
           <a:xfrm>
-            <a:off x="4991100" y="3536299"/>
-            <a:ext cx="493776" cy="404765"/>
+            <a:off x="7741158" y="1219200"/>
+            <a:ext cx="530352" cy="530352"/>
           </a:xfrm>
           <a:prstGeom prst="ellipse">
             <a:avLst/>
@@ -6987,397 +8014,12 @@
           </a:effectLst>
         </p:spPr>
       </p:pic>
-      <p:sp>
-        <p:nvSpPr>
-          <p:cNvPr id="24" name="Text 17"/>
-          <p:cNvSpPr/>
-          <p:nvPr/>
-        </p:nvSpPr>
-        <p:spPr>
-          <a:xfrm>
-            <a:off x="5567172" y="3474720"/>
-            <a:ext cx="1078992" cy="274320"/>
-          </a:xfrm>
-          <a:prstGeom prst="rect">
-            <a:avLst/>
-          </a:prstGeom>
-          <a:noFill/>
-          <a:ln/>
-        </p:spPr>
-        <p:txBody>
-          <a:bodyPr wrap="square" rtlCol="0" anchor="ctr"/>
-          <a:lstStyle/>
-          <a:p>
-            <a:pPr marL="0" indent="0">
-              <a:buNone/>
-            </a:pPr>
-            <a:endParaRPr lang="ro-RO" sz="1200" b="1" dirty="0">
-              <a:solidFill>
-                <a:srgbClr val="FFFFFF"/>
-              </a:solidFill>
-              <a:latin typeface="Arial Black" pitchFamily="34" charset="0"/>
-              <a:ea typeface="Arial Black" pitchFamily="34" charset="-122"/>
-              <a:cs typeface="Arial Black" pitchFamily="34" charset="-120"/>
-            </a:endParaRPr>
-          </a:p>
-          <a:p>
-            <a:pPr marL="0" indent="0">
-              <a:buNone/>
-            </a:pPr>
-            <a:r>
-              <a:rPr lang="en-US" sz="1200" b="1" dirty="0" err="1">
-                <a:solidFill>
-                  <a:srgbClr val="FFFFFF"/>
-                </a:solidFill>
-                <a:latin typeface="Arial Black" pitchFamily="34" charset="0"/>
-                <a:ea typeface="Arial Black" pitchFamily="34" charset="-122"/>
-                <a:cs typeface="Arial Black" pitchFamily="34" charset="-120"/>
-              </a:rPr>
-              <a:t>Supabase</a:t>
-            </a:r>
-            <a:endParaRPr lang="en-US" sz="1200" dirty="0"/>
-          </a:p>
-        </p:txBody>
-      </p:sp>
-      <p:sp>
-        <p:nvSpPr>
-          <p:cNvPr id="25" name="Text 18"/>
-          <p:cNvSpPr/>
-          <p:nvPr/>
-        </p:nvSpPr>
-        <p:spPr>
-          <a:xfrm>
-            <a:off x="4991100" y="4059936"/>
-            <a:ext cx="1645920" cy="685800"/>
-          </a:xfrm>
-          <a:prstGeom prst="rect">
-            <a:avLst/>
-          </a:prstGeom>
-          <a:noFill/>
-          <a:ln/>
-        </p:spPr>
-        <p:txBody>
-          <a:bodyPr wrap="square" rtlCol="0" anchor="ctr"/>
-          <a:lstStyle/>
-          <a:p>
-            <a:r>
-              <a:rPr lang="en-US" sz="1000" b="1" dirty="0">
-                <a:solidFill>
-                  <a:srgbClr val="8B96A8"/>
-                </a:solidFill>
-                <a:latin typeface="Calibri" pitchFamily="34" charset="0"/>
-                <a:ea typeface="Calibri" pitchFamily="34" charset="-122"/>
-                <a:cs typeface="Calibri" pitchFamily="34" charset="-120"/>
-              </a:rPr>
-              <a:t>PostgreSQL</a:t>
-            </a:r>
-            <a:r>
-              <a:rPr lang="ro-RO" sz="1000" b="1" dirty="0">
-                <a:solidFill>
-                  <a:srgbClr val="8B96A8"/>
-                </a:solidFill>
-                <a:latin typeface="Calibri" pitchFamily="34" charset="0"/>
-                <a:ea typeface="Calibri" pitchFamily="34" charset="-122"/>
-                <a:cs typeface="Calibri" pitchFamily="34" charset="-120"/>
-              </a:rPr>
-              <a:t> </a:t>
-            </a:r>
-            <a:r>
-              <a:rPr lang="ro-RO" sz="1000" dirty="0" err="1">
-                <a:solidFill>
-                  <a:srgbClr val="8B96A8"/>
-                </a:solidFill>
-                <a:latin typeface="Calibri" pitchFamily="34" charset="0"/>
-                <a:ea typeface="Calibri" pitchFamily="34" charset="-122"/>
-                <a:cs typeface="Calibri" pitchFamily="34" charset="-120"/>
-              </a:rPr>
-              <a:t>maintained</a:t>
-            </a:r>
-            <a:r>
-              <a:rPr lang="en-GB" sz="1000" dirty="0">
-                <a:solidFill>
-                  <a:srgbClr val="8B96A8"/>
-                </a:solidFill>
-                <a:latin typeface="Calibri" pitchFamily="34" charset="0"/>
-                <a:ea typeface="Calibri" pitchFamily="34" charset="-122"/>
-                <a:cs typeface="Calibri" pitchFamily="34" charset="-120"/>
-              </a:rPr>
-              <a:t> in cloud</a:t>
-            </a:r>
-            <a:endParaRPr lang="en-US" sz="1000" dirty="0"/>
-          </a:p>
-        </p:txBody>
-      </p:sp>
-      <p:sp>
-        <p:nvSpPr>
-          <p:cNvPr id="26" name="Shape 19"/>
-          <p:cNvSpPr/>
-          <p:nvPr/>
-        </p:nvSpPr>
-        <p:spPr>
-          <a:xfrm>
-            <a:off x="6911340" y="3310128"/>
-            <a:ext cx="1874520" cy="1554480"/>
-          </a:xfrm>
-          <a:prstGeom prst="rect">
-            <a:avLst/>
-          </a:prstGeom>
-          <a:solidFill>
-            <a:srgbClr val="0E1628"/>
-          </a:solidFill>
-          <a:ln w="12700">
-            <a:solidFill>
-              <a:srgbClr val="1C2A40"/>
-            </a:solidFill>
-            <a:prstDash val="solid"/>
-          </a:ln>
-        </p:spPr>
-      </p:sp>
       <p:pic>
         <p:nvPicPr>
-          <p:cNvPr id="27" name="Image 5"/>
-          <p:cNvPicPr>
-            <a:picLocks noChangeAspect="1"/>
-          </p:cNvPicPr>
-          <p:nvPr/>
-        </p:nvPicPr>
-        <p:blipFill>
-          <a:blip r:embed="rId6"/>
-          <a:srcRect/>
-          <a:stretch/>
-        </p:blipFill>
-        <p:spPr>
-          <a:xfrm>
-            <a:off x="7091172" y="3536299"/>
-            <a:ext cx="408432" cy="408432"/>
-          </a:xfrm>
-          <a:prstGeom prst="rect">
-            <a:avLst/>
-          </a:prstGeom>
-        </p:spPr>
-      </p:pic>
-      <p:sp>
-        <p:nvSpPr>
-          <p:cNvPr id="28" name="Text 20"/>
-          <p:cNvSpPr/>
-          <p:nvPr/>
-        </p:nvSpPr>
-        <p:spPr>
-          <a:xfrm>
-            <a:off x="7624572" y="3474720"/>
-            <a:ext cx="1078992" cy="274320"/>
-          </a:xfrm>
-          <a:prstGeom prst="rect">
-            <a:avLst/>
-          </a:prstGeom>
-          <a:noFill/>
-          <a:ln/>
-        </p:spPr>
-        <p:txBody>
-          <a:bodyPr wrap="square" rtlCol="0" anchor="ctr"/>
-          <a:lstStyle/>
-          <a:p>
-            <a:pPr marL="0" indent="0">
-              <a:buNone/>
-            </a:pPr>
-            <a:endParaRPr lang="ro-RO" sz="1200" b="1" dirty="0">
-              <a:solidFill>
-                <a:srgbClr val="FFFFFF"/>
-              </a:solidFill>
-              <a:latin typeface="Arial Black" pitchFamily="34" charset="0"/>
-              <a:ea typeface="Arial Black" pitchFamily="34" charset="-122"/>
-              <a:cs typeface="Arial Black" pitchFamily="34" charset="-120"/>
-            </a:endParaRPr>
-          </a:p>
-          <a:p>
-            <a:pPr marL="0" indent="0">
-              <a:buNone/>
-            </a:pPr>
-            <a:r>
-              <a:rPr lang="en-US" sz="1200" b="1" dirty="0">
-                <a:solidFill>
-                  <a:srgbClr val="FFFFFF"/>
-                </a:solidFill>
-                <a:latin typeface="Arial Black" pitchFamily="34" charset="0"/>
-                <a:ea typeface="Arial Black" pitchFamily="34" charset="-122"/>
-                <a:cs typeface="Arial Black" pitchFamily="34" charset="-120"/>
-              </a:rPr>
-              <a:t>VS Code</a:t>
-            </a:r>
-            <a:endParaRPr lang="en-US" sz="1200" dirty="0"/>
-          </a:p>
-        </p:txBody>
-      </p:sp>
-      <p:sp>
-        <p:nvSpPr>
-          <p:cNvPr id="29" name="Text 21"/>
-          <p:cNvSpPr/>
-          <p:nvPr/>
-        </p:nvSpPr>
-        <p:spPr>
-          <a:xfrm>
-            <a:off x="7048500" y="4059936"/>
-            <a:ext cx="1645920" cy="685800"/>
-          </a:xfrm>
-          <a:prstGeom prst="rect">
-            <a:avLst/>
-          </a:prstGeom>
-          <a:noFill/>
-          <a:ln/>
-        </p:spPr>
-        <p:txBody>
-          <a:bodyPr wrap="square" rtlCol="0" anchor="ctr"/>
-          <a:lstStyle/>
-          <a:p>
-            <a:pPr marL="0" indent="0">
-              <a:buNone/>
-            </a:pPr>
-            <a:r>
-              <a:rPr lang="en-US" sz="1000" dirty="0">
-                <a:solidFill>
-                  <a:srgbClr val="8B96A8"/>
-                </a:solidFill>
-                <a:latin typeface="Calibri" pitchFamily="34" charset="0"/>
-                <a:ea typeface="Calibri" pitchFamily="34" charset="-122"/>
-                <a:cs typeface="Calibri" pitchFamily="34" charset="-120"/>
-              </a:rPr>
-              <a:t>Main</a:t>
-            </a:r>
-            <a:r>
-              <a:rPr lang="en-US" sz="1000" b="1" dirty="0">
-                <a:solidFill>
-                  <a:srgbClr val="8B96A8"/>
-                </a:solidFill>
-                <a:latin typeface="Calibri" pitchFamily="34" charset="0"/>
-                <a:ea typeface="Calibri" pitchFamily="34" charset="-122"/>
-                <a:cs typeface="Calibri" pitchFamily="34" charset="-120"/>
-              </a:rPr>
-              <a:t> IDE </a:t>
-            </a:r>
-            <a:r>
-              <a:rPr lang="en-US" sz="1000" dirty="0">
-                <a:solidFill>
-                  <a:srgbClr val="8B96A8"/>
-                </a:solidFill>
-                <a:latin typeface="Calibri" pitchFamily="34" charset="0"/>
-                <a:ea typeface="Calibri" pitchFamily="34" charset="-122"/>
-                <a:cs typeface="Calibri" pitchFamily="34" charset="-120"/>
-              </a:rPr>
-              <a:t>for development</a:t>
-            </a:r>
-            <a:endParaRPr lang="en-US" sz="1000" dirty="0"/>
-          </a:p>
-        </p:txBody>
-      </p:sp>
-      <p:sp>
-        <p:nvSpPr>
-          <p:cNvPr id="32" name="CasetăText 31">
+          <p:cNvPr id="43" name="Image 3">
             <a:extLst>
               <a:ext uri="{FF2B5EF4-FFF2-40B4-BE49-F238E27FC236}">
-                <a16:creationId xmlns:a16="http://schemas.microsoft.com/office/drawing/2014/main" id="{12B87218-F13F-DFC9-2C1F-C45123141C1F}"/>
-              </a:ext>
-            </a:extLst>
-          </p:cNvPr>
-          <p:cNvSpPr txBox="1"/>
-          <p:nvPr/>
-        </p:nvSpPr>
-        <p:spPr>
-          <a:xfrm>
-            <a:off x="-402335" y="900946"/>
-            <a:ext cx="4974335" cy="523220"/>
-          </a:xfrm>
-          <a:prstGeom prst="rect">
-            <a:avLst/>
-          </a:prstGeom>
-          <a:noFill/>
-        </p:spPr>
-        <p:txBody>
-          <a:bodyPr wrap="square">
-            <a:spAutoFit/>
-          </a:bodyPr>
-          <a:lstStyle/>
-          <a:p>
-            <a:pPr marL="0" indent="0" algn="ctr">
-              <a:buNone/>
-            </a:pPr>
-            <a:r>
-              <a:rPr lang="en-US" sz="2800" b="1" kern="0" spc="300" dirty="0">
-                <a:solidFill>
-                  <a:srgbClr val="22D3EE"/>
-                </a:solidFill>
-                <a:latin typeface="Calibri" pitchFamily="34" charset="0"/>
-                <a:ea typeface="Calibri" pitchFamily="34" charset="-122"/>
-                <a:cs typeface="Calibri" pitchFamily="34" charset="-120"/>
-              </a:rPr>
-              <a:t>TERMINAL</a:t>
-            </a:r>
-            <a:endParaRPr lang="en-US" sz="2800" b="1" dirty="0"/>
-          </a:p>
-        </p:txBody>
-      </p:sp>
-      <p:sp>
-        <p:nvSpPr>
-          <p:cNvPr id="34" name="CasetăText 33">
-            <a:extLst>
-              <a:ext uri="{FF2B5EF4-FFF2-40B4-BE49-F238E27FC236}">
-                <a16:creationId xmlns:a16="http://schemas.microsoft.com/office/drawing/2014/main" id="{65227549-6888-4675-A329-3FB285BB3235}"/>
-              </a:ext>
-            </a:extLst>
-          </p:cNvPr>
-          <p:cNvSpPr txBox="1"/>
-          <p:nvPr/>
-        </p:nvSpPr>
-        <p:spPr>
-          <a:xfrm>
-            <a:off x="4434841" y="900946"/>
-            <a:ext cx="4773930" cy="523220"/>
-          </a:xfrm>
-          <a:prstGeom prst="rect">
-            <a:avLst/>
-          </a:prstGeom>
-          <a:noFill/>
-        </p:spPr>
-        <p:txBody>
-          <a:bodyPr wrap="square">
-            <a:spAutoFit/>
-          </a:bodyPr>
-          <a:lstStyle/>
-          <a:p>
-            <a:pPr marL="0" indent="0" algn="ctr">
-              <a:buNone/>
-            </a:pPr>
-            <a:r>
-              <a:rPr lang="en-US" sz="2800" b="1" kern="0" spc="300" dirty="0">
-                <a:solidFill>
-                  <a:srgbClr val="22D3EE"/>
-                </a:solidFill>
-                <a:latin typeface="Calibri" pitchFamily="34" charset="0"/>
-                <a:ea typeface="Calibri" pitchFamily="34" charset="-122"/>
-                <a:cs typeface="Calibri" pitchFamily="34" charset="-120"/>
-              </a:rPr>
-              <a:t>INFRASTRUCTUR</a:t>
-            </a:r>
-            <a:r>
-              <a:rPr lang="en-GB" sz="2800" b="1" kern="0" spc="300" dirty="0">
-                <a:solidFill>
-                  <a:srgbClr val="22D3EE"/>
-                </a:solidFill>
-                <a:latin typeface="Calibri" pitchFamily="34" charset="0"/>
-                <a:ea typeface="Calibri" pitchFamily="34" charset="-122"/>
-                <a:cs typeface="Calibri" pitchFamily="34" charset="-120"/>
-              </a:rPr>
-              <a:t>E</a:t>
-            </a:r>
-            <a:endParaRPr lang="en-US" sz="2800" b="1" dirty="0"/>
-          </a:p>
-        </p:txBody>
-      </p:sp>
-      <p:pic>
-        <p:nvPicPr>
-          <p:cNvPr id="2" name="Image 0" descr="preencoded.png">
-            <a:extLst>
-              <a:ext uri="{FF2B5EF4-FFF2-40B4-BE49-F238E27FC236}">
-                <a16:creationId xmlns:a16="http://schemas.microsoft.com/office/drawing/2014/main" id="{0AC7EE12-0F0F-64C8-C52F-6A4A5E03A7CB}"/>
+                <a16:creationId xmlns:a16="http://schemas.microsoft.com/office/drawing/2014/main" id="{4E6723D9-576D-9AE7-7B5C-BAC2CA6683A9}"/>
               </a:ext>
             </a:extLst>
           </p:cNvPr>
@@ -7387,14 +8029,53 @@
           <p:nvPr/>
         </p:nvPicPr>
         <p:blipFill>
-          <a:blip r:embed="rId7"/>
+          <a:blip r:embed="rId14"/>
+          <a:srcRect l="661" r="661"/>
+          <a:stretch/>
+        </p:blipFill>
+        <p:spPr>
+          <a:xfrm>
+            <a:off x="4006597" y="1208025"/>
+            <a:ext cx="530352" cy="537462"/>
+          </a:xfrm>
+          <a:prstGeom prst="ellipse">
+            <a:avLst/>
+          </a:prstGeom>
+          <a:ln w="63500" cap="rnd">
+            <a:noFill/>
+          </a:ln>
+          <a:effectLst>
+            <a:outerShdw blurRad="381000" dist="292100" dir="5400000" sx="-80000" sy="-18000" rotWithShape="0">
+              <a:srgbClr val="000000">
+                <a:alpha val="22000"/>
+              </a:srgbClr>
+            </a:outerShdw>
+          </a:effectLst>
+        </p:spPr>
+      </p:pic>
+      <p:pic>
+        <p:nvPicPr>
+          <p:cNvPr id="31" name="Image 0" descr="preencoded.png">
+            <a:extLst>
+              <a:ext uri="{FF2B5EF4-FFF2-40B4-BE49-F238E27FC236}">
+                <a16:creationId xmlns:a16="http://schemas.microsoft.com/office/drawing/2014/main" id="{F98098BF-D236-042A-A97D-C0531C7CDBDE}"/>
+              </a:ext>
+            </a:extLst>
+          </p:cNvPr>
+          <p:cNvPicPr>
+            <a:picLocks noChangeAspect="1"/>
+          </p:cNvPicPr>
+          <p:nvPr/>
+        </p:nvPicPr>
+        <p:blipFill>
+          <a:blip r:embed="rId15"/>
           <a:stretch>
             <a:fillRect/>
           </a:stretch>
         </p:blipFill>
         <p:spPr>
           <a:xfrm>
-            <a:off x="457200" y="41148"/>
+            <a:off x="508254" y="138793"/>
             <a:ext cx="8229600" cy="914400"/>
           </a:xfrm>
           <a:prstGeom prst="rect">
@@ -7447,2041 +8128,6 @@
           <a:chExt cx="0" cy="0"/>
         </a:xfrm>
       </p:grpSpPr>
-      <p:sp>
-        <p:nvSpPr>
-          <p:cNvPr id="3" name="Shape 0"/>
-          <p:cNvSpPr/>
-          <p:nvPr/>
-        </p:nvSpPr>
-        <p:spPr>
-          <a:xfrm>
-            <a:off x="462534" y="1127760"/>
-            <a:ext cx="2560320" cy="1645920"/>
-          </a:xfrm>
-          <a:prstGeom prst="rect">
-            <a:avLst/>
-          </a:prstGeom>
-          <a:solidFill>
-            <a:srgbClr val="0E1628"/>
-          </a:solidFill>
-          <a:ln w="19050">
-            <a:solidFill>
-              <a:srgbClr val="6366F1"/>
-            </a:solidFill>
-            <a:prstDash val="solid"/>
-          </a:ln>
-        </p:spPr>
-      </p:sp>
-      <p:sp>
-        <p:nvSpPr>
-          <p:cNvPr id="4" name="Text 1"/>
-          <p:cNvSpPr/>
-          <p:nvPr/>
-        </p:nvSpPr>
-        <p:spPr>
-          <a:xfrm>
-            <a:off x="3045714" y="1737159"/>
-            <a:ext cx="274320" cy="365760"/>
-          </a:xfrm>
-          <a:prstGeom prst="rect">
-            <a:avLst/>
-          </a:prstGeom>
-          <a:noFill/>
-          <a:ln/>
-        </p:spPr>
-        <p:txBody>
-          <a:bodyPr wrap="square" rtlCol="0" anchor="ctr"/>
-          <a:lstStyle/>
-          <a:p>
-            <a:pPr marL="0" indent="0" algn="ctr">
-              <a:buNone/>
-            </a:pPr>
-            <a:r>
-              <a:rPr lang="en-US" sz="2200" b="1" dirty="0">
-                <a:solidFill>
-                  <a:srgbClr val="22D3EE"/>
-                </a:solidFill>
-              </a:rPr>
-              <a:t>➔</a:t>
-            </a:r>
-            <a:endParaRPr lang="en-US" sz="2200" dirty="0"/>
-          </a:p>
-        </p:txBody>
-      </p:sp>
-      <p:sp>
-        <p:nvSpPr>
-          <p:cNvPr id="5" name="Text 2"/>
-          <p:cNvSpPr/>
-          <p:nvPr/>
-        </p:nvSpPr>
-        <p:spPr>
-          <a:xfrm>
-            <a:off x="645414" y="1310640"/>
-            <a:ext cx="457200" cy="274320"/>
-          </a:xfrm>
-          <a:prstGeom prst="rect">
-            <a:avLst/>
-          </a:prstGeom>
-          <a:noFill/>
-          <a:ln/>
-        </p:spPr>
-        <p:txBody>
-          <a:bodyPr wrap="square" rtlCol="0" anchor="ctr"/>
-          <a:lstStyle/>
-          <a:p>
-            <a:pPr marL="0" indent="0" algn="ctr">
-              <a:buNone/>
-            </a:pPr>
-            <a:endParaRPr lang="en-US" sz="1000" b="1" dirty="0">
-              <a:solidFill>
-                <a:srgbClr val="6366F1"/>
-              </a:solidFill>
-              <a:latin typeface="Consolas" pitchFamily="34" charset="0"/>
-              <a:ea typeface="Consolas" pitchFamily="34" charset="-122"/>
-              <a:cs typeface="Consolas" pitchFamily="34" charset="-120"/>
-            </a:endParaRPr>
-          </a:p>
-          <a:p>
-            <a:pPr marL="0" indent="0" algn="ctr">
-              <a:buNone/>
-            </a:pPr>
-            <a:r>
-              <a:rPr lang="en-US" sz="1000" b="1" dirty="0">
-                <a:solidFill>
-                  <a:srgbClr val="6366F1"/>
-                </a:solidFill>
-                <a:latin typeface="Consolas" pitchFamily="34" charset="0"/>
-                <a:ea typeface="Consolas" pitchFamily="34" charset="-122"/>
-                <a:cs typeface="Consolas" pitchFamily="34" charset="-120"/>
-              </a:rPr>
-              <a:t>01</a:t>
-            </a:r>
-            <a:endParaRPr lang="en-US" sz="1000" dirty="0"/>
-          </a:p>
-        </p:txBody>
-      </p:sp>
-      <p:sp>
-        <p:nvSpPr>
-          <p:cNvPr id="6" name="Text 3"/>
-          <p:cNvSpPr/>
-          <p:nvPr/>
-        </p:nvSpPr>
-        <p:spPr>
-          <a:xfrm>
-            <a:off x="645414" y="1584960"/>
-            <a:ext cx="2194560" cy="365760"/>
-          </a:xfrm>
-          <a:prstGeom prst="rect">
-            <a:avLst/>
-          </a:prstGeom>
-          <a:noFill/>
-          <a:ln/>
-        </p:spPr>
-        <p:txBody>
-          <a:bodyPr wrap="square" rtlCol="0" anchor="ctr"/>
-          <a:lstStyle/>
-          <a:p>
-            <a:pPr marL="0" indent="0">
-              <a:buNone/>
-            </a:pPr>
-            <a:endParaRPr lang="en-US" sz="1400" b="1" dirty="0">
-              <a:solidFill>
-                <a:srgbClr val="FFFFFF"/>
-              </a:solidFill>
-              <a:latin typeface="Segoe UI" pitchFamily="34" charset="0"/>
-              <a:ea typeface="Segoe UI" pitchFamily="34" charset="-122"/>
-              <a:cs typeface="Segoe UI" pitchFamily="34" charset="-120"/>
-            </a:endParaRPr>
-          </a:p>
-          <a:p>
-            <a:r>
-              <a:rPr lang="en-US" sz="1400" b="1" dirty="0">
-                <a:solidFill>
-                  <a:srgbClr val="FFFFFF"/>
-                </a:solidFill>
-                <a:latin typeface="Segoe UI" pitchFamily="34" charset="0"/>
-                <a:ea typeface="Segoe UI" pitchFamily="34" charset="-122"/>
-                <a:cs typeface="Segoe UI" pitchFamily="34" charset="-120"/>
-              </a:rPr>
-              <a:t>Environment setup</a:t>
-            </a:r>
-            <a:endParaRPr lang="en-US" sz="1400" dirty="0"/>
-          </a:p>
-        </p:txBody>
-      </p:sp>
-      <p:sp>
-        <p:nvSpPr>
-          <p:cNvPr id="7" name="Text 4"/>
-          <p:cNvSpPr/>
-          <p:nvPr/>
-        </p:nvSpPr>
-        <p:spPr>
-          <a:xfrm>
-            <a:off x="645414" y="1950720"/>
-            <a:ext cx="2366772" cy="640080"/>
-          </a:xfrm>
-          <a:prstGeom prst="rect">
-            <a:avLst/>
-          </a:prstGeom>
-          <a:noFill/>
-          <a:ln/>
-        </p:spPr>
-        <p:txBody>
-          <a:bodyPr wrap="square" rtlCol="0" anchor="ctr"/>
-          <a:lstStyle/>
-          <a:p>
-            <a:pPr algn="just"/>
-            <a:endParaRPr lang="en-US" sz="1000" dirty="0">
-              <a:solidFill>
-                <a:srgbClr val="8B96A8"/>
-              </a:solidFill>
-              <a:latin typeface="Segoe UI" pitchFamily="34" charset="0"/>
-              <a:ea typeface="Segoe UI" pitchFamily="34" charset="-122"/>
-              <a:cs typeface="Segoe UI" pitchFamily="34" charset="-120"/>
-            </a:endParaRPr>
-          </a:p>
-          <a:p>
-            <a:pPr algn="just"/>
-            <a:r>
-              <a:rPr lang="en-GB" sz="1000" dirty="0">
-                <a:solidFill>
-                  <a:srgbClr val="8B96A8"/>
-                </a:solidFill>
-                <a:latin typeface="Segoe UI" pitchFamily="34" charset="0"/>
-                <a:ea typeface="Segoe UI" pitchFamily="34" charset="-122"/>
-                <a:cs typeface="Segoe UI" pitchFamily="34" charset="-120"/>
-              </a:rPr>
-              <a:t>Establishing the project in </a:t>
-            </a:r>
-            <a:r>
-              <a:rPr lang="en-GB" sz="1000" b="1" dirty="0">
-                <a:solidFill>
-                  <a:srgbClr val="8B96A8"/>
-                </a:solidFill>
-                <a:latin typeface="Segoe UI" pitchFamily="34" charset="0"/>
-                <a:ea typeface="Segoe UI" pitchFamily="34" charset="-122"/>
-                <a:cs typeface="Segoe UI" pitchFamily="34" charset="-120"/>
-              </a:rPr>
-              <a:t>Python</a:t>
-            </a:r>
-            <a:r>
-              <a:rPr lang="en-GB" sz="1000" dirty="0">
-                <a:solidFill>
-                  <a:srgbClr val="8B96A8"/>
-                </a:solidFill>
-                <a:latin typeface="Segoe UI" pitchFamily="34" charset="0"/>
-                <a:ea typeface="Segoe UI" pitchFamily="34" charset="-122"/>
-                <a:cs typeface="Segoe UI" pitchFamily="34" charset="-120"/>
-              </a:rPr>
-              <a:t> and initializing the </a:t>
-            </a:r>
-            <a:r>
-              <a:rPr lang="en-GB" sz="1000" b="1" dirty="0" err="1">
-                <a:solidFill>
-                  <a:srgbClr val="8B96A8"/>
-                </a:solidFill>
-                <a:latin typeface="Segoe UI" pitchFamily="34" charset="0"/>
-                <a:ea typeface="Segoe UI" pitchFamily="34" charset="-122"/>
-                <a:cs typeface="Segoe UI" pitchFamily="34" charset="-120"/>
-              </a:rPr>
-              <a:t>FastAPI</a:t>
-            </a:r>
-            <a:r>
-              <a:rPr lang="en-GB" sz="1000" dirty="0">
-                <a:solidFill>
-                  <a:srgbClr val="8B96A8"/>
-                </a:solidFill>
-                <a:latin typeface="Segoe UI" pitchFamily="34" charset="0"/>
-                <a:ea typeface="Segoe UI" pitchFamily="34" charset="-122"/>
-                <a:cs typeface="Segoe UI" pitchFamily="34" charset="-120"/>
-              </a:rPr>
-              <a:t> framework for scalable and asynchronous development.</a:t>
-            </a:r>
-            <a:endParaRPr lang="en-US" sz="1000" b="1" dirty="0"/>
-          </a:p>
-        </p:txBody>
-      </p:sp>
-      <p:sp>
-        <p:nvSpPr>
-          <p:cNvPr id="8" name="Shape 5"/>
-          <p:cNvSpPr/>
-          <p:nvPr/>
-        </p:nvSpPr>
-        <p:spPr>
-          <a:xfrm>
-            <a:off x="3342894" y="1127760"/>
-            <a:ext cx="2560320" cy="1645920"/>
-          </a:xfrm>
-          <a:prstGeom prst="rect">
-            <a:avLst/>
-          </a:prstGeom>
-          <a:solidFill>
-            <a:srgbClr val="0E1628"/>
-          </a:solidFill>
-          <a:ln w="19050">
-            <a:solidFill>
-              <a:srgbClr val="22D3EE"/>
-            </a:solidFill>
-            <a:prstDash val="solid"/>
-          </a:ln>
-        </p:spPr>
-      </p:sp>
-      <p:sp>
-        <p:nvSpPr>
-          <p:cNvPr id="9" name="Text 6"/>
-          <p:cNvSpPr/>
-          <p:nvPr/>
-        </p:nvSpPr>
-        <p:spPr>
-          <a:xfrm>
-            <a:off x="5926074" y="1744579"/>
-            <a:ext cx="274320" cy="365760"/>
-          </a:xfrm>
-          <a:prstGeom prst="rect">
-            <a:avLst/>
-          </a:prstGeom>
-          <a:noFill/>
-          <a:ln/>
-        </p:spPr>
-        <p:txBody>
-          <a:bodyPr wrap="square" rtlCol="0" anchor="ctr"/>
-          <a:lstStyle/>
-          <a:p>
-            <a:pPr marL="0" indent="0" algn="ctr">
-              <a:buNone/>
-            </a:pPr>
-            <a:r>
-              <a:rPr lang="en-US" sz="2200" b="1" dirty="0">
-                <a:solidFill>
-                  <a:srgbClr val="22D3EE"/>
-                </a:solidFill>
-              </a:rPr>
-              <a:t>➔</a:t>
-            </a:r>
-            <a:endParaRPr lang="en-US" sz="2200" dirty="0"/>
-          </a:p>
-        </p:txBody>
-      </p:sp>
-      <p:sp>
-        <p:nvSpPr>
-          <p:cNvPr id="10" name="Text 7"/>
-          <p:cNvSpPr/>
-          <p:nvPr/>
-        </p:nvSpPr>
-        <p:spPr>
-          <a:xfrm>
-            <a:off x="3525774" y="1264920"/>
-            <a:ext cx="457200" cy="274320"/>
-          </a:xfrm>
-          <a:prstGeom prst="rect">
-            <a:avLst/>
-          </a:prstGeom>
-          <a:noFill/>
-          <a:ln/>
-        </p:spPr>
-        <p:txBody>
-          <a:bodyPr wrap="square" rtlCol="0" anchor="ctr"/>
-          <a:lstStyle/>
-          <a:p>
-            <a:pPr marL="0" indent="0" algn="ctr">
-              <a:buNone/>
-            </a:pPr>
-            <a:endParaRPr lang="en-US" sz="1000" b="1" dirty="0">
-              <a:solidFill>
-                <a:srgbClr val="22D3EE"/>
-              </a:solidFill>
-              <a:latin typeface="Consolas" pitchFamily="34" charset="0"/>
-              <a:ea typeface="Consolas" pitchFamily="34" charset="-122"/>
-              <a:cs typeface="Consolas" pitchFamily="34" charset="-120"/>
-            </a:endParaRPr>
-          </a:p>
-          <a:p>
-            <a:pPr marL="0" indent="0" algn="ctr">
-              <a:buNone/>
-            </a:pPr>
-            <a:r>
-              <a:rPr lang="en-US" sz="1000" b="1" dirty="0">
-                <a:solidFill>
-                  <a:srgbClr val="22D3EE"/>
-                </a:solidFill>
-                <a:latin typeface="Consolas" pitchFamily="34" charset="0"/>
-                <a:ea typeface="Consolas" pitchFamily="34" charset="-122"/>
-                <a:cs typeface="Consolas" pitchFamily="34" charset="-120"/>
-              </a:rPr>
-              <a:t>02</a:t>
-            </a:r>
-            <a:endParaRPr lang="en-US" sz="1000" dirty="0"/>
-          </a:p>
-        </p:txBody>
-      </p:sp>
-      <p:sp>
-        <p:nvSpPr>
-          <p:cNvPr id="11" name="Text 8"/>
-          <p:cNvSpPr/>
-          <p:nvPr/>
-        </p:nvSpPr>
-        <p:spPr>
-          <a:xfrm>
-            <a:off x="3525774" y="1584960"/>
-            <a:ext cx="2194560" cy="365760"/>
-          </a:xfrm>
-          <a:prstGeom prst="rect">
-            <a:avLst/>
-          </a:prstGeom>
-          <a:noFill/>
-          <a:ln/>
-        </p:spPr>
-        <p:txBody>
-          <a:bodyPr wrap="square" rtlCol="0" anchor="ctr"/>
-          <a:lstStyle/>
-          <a:p>
-            <a:pPr marL="0" indent="0">
-              <a:buNone/>
-            </a:pPr>
-            <a:endParaRPr lang="en-US" sz="1400" b="1" dirty="0">
-              <a:solidFill>
-                <a:srgbClr val="FFFFFF"/>
-              </a:solidFill>
-              <a:latin typeface="Segoe UI" pitchFamily="34" charset="0"/>
-              <a:ea typeface="Segoe UI" pitchFamily="34" charset="-122"/>
-              <a:cs typeface="Segoe UI" pitchFamily="34" charset="-120"/>
-            </a:endParaRPr>
-          </a:p>
-          <a:p>
-            <a:pPr marL="0" indent="0">
-              <a:buNone/>
-            </a:pPr>
-            <a:r>
-              <a:rPr lang="en-US" sz="1400" b="1" dirty="0">
-                <a:solidFill>
-                  <a:srgbClr val="FFFFFF"/>
-                </a:solidFill>
-                <a:latin typeface="Segoe UI" pitchFamily="34" charset="0"/>
-                <a:ea typeface="Segoe UI" pitchFamily="34" charset="-122"/>
-                <a:cs typeface="Segoe UI" pitchFamily="34" charset="-120"/>
-              </a:rPr>
-              <a:t>Backend development</a:t>
-            </a:r>
-            <a:endParaRPr lang="en-US" sz="1400" dirty="0"/>
-          </a:p>
-        </p:txBody>
-      </p:sp>
-      <p:sp>
-        <p:nvSpPr>
-          <p:cNvPr id="12" name="Text 9"/>
-          <p:cNvSpPr/>
-          <p:nvPr/>
-        </p:nvSpPr>
-        <p:spPr>
-          <a:xfrm>
-            <a:off x="3525774" y="1950720"/>
-            <a:ext cx="2194560" cy="640080"/>
-          </a:xfrm>
-          <a:prstGeom prst="rect">
-            <a:avLst/>
-          </a:prstGeom>
-          <a:noFill/>
-          <a:ln/>
-        </p:spPr>
-        <p:txBody>
-          <a:bodyPr wrap="square" rtlCol="0" anchor="ctr"/>
-          <a:lstStyle/>
-          <a:p>
-            <a:pPr algn="just"/>
-            <a:endParaRPr lang="en-US" sz="1000" dirty="0">
-              <a:solidFill>
-                <a:srgbClr val="8B96A8"/>
-              </a:solidFill>
-              <a:latin typeface="Segoe UI" pitchFamily="34" charset="0"/>
-              <a:ea typeface="Segoe UI" pitchFamily="34" charset="-122"/>
-              <a:cs typeface="Segoe UI" pitchFamily="34" charset="-120"/>
-            </a:endParaRPr>
-          </a:p>
-          <a:p>
-            <a:pPr algn="just"/>
-            <a:r>
-              <a:rPr lang="en-GB" sz="1000" dirty="0">
-                <a:solidFill>
-                  <a:srgbClr val="8B96A8"/>
-                </a:solidFill>
-                <a:latin typeface="Segoe UI" pitchFamily="34" charset="0"/>
-                <a:ea typeface="Segoe UI" pitchFamily="34" charset="-122"/>
-                <a:cs typeface="Segoe UI" pitchFamily="34" charset="-120"/>
-              </a:rPr>
-              <a:t>Integrating the </a:t>
-            </a:r>
-            <a:r>
-              <a:rPr lang="en-GB" sz="1000" b="1" dirty="0" err="1">
-                <a:solidFill>
-                  <a:srgbClr val="8B96A8"/>
-                </a:solidFill>
-                <a:latin typeface="Segoe UI" pitchFamily="34" charset="0"/>
-                <a:ea typeface="Segoe UI" pitchFamily="34" charset="-122"/>
-                <a:cs typeface="Segoe UI" pitchFamily="34" charset="-120"/>
-              </a:rPr>
-              <a:t>SQLAlchemy</a:t>
-            </a:r>
-            <a:r>
-              <a:rPr lang="en-GB" sz="1000" dirty="0">
-                <a:solidFill>
-                  <a:srgbClr val="8B96A8"/>
-                </a:solidFill>
-                <a:latin typeface="Segoe UI" pitchFamily="34" charset="0"/>
-                <a:ea typeface="Segoe UI" pitchFamily="34" charset="-122"/>
-                <a:cs typeface="Segoe UI" pitchFamily="34" charset="-120"/>
-              </a:rPr>
-              <a:t> engine for database management and using </a:t>
-            </a:r>
-            <a:r>
-              <a:rPr lang="en-GB" sz="1000" b="1" dirty="0" err="1">
-                <a:solidFill>
-                  <a:srgbClr val="8B96A8"/>
-                </a:solidFill>
-                <a:latin typeface="Segoe UI" pitchFamily="34" charset="0"/>
-                <a:ea typeface="Segoe UI" pitchFamily="34" charset="-122"/>
-                <a:cs typeface="Segoe UI" pitchFamily="34" charset="-120"/>
-              </a:rPr>
-              <a:t>Pydantic</a:t>
-            </a:r>
-            <a:r>
-              <a:rPr lang="en-GB" sz="1000" dirty="0">
-                <a:solidFill>
-                  <a:srgbClr val="8B96A8"/>
-                </a:solidFill>
-                <a:latin typeface="Segoe UI" pitchFamily="34" charset="0"/>
-                <a:ea typeface="Segoe UI" pitchFamily="34" charset="-122"/>
-                <a:cs typeface="Segoe UI" pitchFamily="34" charset="-120"/>
-              </a:rPr>
-              <a:t> for strict data validation.</a:t>
-            </a:r>
-            <a:endParaRPr lang="en-US" sz="1000" dirty="0"/>
-          </a:p>
-        </p:txBody>
-      </p:sp>
-      <p:sp>
-        <p:nvSpPr>
-          <p:cNvPr id="13" name="Shape 10"/>
-          <p:cNvSpPr/>
-          <p:nvPr/>
-        </p:nvSpPr>
-        <p:spPr>
-          <a:xfrm>
-            <a:off x="6223254" y="1127760"/>
-            <a:ext cx="2560320" cy="1645920"/>
-          </a:xfrm>
-          <a:prstGeom prst="rect">
-            <a:avLst/>
-          </a:prstGeom>
-          <a:solidFill>
-            <a:srgbClr val="0E1628"/>
-          </a:solidFill>
-          <a:ln w="19050">
-            <a:solidFill>
-              <a:srgbClr val="10B981"/>
-            </a:solidFill>
-            <a:prstDash val="solid"/>
-          </a:ln>
-        </p:spPr>
-      </p:sp>
-      <p:sp>
-        <p:nvSpPr>
-          <p:cNvPr id="14" name="Text 11"/>
-          <p:cNvSpPr/>
-          <p:nvPr/>
-        </p:nvSpPr>
-        <p:spPr>
-          <a:xfrm>
-            <a:off x="6406134" y="1264920"/>
-            <a:ext cx="457200" cy="274320"/>
-          </a:xfrm>
-          <a:prstGeom prst="rect">
-            <a:avLst/>
-          </a:prstGeom>
-          <a:noFill/>
-          <a:ln/>
-        </p:spPr>
-        <p:txBody>
-          <a:bodyPr wrap="square" rtlCol="0" anchor="ctr"/>
-          <a:lstStyle/>
-          <a:p>
-            <a:pPr marL="0" indent="0" algn="ctr">
-              <a:buNone/>
-            </a:pPr>
-            <a:endParaRPr lang="en-US" sz="1000" b="1" dirty="0">
-              <a:solidFill>
-                <a:srgbClr val="10B981"/>
-              </a:solidFill>
-              <a:latin typeface="Consolas" pitchFamily="34" charset="0"/>
-              <a:ea typeface="Consolas" pitchFamily="34" charset="-122"/>
-              <a:cs typeface="Consolas" pitchFamily="34" charset="-120"/>
-            </a:endParaRPr>
-          </a:p>
-          <a:p>
-            <a:pPr marL="0" indent="0" algn="ctr">
-              <a:buNone/>
-            </a:pPr>
-            <a:r>
-              <a:rPr lang="en-US" sz="1000" b="1" dirty="0">
-                <a:solidFill>
-                  <a:srgbClr val="10B981"/>
-                </a:solidFill>
-                <a:latin typeface="Consolas" pitchFamily="34" charset="0"/>
-                <a:ea typeface="Consolas" pitchFamily="34" charset="-122"/>
-                <a:cs typeface="Consolas" pitchFamily="34" charset="-120"/>
-              </a:rPr>
-              <a:t>03</a:t>
-            </a:r>
-            <a:endParaRPr lang="en-US" sz="1000" dirty="0"/>
-          </a:p>
-        </p:txBody>
-      </p:sp>
-      <p:sp>
-        <p:nvSpPr>
-          <p:cNvPr id="15" name="Text 12"/>
-          <p:cNvSpPr/>
-          <p:nvPr/>
-        </p:nvSpPr>
-        <p:spPr>
-          <a:xfrm>
-            <a:off x="6406134" y="1584960"/>
-            <a:ext cx="2194560" cy="365760"/>
-          </a:xfrm>
-          <a:prstGeom prst="rect">
-            <a:avLst/>
-          </a:prstGeom>
-          <a:noFill/>
-          <a:ln/>
-        </p:spPr>
-        <p:txBody>
-          <a:bodyPr wrap="square" rtlCol="0" anchor="ctr"/>
-          <a:lstStyle/>
-          <a:p>
-            <a:pPr marL="0" indent="0">
-              <a:buNone/>
-            </a:pPr>
-            <a:endParaRPr lang="en-US" sz="1400" b="1" dirty="0">
-              <a:solidFill>
-                <a:srgbClr val="FFFFFF"/>
-              </a:solidFill>
-              <a:latin typeface="Segoe UI" pitchFamily="34" charset="0"/>
-              <a:ea typeface="Segoe UI" pitchFamily="34" charset="-122"/>
-              <a:cs typeface="Segoe UI" pitchFamily="34" charset="-120"/>
-            </a:endParaRPr>
-          </a:p>
-          <a:p>
-            <a:pPr marL="0" indent="0">
-              <a:buNone/>
-            </a:pPr>
-            <a:r>
-              <a:rPr lang="en-US" sz="1400" b="1" dirty="0">
-                <a:solidFill>
-                  <a:srgbClr val="FFFFFF"/>
-                </a:solidFill>
-                <a:latin typeface="Segoe UI" pitchFamily="34" charset="0"/>
-                <a:cs typeface="Segoe UI" pitchFamily="34" charset="-120"/>
-              </a:rPr>
-              <a:t>Data management</a:t>
-            </a:r>
-          </a:p>
-        </p:txBody>
-      </p:sp>
-      <p:sp>
-        <p:nvSpPr>
-          <p:cNvPr id="16" name="Text 13"/>
-          <p:cNvSpPr/>
-          <p:nvPr/>
-        </p:nvSpPr>
-        <p:spPr>
-          <a:xfrm>
-            <a:off x="6418326" y="1996239"/>
-            <a:ext cx="2331720" cy="640080"/>
-          </a:xfrm>
-          <a:prstGeom prst="rect">
-            <a:avLst/>
-          </a:prstGeom>
-          <a:noFill/>
-          <a:ln/>
-        </p:spPr>
-        <p:txBody>
-          <a:bodyPr wrap="square" rtlCol="0" anchor="ctr"/>
-          <a:lstStyle/>
-          <a:p>
-            <a:pPr algn="just"/>
-            <a:endParaRPr lang="en-GB" sz="1000" dirty="0">
-              <a:solidFill>
-                <a:srgbClr val="8B96A8"/>
-              </a:solidFill>
-              <a:latin typeface="Segoe UI" pitchFamily="34" charset="0"/>
-              <a:ea typeface="Segoe UI" pitchFamily="34" charset="-122"/>
-              <a:cs typeface="Segoe UI" pitchFamily="34" charset="-120"/>
-            </a:endParaRPr>
-          </a:p>
-          <a:p>
-            <a:pPr algn="just"/>
-            <a:r>
-              <a:rPr lang="en-GB" sz="1000" dirty="0">
-                <a:solidFill>
-                  <a:srgbClr val="8B96A8"/>
-                </a:solidFill>
-                <a:latin typeface="Segoe UI" pitchFamily="34" charset="0"/>
-                <a:ea typeface="Segoe UI" pitchFamily="34" charset="-122"/>
-                <a:cs typeface="Segoe UI" pitchFamily="34" charset="-120"/>
-              </a:rPr>
-              <a:t>Designing the </a:t>
-            </a:r>
-            <a:r>
-              <a:rPr lang="en-GB" sz="1000" b="1" dirty="0">
-                <a:solidFill>
-                  <a:srgbClr val="8B96A8"/>
-                </a:solidFill>
-                <a:latin typeface="Segoe UI" pitchFamily="34" charset="0"/>
-                <a:ea typeface="Segoe UI" pitchFamily="34" charset="-122"/>
-                <a:cs typeface="Segoe UI" pitchFamily="34" charset="-120"/>
-              </a:rPr>
-              <a:t>PostgreSQL</a:t>
-            </a:r>
-            <a:r>
-              <a:rPr lang="en-GB" sz="1000" dirty="0">
-                <a:solidFill>
-                  <a:srgbClr val="8B96A8"/>
-                </a:solidFill>
-                <a:latin typeface="Segoe UI" pitchFamily="34" charset="0"/>
-                <a:ea typeface="Segoe UI" pitchFamily="34" charset="-122"/>
-                <a:cs typeface="Segoe UI" pitchFamily="34" charset="-120"/>
-              </a:rPr>
-              <a:t> structure and generating interactive documentation via </a:t>
-            </a:r>
-            <a:r>
-              <a:rPr lang="en-GB" sz="1000" b="1" dirty="0">
-                <a:solidFill>
-                  <a:srgbClr val="8B96A8"/>
-                </a:solidFill>
-                <a:latin typeface="Segoe UI" pitchFamily="34" charset="0"/>
-                <a:ea typeface="Segoe UI" pitchFamily="34" charset="-122"/>
-                <a:cs typeface="Segoe UI" pitchFamily="34" charset="-120"/>
-              </a:rPr>
-              <a:t>Swagger</a:t>
-            </a:r>
-            <a:r>
-              <a:rPr lang="en-GB" sz="1000" dirty="0">
-                <a:solidFill>
-                  <a:srgbClr val="8B96A8"/>
-                </a:solidFill>
-                <a:latin typeface="Segoe UI" pitchFamily="34" charset="0"/>
-                <a:ea typeface="Segoe UI" pitchFamily="34" charset="-122"/>
-                <a:cs typeface="Segoe UI" pitchFamily="34" charset="-120"/>
-              </a:rPr>
-              <a:t> for endpoint testing.</a:t>
-            </a:r>
-            <a:endParaRPr lang="en-US" sz="1000" dirty="0">
-              <a:solidFill>
-                <a:srgbClr val="8B96A8"/>
-              </a:solidFill>
-              <a:latin typeface="Segoe UI" pitchFamily="34" charset="0"/>
-              <a:ea typeface="Segoe UI" pitchFamily="34" charset="-122"/>
-              <a:cs typeface="Segoe UI" pitchFamily="34" charset="-120"/>
-            </a:endParaRPr>
-          </a:p>
-        </p:txBody>
-      </p:sp>
-      <p:sp>
-        <p:nvSpPr>
-          <p:cNvPr id="17" name="Shape 14"/>
-          <p:cNvSpPr/>
-          <p:nvPr/>
-        </p:nvSpPr>
-        <p:spPr>
-          <a:xfrm>
-            <a:off x="462534" y="3139440"/>
-            <a:ext cx="2560320" cy="1645920"/>
-          </a:xfrm>
-          <a:prstGeom prst="rect">
-            <a:avLst/>
-          </a:prstGeom>
-          <a:solidFill>
-            <a:srgbClr val="0E1628"/>
-          </a:solidFill>
-          <a:ln w="19050">
-            <a:solidFill>
-              <a:srgbClr val="6366F1"/>
-            </a:solidFill>
-            <a:prstDash val="solid"/>
-          </a:ln>
-        </p:spPr>
-      </p:sp>
-      <p:sp>
-        <p:nvSpPr>
-          <p:cNvPr id="18" name="Text 15"/>
-          <p:cNvSpPr/>
-          <p:nvPr/>
-        </p:nvSpPr>
-        <p:spPr>
-          <a:xfrm>
-            <a:off x="3045714" y="3779520"/>
-            <a:ext cx="274320" cy="365760"/>
-          </a:xfrm>
-          <a:prstGeom prst="rect">
-            <a:avLst/>
-          </a:prstGeom>
-          <a:noFill/>
-          <a:ln/>
-        </p:spPr>
-        <p:txBody>
-          <a:bodyPr wrap="square" rtlCol="0" anchor="ctr"/>
-          <a:lstStyle/>
-          <a:p>
-            <a:pPr marL="0" indent="0" algn="ctr">
-              <a:buNone/>
-            </a:pPr>
-            <a:r>
-              <a:rPr lang="en-US" sz="2200" b="1" dirty="0">
-                <a:solidFill>
-                  <a:srgbClr val="22D3EE"/>
-                </a:solidFill>
-              </a:rPr>
-              <a:t>➔</a:t>
-            </a:r>
-            <a:endParaRPr lang="en-US" sz="2200" dirty="0"/>
-          </a:p>
-        </p:txBody>
-      </p:sp>
-      <p:sp>
-        <p:nvSpPr>
-          <p:cNvPr id="19" name="Text 16"/>
-          <p:cNvSpPr/>
-          <p:nvPr/>
-        </p:nvSpPr>
-        <p:spPr>
-          <a:xfrm>
-            <a:off x="645414" y="3276600"/>
-            <a:ext cx="457200" cy="274320"/>
-          </a:xfrm>
-          <a:prstGeom prst="rect">
-            <a:avLst/>
-          </a:prstGeom>
-          <a:noFill/>
-          <a:ln/>
-        </p:spPr>
-        <p:txBody>
-          <a:bodyPr wrap="square" rtlCol="0" anchor="ctr"/>
-          <a:lstStyle/>
-          <a:p>
-            <a:pPr marL="0" indent="0" algn="ctr">
-              <a:buNone/>
-            </a:pPr>
-            <a:endParaRPr lang="en-US" sz="1000" b="1" dirty="0">
-              <a:solidFill>
-                <a:srgbClr val="6366F1"/>
-              </a:solidFill>
-              <a:latin typeface="Consolas" pitchFamily="34" charset="0"/>
-              <a:ea typeface="Consolas" pitchFamily="34" charset="-122"/>
-              <a:cs typeface="Consolas" pitchFamily="34" charset="-120"/>
-            </a:endParaRPr>
-          </a:p>
-          <a:p>
-            <a:pPr marL="0" indent="0" algn="ctr">
-              <a:buNone/>
-            </a:pPr>
-            <a:r>
-              <a:rPr lang="en-US" sz="1000" b="1" dirty="0">
-                <a:solidFill>
-                  <a:srgbClr val="6366F1"/>
-                </a:solidFill>
-                <a:latin typeface="Consolas" pitchFamily="34" charset="0"/>
-                <a:ea typeface="Consolas" pitchFamily="34" charset="-122"/>
-                <a:cs typeface="Consolas" pitchFamily="34" charset="-120"/>
-              </a:rPr>
-              <a:t>04</a:t>
-            </a:r>
-            <a:endParaRPr lang="en-US" sz="1000" dirty="0"/>
-          </a:p>
-        </p:txBody>
-      </p:sp>
-      <p:sp>
-        <p:nvSpPr>
-          <p:cNvPr id="20" name="Text 17"/>
-          <p:cNvSpPr/>
-          <p:nvPr/>
-        </p:nvSpPr>
-        <p:spPr>
-          <a:xfrm>
-            <a:off x="645414" y="3596640"/>
-            <a:ext cx="2194560" cy="365760"/>
-          </a:xfrm>
-          <a:prstGeom prst="rect">
-            <a:avLst/>
-          </a:prstGeom>
-          <a:noFill/>
-          <a:ln/>
-        </p:spPr>
-        <p:txBody>
-          <a:bodyPr wrap="square" rtlCol="0" anchor="ctr"/>
-          <a:lstStyle/>
-          <a:p>
-            <a:pPr marL="0" indent="0">
-              <a:buNone/>
-            </a:pPr>
-            <a:endParaRPr lang="en-US" sz="1400" b="1" dirty="0">
-              <a:solidFill>
-                <a:srgbClr val="FFFFFF"/>
-              </a:solidFill>
-              <a:latin typeface="Segoe UI" pitchFamily="34" charset="0"/>
-              <a:ea typeface="Segoe UI" pitchFamily="34" charset="-122"/>
-              <a:cs typeface="Segoe UI" pitchFamily="34" charset="-120"/>
-            </a:endParaRPr>
-          </a:p>
-          <a:p>
-            <a:pPr marL="0" indent="0">
-              <a:buNone/>
-            </a:pPr>
-            <a:r>
-              <a:rPr lang="en-US" sz="1400" b="1" dirty="0">
-                <a:solidFill>
-                  <a:srgbClr val="FFFFFF"/>
-                </a:solidFill>
-                <a:latin typeface="Segoe UI" pitchFamily="34" charset="0"/>
-                <a:ea typeface="Segoe UI" pitchFamily="34" charset="-122"/>
-                <a:cs typeface="Segoe UI" pitchFamily="34" charset="-120"/>
-              </a:rPr>
-              <a:t>React interface</a:t>
-            </a:r>
-            <a:endParaRPr lang="en-US" sz="1400" dirty="0"/>
-          </a:p>
-        </p:txBody>
-      </p:sp>
-      <p:sp>
-        <p:nvSpPr>
-          <p:cNvPr id="21" name="Text 18"/>
-          <p:cNvSpPr/>
-          <p:nvPr/>
-        </p:nvSpPr>
-        <p:spPr>
-          <a:xfrm>
-            <a:off x="645414" y="3962400"/>
-            <a:ext cx="2194560" cy="640080"/>
-          </a:xfrm>
-          <a:prstGeom prst="rect">
-            <a:avLst/>
-          </a:prstGeom>
-          <a:noFill/>
-          <a:ln/>
-        </p:spPr>
-        <p:txBody>
-          <a:bodyPr wrap="square" rtlCol="0" anchor="ctr"/>
-          <a:lstStyle/>
-          <a:p>
-            <a:pPr algn="just"/>
-            <a:endParaRPr lang="en-US" sz="1000" dirty="0">
-              <a:solidFill>
-                <a:srgbClr val="8B96A8"/>
-              </a:solidFill>
-              <a:latin typeface="Segoe UI" pitchFamily="34" charset="0"/>
-              <a:ea typeface="Segoe UI" pitchFamily="34" charset="-122"/>
-              <a:cs typeface="Segoe UI" pitchFamily="34" charset="-120"/>
-            </a:endParaRPr>
-          </a:p>
-          <a:p>
-            <a:pPr algn="just"/>
-            <a:r>
-              <a:rPr lang="en-GB" sz="1000" dirty="0">
-                <a:solidFill>
-                  <a:srgbClr val="8B96A8"/>
-                </a:solidFill>
-                <a:latin typeface="Segoe UI" pitchFamily="34" charset="0"/>
-                <a:ea typeface="Segoe UI" pitchFamily="34" charset="-122"/>
-                <a:cs typeface="Segoe UI" pitchFamily="34" charset="-120"/>
-              </a:rPr>
-              <a:t>Building </a:t>
-            </a:r>
-            <a:r>
-              <a:rPr lang="en-GB" sz="1000" b="1" dirty="0">
-                <a:solidFill>
-                  <a:srgbClr val="8B96A8"/>
-                </a:solidFill>
-                <a:latin typeface="Segoe UI" pitchFamily="34" charset="0"/>
-                <a:ea typeface="Segoe UI" pitchFamily="34" charset="-122"/>
-                <a:cs typeface="Segoe UI" pitchFamily="34" charset="-120"/>
-              </a:rPr>
-              <a:t>UI</a:t>
-            </a:r>
-            <a:r>
-              <a:rPr lang="en-GB" sz="1000" dirty="0">
-                <a:solidFill>
-                  <a:srgbClr val="8B96A8"/>
-                </a:solidFill>
-                <a:latin typeface="Segoe UI" pitchFamily="34" charset="0"/>
-                <a:ea typeface="Segoe UI" pitchFamily="34" charset="-122"/>
-                <a:cs typeface="Segoe UI" pitchFamily="34" charset="-120"/>
-              </a:rPr>
-              <a:t> components with </a:t>
-            </a:r>
-            <a:r>
-              <a:rPr lang="en-GB" sz="1000" b="1" dirty="0">
-                <a:solidFill>
-                  <a:srgbClr val="8B96A8"/>
-                </a:solidFill>
-                <a:latin typeface="Segoe UI" pitchFamily="34" charset="0"/>
-                <a:ea typeface="Segoe UI" pitchFamily="34" charset="-122"/>
-                <a:cs typeface="Segoe UI" pitchFamily="34" charset="-120"/>
-              </a:rPr>
-              <a:t>Tailwind CSS</a:t>
-            </a:r>
-            <a:r>
-              <a:rPr lang="en-GB" sz="1000" dirty="0">
-                <a:solidFill>
-                  <a:srgbClr val="8B96A8"/>
-                </a:solidFill>
-                <a:latin typeface="Segoe UI" pitchFamily="34" charset="0"/>
-                <a:ea typeface="Segoe UI" pitchFamily="34" charset="-122"/>
-                <a:cs typeface="Segoe UI" pitchFamily="34" charset="-120"/>
-              </a:rPr>
-              <a:t> and integrating the </a:t>
-            </a:r>
-            <a:r>
-              <a:rPr lang="en-GB" sz="1000" b="1" dirty="0">
-                <a:solidFill>
-                  <a:srgbClr val="8B96A8"/>
-                </a:solidFill>
-                <a:latin typeface="Segoe UI" pitchFamily="34" charset="0"/>
-                <a:ea typeface="Segoe UI" pitchFamily="34" charset="-122"/>
-                <a:cs typeface="Segoe UI" pitchFamily="34" charset="-120"/>
-              </a:rPr>
-              <a:t>REST API</a:t>
-            </a:r>
-            <a:r>
-              <a:rPr lang="en-GB" sz="1000" dirty="0">
-                <a:solidFill>
-                  <a:srgbClr val="8B96A8"/>
-                </a:solidFill>
-                <a:latin typeface="Segoe UI" pitchFamily="34" charset="0"/>
-                <a:ea typeface="Segoe UI" pitchFamily="34" charset="-122"/>
-                <a:cs typeface="Segoe UI" pitchFamily="34" charset="-120"/>
-              </a:rPr>
-              <a:t> logic.ac</a:t>
-            </a:r>
-            <a:endParaRPr lang="en-US" sz="1000" dirty="0"/>
-          </a:p>
-        </p:txBody>
-      </p:sp>
-      <p:sp>
-        <p:nvSpPr>
-          <p:cNvPr id="22" name="Shape 19"/>
-          <p:cNvSpPr/>
-          <p:nvPr/>
-        </p:nvSpPr>
-        <p:spPr>
-          <a:xfrm>
-            <a:off x="3342894" y="3139440"/>
-            <a:ext cx="2560320" cy="1645920"/>
-          </a:xfrm>
-          <a:prstGeom prst="rect">
-            <a:avLst/>
-          </a:prstGeom>
-          <a:solidFill>
-            <a:srgbClr val="0E1628"/>
-          </a:solidFill>
-          <a:ln w="19050">
-            <a:solidFill>
-              <a:srgbClr val="FFFFFF"/>
-            </a:solidFill>
-            <a:prstDash val="solid"/>
-          </a:ln>
-        </p:spPr>
-      </p:sp>
-      <p:sp>
-        <p:nvSpPr>
-          <p:cNvPr id="23" name="Text 20"/>
-          <p:cNvSpPr/>
-          <p:nvPr/>
-        </p:nvSpPr>
-        <p:spPr>
-          <a:xfrm>
-            <a:off x="5931408" y="3771900"/>
-            <a:ext cx="274320" cy="365760"/>
-          </a:xfrm>
-          <a:prstGeom prst="rect">
-            <a:avLst/>
-          </a:prstGeom>
-          <a:noFill/>
-          <a:ln/>
-        </p:spPr>
-        <p:txBody>
-          <a:bodyPr wrap="square" rtlCol="0" anchor="ctr"/>
-          <a:lstStyle/>
-          <a:p>
-            <a:pPr marL="0" indent="0" algn="ctr">
-              <a:buNone/>
-            </a:pPr>
-            <a:r>
-              <a:rPr lang="en-US" sz="2200" b="1" dirty="0">
-                <a:solidFill>
-                  <a:srgbClr val="22D3EE"/>
-                </a:solidFill>
-              </a:rPr>
-              <a:t>➔</a:t>
-            </a:r>
-            <a:endParaRPr lang="en-US" sz="2200" dirty="0"/>
-          </a:p>
-        </p:txBody>
-      </p:sp>
-      <p:sp>
-        <p:nvSpPr>
-          <p:cNvPr id="24" name="Text 21"/>
-          <p:cNvSpPr/>
-          <p:nvPr/>
-        </p:nvSpPr>
-        <p:spPr>
-          <a:xfrm>
-            <a:off x="3525774" y="3276600"/>
-            <a:ext cx="457200" cy="274320"/>
-          </a:xfrm>
-          <a:prstGeom prst="rect">
-            <a:avLst/>
-          </a:prstGeom>
-          <a:noFill/>
-          <a:ln/>
-        </p:spPr>
-        <p:txBody>
-          <a:bodyPr wrap="square" rtlCol="0" anchor="ctr"/>
-          <a:lstStyle/>
-          <a:p>
-            <a:pPr marL="0" indent="0" algn="ctr">
-              <a:buNone/>
-            </a:pPr>
-            <a:endParaRPr lang="en-US" sz="1000" b="1" dirty="0">
-              <a:solidFill>
-                <a:srgbClr val="FFFFFF"/>
-              </a:solidFill>
-              <a:latin typeface="Consolas" pitchFamily="34" charset="0"/>
-              <a:ea typeface="Consolas" pitchFamily="34" charset="-122"/>
-              <a:cs typeface="Consolas" pitchFamily="34" charset="-120"/>
-            </a:endParaRPr>
-          </a:p>
-          <a:p>
-            <a:pPr marL="0" indent="0" algn="ctr">
-              <a:buNone/>
-            </a:pPr>
-            <a:r>
-              <a:rPr lang="en-US" sz="1000" b="1" dirty="0">
-                <a:solidFill>
-                  <a:srgbClr val="FFFFFF"/>
-                </a:solidFill>
-                <a:latin typeface="Consolas" pitchFamily="34" charset="0"/>
-                <a:ea typeface="Consolas" pitchFamily="34" charset="-122"/>
-                <a:cs typeface="Consolas" pitchFamily="34" charset="-120"/>
-              </a:rPr>
-              <a:t>05</a:t>
-            </a:r>
-            <a:endParaRPr lang="en-US" sz="1000" dirty="0"/>
-          </a:p>
-        </p:txBody>
-      </p:sp>
-      <p:sp>
-        <p:nvSpPr>
-          <p:cNvPr id="25" name="Text 22"/>
-          <p:cNvSpPr/>
-          <p:nvPr/>
-        </p:nvSpPr>
-        <p:spPr>
-          <a:xfrm>
-            <a:off x="3525774" y="3596640"/>
-            <a:ext cx="2194560" cy="365760"/>
-          </a:xfrm>
-          <a:prstGeom prst="rect">
-            <a:avLst/>
-          </a:prstGeom>
-          <a:noFill/>
-          <a:ln/>
-        </p:spPr>
-        <p:txBody>
-          <a:bodyPr wrap="square" rtlCol="0" anchor="ctr"/>
-          <a:lstStyle/>
-          <a:p>
-            <a:pPr marL="0" indent="0">
-              <a:buNone/>
-            </a:pPr>
-            <a:endParaRPr lang="en-US" sz="1400" b="1" dirty="0">
-              <a:solidFill>
-                <a:srgbClr val="FFFFFF"/>
-              </a:solidFill>
-              <a:latin typeface="Segoe UI" pitchFamily="34" charset="0"/>
-              <a:ea typeface="Segoe UI" pitchFamily="34" charset="-122"/>
-              <a:cs typeface="Segoe UI" pitchFamily="34" charset="-120"/>
-            </a:endParaRPr>
-          </a:p>
-          <a:p>
-            <a:r>
-              <a:rPr lang="en-US" sz="1400" b="1" dirty="0">
-                <a:solidFill>
-                  <a:srgbClr val="FFFFFF"/>
-                </a:solidFill>
-                <a:latin typeface="Segoe UI" pitchFamily="34" charset="0"/>
-                <a:ea typeface="Segoe UI" pitchFamily="34" charset="-122"/>
-                <a:cs typeface="Segoe UI" pitchFamily="34" charset="-120"/>
-              </a:rPr>
-              <a:t>Git synchronization</a:t>
-            </a:r>
-            <a:endParaRPr lang="en-US" sz="1400" dirty="0"/>
-          </a:p>
-        </p:txBody>
-      </p:sp>
-      <p:sp>
-        <p:nvSpPr>
-          <p:cNvPr id="26" name="Text 23"/>
-          <p:cNvSpPr/>
-          <p:nvPr/>
-        </p:nvSpPr>
-        <p:spPr>
-          <a:xfrm>
-            <a:off x="3525774" y="3962400"/>
-            <a:ext cx="2194560" cy="640080"/>
-          </a:xfrm>
-          <a:prstGeom prst="rect">
-            <a:avLst/>
-          </a:prstGeom>
-          <a:noFill/>
-          <a:ln/>
-        </p:spPr>
-        <p:txBody>
-          <a:bodyPr wrap="square" rtlCol="0" anchor="ctr"/>
-          <a:lstStyle/>
-          <a:p>
-            <a:pPr algn="just"/>
-            <a:endParaRPr lang="en-US" sz="1000" dirty="0">
-              <a:solidFill>
-                <a:srgbClr val="8B96A8"/>
-              </a:solidFill>
-              <a:latin typeface="Segoe UI" pitchFamily="34" charset="0"/>
-              <a:ea typeface="Segoe UI" pitchFamily="34" charset="-122"/>
-              <a:cs typeface="Segoe UI" pitchFamily="34" charset="-120"/>
-            </a:endParaRPr>
-          </a:p>
-          <a:p>
-            <a:pPr algn="just"/>
-            <a:r>
-              <a:rPr lang="en-GB" sz="1000" dirty="0">
-                <a:solidFill>
-                  <a:srgbClr val="8B96A8"/>
-                </a:solidFill>
-                <a:latin typeface="Segoe UI" pitchFamily="34" charset="0"/>
-                <a:ea typeface="Segoe UI" pitchFamily="34" charset="-122"/>
-                <a:cs typeface="Segoe UI" pitchFamily="34" charset="-120"/>
-              </a:rPr>
-              <a:t>Source code versioning using </a:t>
-            </a:r>
-            <a:r>
-              <a:rPr lang="en-GB" sz="1000" b="1" dirty="0">
-                <a:solidFill>
-                  <a:srgbClr val="8B96A8"/>
-                </a:solidFill>
-                <a:latin typeface="Segoe UI" pitchFamily="34" charset="0"/>
-                <a:ea typeface="Segoe UI" pitchFamily="34" charset="-122"/>
-                <a:cs typeface="Segoe UI" pitchFamily="34" charset="-120"/>
-              </a:rPr>
-              <a:t>GitHub</a:t>
-            </a:r>
-            <a:r>
-              <a:rPr lang="en-GB" sz="1000" dirty="0">
-                <a:solidFill>
-                  <a:srgbClr val="8B96A8"/>
-                </a:solidFill>
-                <a:latin typeface="Segoe UI" pitchFamily="34" charset="0"/>
-                <a:ea typeface="Segoe UI" pitchFamily="34" charset="-122"/>
-                <a:cs typeface="Segoe UI" pitchFamily="34" charset="-120"/>
-              </a:rPr>
-              <a:t> and configuring the relational database instance in </a:t>
-            </a:r>
-            <a:r>
-              <a:rPr lang="en-GB" sz="1000" b="1" dirty="0" err="1">
-                <a:solidFill>
-                  <a:srgbClr val="8B96A8"/>
-                </a:solidFill>
-                <a:latin typeface="Segoe UI" pitchFamily="34" charset="0"/>
-                <a:ea typeface="Segoe UI" pitchFamily="34" charset="-122"/>
-                <a:cs typeface="Segoe UI" pitchFamily="34" charset="-120"/>
-              </a:rPr>
-              <a:t>Supabase</a:t>
-            </a:r>
-            <a:r>
-              <a:rPr lang="en-GB" sz="1000" dirty="0">
-                <a:solidFill>
-                  <a:srgbClr val="8B96A8"/>
-                </a:solidFill>
-                <a:latin typeface="Segoe UI" pitchFamily="34" charset="0"/>
-                <a:ea typeface="Segoe UI" pitchFamily="34" charset="-122"/>
-                <a:cs typeface="Segoe UI" pitchFamily="34" charset="-120"/>
-              </a:rPr>
-              <a:t>.</a:t>
-            </a:r>
-            <a:endParaRPr lang="en-US" sz="1000" dirty="0"/>
-          </a:p>
-        </p:txBody>
-      </p:sp>
-      <p:sp>
-        <p:nvSpPr>
-          <p:cNvPr id="27" name="Shape 24"/>
-          <p:cNvSpPr/>
-          <p:nvPr/>
-        </p:nvSpPr>
-        <p:spPr>
-          <a:xfrm>
-            <a:off x="6223254" y="3139440"/>
-            <a:ext cx="2560320" cy="1645920"/>
-          </a:xfrm>
-          <a:prstGeom prst="rect">
-            <a:avLst/>
-          </a:prstGeom>
-          <a:solidFill>
-            <a:srgbClr val="0E1628"/>
-          </a:solidFill>
-          <a:ln w="19050">
-            <a:solidFill>
-              <a:srgbClr val="F59E0B"/>
-            </a:solidFill>
-            <a:prstDash val="solid"/>
-          </a:ln>
-        </p:spPr>
-      </p:sp>
-      <p:sp>
-        <p:nvSpPr>
-          <p:cNvPr id="28" name="Text 25"/>
-          <p:cNvSpPr/>
-          <p:nvPr/>
-        </p:nvSpPr>
-        <p:spPr>
-          <a:xfrm>
-            <a:off x="6406134" y="3276600"/>
-            <a:ext cx="457200" cy="274320"/>
-          </a:xfrm>
-          <a:prstGeom prst="rect">
-            <a:avLst/>
-          </a:prstGeom>
-          <a:noFill/>
-          <a:ln/>
-        </p:spPr>
-        <p:txBody>
-          <a:bodyPr wrap="square" rtlCol="0" anchor="ctr"/>
-          <a:lstStyle/>
-          <a:p>
-            <a:pPr marL="0" indent="0" algn="ctr">
-              <a:buNone/>
-            </a:pPr>
-            <a:endParaRPr lang="en-US" sz="1000" b="1" dirty="0">
-              <a:solidFill>
-                <a:srgbClr val="F59E0B"/>
-              </a:solidFill>
-              <a:latin typeface="Consolas" pitchFamily="34" charset="0"/>
-              <a:ea typeface="Consolas" pitchFamily="34" charset="-122"/>
-              <a:cs typeface="Consolas" pitchFamily="34" charset="-120"/>
-            </a:endParaRPr>
-          </a:p>
-          <a:p>
-            <a:pPr marL="0" indent="0" algn="ctr">
-              <a:buNone/>
-            </a:pPr>
-            <a:r>
-              <a:rPr lang="en-US" sz="1000" b="1" dirty="0">
-                <a:solidFill>
-                  <a:srgbClr val="F59E0B"/>
-                </a:solidFill>
-                <a:latin typeface="Consolas" pitchFamily="34" charset="0"/>
-                <a:ea typeface="Consolas" pitchFamily="34" charset="-122"/>
-                <a:cs typeface="Consolas" pitchFamily="34" charset="-120"/>
-              </a:rPr>
-              <a:t>06</a:t>
-            </a:r>
-            <a:endParaRPr lang="en-US" sz="1000" dirty="0"/>
-          </a:p>
-        </p:txBody>
-      </p:sp>
-      <p:sp>
-        <p:nvSpPr>
-          <p:cNvPr id="29" name="Text 26"/>
-          <p:cNvSpPr/>
-          <p:nvPr/>
-        </p:nvSpPr>
-        <p:spPr>
-          <a:xfrm>
-            <a:off x="6406134" y="3596640"/>
-            <a:ext cx="2194560" cy="365760"/>
-          </a:xfrm>
-          <a:prstGeom prst="rect">
-            <a:avLst/>
-          </a:prstGeom>
-          <a:noFill/>
-          <a:ln/>
-        </p:spPr>
-        <p:txBody>
-          <a:bodyPr wrap="square" rtlCol="0" anchor="ctr"/>
-          <a:lstStyle/>
-          <a:p>
-            <a:pPr marL="0" indent="0">
-              <a:buNone/>
-            </a:pPr>
-            <a:endParaRPr lang="en-US" sz="1400" b="1" dirty="0">
-              <a:solidFill>
-                <a:srgbClr val="FFFFFF"/>
-              </a:solidFill>
-              <a:latin typeface="Segoe UI" pitchFamily="34" charset="0"/>
-              <a:ea typeface="Segoe UI" pitchFamily="34" charset="-122"/>
-              <a:cs typeface="Segoe UI" pitchFamily="34" charset="-120"/>
-            </a:endParaRPr>
-          </a:p>
-          <a:p>
-            <a:pPr marL="0" indent="0">
-              <a:buNone/>
-            </a:pPr>
-            <a:r>
-              <a:rPr lang="en-US" sz="1400" b="1" dirty="0">
-                <a:solidFill>
-                  <a:srgbClr val="FFFFFF"/>
-                </a:solidFill>
-                <a:latin typeface="Segoe UI" pitchFamily="34" charset="0"/>
-                <a:ea typeface="Segoe UI" pitchFamily="34" charset="-122"/>
-                <a:cs typeface="Segoe UI" pitchFamily="34" charset="-120"/>
-              </a:rPr>
-              <a:t>Cloud launch</a:t>
-            </a:r>
-            <a:endParaRPr lang="en-US" sz="1400" dirty="0"/>
-          </a:p>
-        </p:txBody>
-      </p:sp>
-      <p:sp>
-        <p:nvSpPr>
-          <p:cNvPr id="30" name="Text 27"/>
-          <p:cNvSpPr/>
-          <p:nvPr/>
-        </p:nvSpPr>
-        <p:spPr>
-          <a:xfrm>
-            <a:off x="6406134" y="3962400"/>
-            <a:ext cx="2343912" cy="640080"/>
-          </a:xfrm>
-          <a:prstGeom prst="rect">
-            <a:avLst/>
-          </a:prstGeom>
-          <a:noFill/>
-          <a:ln/>
-        </p:spPr>
-        <p:txBody>
-          <a:bodyPr wrap="square" rtlCol="0" anchor="ctr"/>
-          <a:lstStyle/>
-          <a:p>
-            <a:pPr algn="just"/>
-            <a:r>
-              <a:rPr lang="en-GB" sz="1000" dirty="0">
-                <a:solidFill>
-                  <a:srgbClr val="8B96A8"/>
-                </a:solidFill>
-                <a:latin typeface="Segoe UI" pitchFamily="34" charset="0"/>
-                <a:ea typeface="Segoe UI" pitchFamily="34" charset="-122"/>
-                <a:cs typeface="Segoe UI" pitchFamily="34" charset="-120"/>
-              </a:rPr>
-              <a:t>Hosting the frontend application on </a:t>
-            </a:r>
-            <a:r>
-              <a:rPr lang="en-GB" sz="1000" b="1" dirty="0" err="1">
-                <a:solidFill>
-                  <a:srgbClr val="8B96A8"/>
-                </a:solidFill>
-                <a:latin typeface="Segoe UI" pitchFamily="34" charset="0"/>
-                <a:ea typeface="Segoe UI" pitchFamily="34" charset="-122"/>
-                <a:cs typeface="Segoe UI" pitchFamily="34" charset="-120"/>
-              </a:rPr>
-              <a:t>Hostinger</a:t>
-            </a:r>
-            <a:r>
-              <a:rPr lang="en-GB" sz="1000" dirty="0">
-                <a:solidFill>
-                  <a:srgbClr val="8B96A8"/>
-                </a:solidFill>
-                <a:latin typeface="Segoe UI" pitchFamily="34" charset="0"/>
-                <a:ea typeface="Segoe UI" pitchFamily="34" charset="-122"/>
-                <a:cs typeface="Segoe UI" pitchFamily="34" charset="-120"/>
-              </a:rPr>
-              <a:t> and deploying the backend service on the </a:t>
-            </a:r>
-            <a:r>
-              <a:rPr lang="en-GB" sz="1000" b="1" dirty="0">
-                <a:solidFill>
-                  <a:srgbClr val="8B96A8"/>
-                </a:solidFill>
-                <a:latin typeface="Segoe UI" pitchFamily="34" charset="0"/>
-                <a:ea typeface="Segoe UI" pitchFamily="34" charset="-122"/>
-                <a:cs typeface="Segoe UI" pitchFamily="34" charset="-120"/>
-              </a:rPr>
-              <a:t>Render</a:t>
-            </a:r>
-            <a:r>
-              <a:rPr lang="en-GB" sz="1000" dirty="0">
-                <a:solidFill>
-                  <a:srgbClr val="8B96A8"/>
-                </a:solidFill>
-                <a:latin typeface="Segoe UI" pitchFamily="34" charset="0"/>
-                <a:ea typeface="Segoe UI" pitchFamily="34" charset="-122"/>
-                <a:cs typeface="Segoe UI" pitchFamily="34" charset="-120"/>
-              </a:rPr>
-              <a:t> platform.</a:t>
-            </a:r>
-            <a:endParaRPr lang="en-US" sz="1000" dirty="0"/>
-          </a:p>
-        </p:txBody>
-      </p:sp>
-      <p:pic>
-        <p:nvPicPr>
-          <p:cNvPr id="32" name="Image 2">
-            <a:extLst>
-              <a:ext uri="{FF2B5EF4-FFF2-40B4-BE49-F238E27FC236}">
-                <a16:creationId xmlns:a16="http://schemas.microsoft.com/office/drawing/2014/main" id="{E3B6C81A-DA29-EE96-4060-522DD42A02C5}"/>
-              </a:ext>
-            </a:extLst>
-          </p:cNvPr>
-          <p:cNvPicPr>
-            <a:picLocks noChangeAspect="1"/>
-          </p:cNvPicPr>
-          <p:nvPr/>
-        </p:nvPicPr>
-        <p:blipFill>
-          <a:blip r:embed="rId3"/>
-          <a:srcRect l="25333" r="25333"/>
-          <a:stretch/>
-        </p:blipFill>
-        <p:spPr>
-          <a:xfrm>
-            <a:off x="1914144" y="1211580"/>
-            <a:ext cx="571500" cy="530352"/>
-          </a:xfrm>
-          <a:prstGeom prst="ellipse">
-            <a:avLst/>
-          </a:prstGeom>
-          <a:ln w="63500" cap="rnd">
-            <a:noFill/>
-          </a:ln>
-          <a:effectLst>
-            <a:outerShdw blurRad="381000" dist="292100" dir="5400000" sx="-80000" sy="-18000" rotWithShape="0">
-              <a:srgbClr val="000000">
-                <a:alpha val="22000"/>
-              </a:srgbClr>
-            </a:outerShdw>
-          </a:effectLst>
-        </p:spPr>
-      </p:pic>
-      <p:pic>
-        <p:nvPicPr>
-          <p:cNvPr id="33" name="Image 3">
-            <a:extLst>
-              <a:ext uri="{FF2B5EF4-FFF2-40B4-BE49-F238E27FC236}">
-                <a16:creationId xmlns:a16="http://schemas.microsoft.com/office/drawing/2014/main" id="{02F8A32E-CEFF-4100-A2BF-7813295BD274}"/>
-              </a:ext>
-            </a:extLst>
-          </p:cNvPr>
-          <p:cNvPicPr>
-            <a:picLocks noChangeAspect="1"/>
-          </p:cNvPicPr>
-          <p:nvPr/>
-        </p:nvPicPr>
-        <p:blipFill>
-          <a:blip r:embed="rId4"/>
-          <a:srcRect/>
-          <a:stretch/>
-        </p:blipFill>
-        <p:spPr>
-          <a:xfrm>
-            <a:off x="1166622" y="1222558"/>
-            <a:ext cx="530352" cy="537462"/>
-          </a:xfrm>
-          <a:prstGeom prst="ellipse">
-            <a:avLst/>
-          </a:prstGeom>
-          <a:ln w="63500" cap="rnd">
-            <a:noFill/>
-          </a:ln>
-          <a:effectLst>
-            <a:outerShdw blurRad="381000" dist="292100" dir="5400000" sx="-80000" sy="-18000" rotWithShape="0">
-              <a:srgbClr val="000000">
-                <a:alpha val="22000"/>
-              </a:srgbClr>
-            </a:outerShdw>
-          </a:effectLst>
-        </p:spPr>
-      </p:pic>
-      <p:pic>
-        <p:nvPicPr>
-          <p:cNvPr id="34" name="Image 6">
-            <a:extLst>
-              <a:ext uri="{FF2B5EF4-FFF2-40B4-BE49-F238E27FC236}">
-                <a16:creationId xmlns:a16="http://schemas.microsoft.com/office/drawing/2014/main" id="{B7EF75AA-A841-85D5-CE82-04929CB7DFC8}"/>
-              </a:ext>
-            </a:extLst>
-          </p:cNvPr>
-          <p:cNvPicPr>
-            <a:picLocks noChangeAspect="1"/>
-          </p:cNvPicPr>
-          <p:nvPr/>
-        </p:nvPicPr>
-        <p:blipFill>
-          <a:blip r:embed="rId5"/>
-          <a:srcRect/>
-          <a:stretch/>
-        </p:blipFill>
-        <p:spPr>
-          <a:xfrm>
-            <a:off x="4891279" y="1211580"/>
-            <a:ext cx="530352" cy="530352"/>
-          </a:xfrm>
-          <a:prstGeom prst="ellipse">
-            <a:avLst/>
-          </a:prstGeom>
-          <a:ln w="63500" cap="rnd">
-            <a:noFill/>
-          </a:ln>
-          <a:effectLst>
-            <a:outerShdw blurRad="381000" dist="292100" dir="5400000" sx="-80000" sy="-18000" rotWithShape="0">
-              <a:srgbClr val="000000">
-                <a:alpha val="22000"/>
-              </a:srgbClr>
-            </a:outerShdw>
-          </a:effectLst>
-        </p:spPr>
-      </p:pic>
-      <p:pic>
-        <p:nvPicPr>
-          <p:cNvPr id="35" name="Image 2">
-            <a:extLst>
-              <a:ext uri="{FF2B5EF4-FFF2-40B4-BE49-F238E27FC236}">
-                <a16:creationId xmlns:a16="http://schemas.microsoft.com/office/drawing/2014/main" id="{47AC1677-18BA-E0A2-BDB1-DF44A52C5F11}"/>
-              </a:ext>
-            </a:extLst>
-          </p:cNvPr>
-          <p:cNvPicPr>
-            <a:picLocks noChangeAspect="1"/>
-          </p:cNvPicPr>
-          <p:nvPr/>
-        </p:nvPicPr>
-        <p:blipFill>
-          <a:blip r:embed="rId6"/>
-          <a:srcRect l="1535" r="1535"/>
-          <a:stretch/>
-        </p:blipFill>
-        <p:spPr>
-          <a:xfrm>
-            <a:off x="6881622" y="1215645"/>
-            <a:ext cx="530352" cy="530352"/>
-          </a:xfrm>
-          <a:prstGeom prst="ellipse">
-            <a:avLst/>
-          </a:prstGeom>
-          <a:ln w="63500" cap="rnd">
-            <a:noFill/>
-          </a:ln>
-          <a:effectLst>
-            <a:outerShdw blurRad="381000" dist="292100" dir="5400000" sx="-80000" sy="-18000" rotWithShape="0">
-              <a:srgbClr val="000000">
-                <a:alpha val="22000"/>
-              </a:srgbClr>
-            </a:outerShdw>
-          </a:effectLst>
-        </p:spPr>
-      </p:pic>
-      <p:pic>
-        <p:nvPicPr>
-          <p:cNvPr id="36" name="Image 4">
-            <a:extLst>
-              <a:ext uri="{FF2B5EF4-FFF2-40B4-BE49-F238E27FC236}">
-                <a16:creationId xmlns:a16="http://schemas.microsoft.com/office/drawing/2014/main" id="{8B2D23A7-7B36-281D-0FAF-6FA1CD42EFC9}"/>
-              </a:ext>
-            </a:extLst>
-          </p:cNvPr>
-          <p:cNvPicPr>
-            <a:picLocks noChangeAspect="1"/>
-          </p:cNvPicPr>
-          <p:nvPr/>
-        </p:nvPicPr>
-        <p:blipFill>
-          <a:blip r:embed="rId7"/>
-          <a:srcRect/>
-          <a:stretch/>
-        </p:blipFill>
-        <p:spPr>
-          <a:xfrm>
-            <a:off x="4895851" y="3205493"/>
-            <a:ext cx="521208" cy="530352"/>
-          </a:xfrm>
-          <a:prstGeom prst="ellipse">
-            <a:avLst/>
-          </a:prstGeom>
-          <a:ln w="63500" cap="rnd">
-            <a:noFill/>
-          </a:ln>
-          <a:effectLst>
-            <a:outerShdw blurRad="381000" dist="292100" dir="5400000" sx="-80000" sy="-18000" rotWithShape="0">
-              <a:srgbClr val="000000">
-                <a:alpha val="22000"/>
-              </a:srgbClr>
-            </a:outerShdw>
-          </a:effectLst>
-        </p:spPr>
-      </p:pic>
-      <p:pic>
-        <p:nvPicPr>
-          <p:cNvPr id="37" name="Image 6">
-            <a:extLst>
-              <a:ext uri="{FF2B5EF4-FFF2-40B4-BE49-F238E27FC236}">
-                <a16:creationId xmlns:a16="http://schemas.microsoft.com/office/drawing/2014/main" id="{2E046956-BF6C-90EB-1DB1-36B2AE3E0BAE}"/>
-              </a:ext>
-            </a:extLst>
-          </p:cNvPr>
-          <p:cNvPicPr>
-            <a:picLocks noChangeAspect="1"/>
-          </p:cNvPicPr>
-          <p:nvPr/>
-        </p:nvPicPr>
-        <p:blipFill>
-          <a:blip r:embed="rId8"/>
-          <a:srcRect/>
-          <a:stretch/>
-        </p:blipFill>
-        <p:spPr>
-          <a:xfrm>
-            <a:off x="1168908" y="3215239"/>
-            <a:ext cx="530352" cy="530352"/>
-          </a:xfrm>
-          <a:prstGeom prst="ellipse">
-            <a:avLst/>
-          </a:prstGeom>
-          <a:ln w="63500" cap="rnd">
-            <a:noFill/>
-          </a:ln>
-          <a:effectLst>
-            <a:outerShdw blurRad="381000" dist="292100" dir="5400000" sx="-80000" sy="-18000" rotWithShape="0">
-              <a:srgbClr val="000000">
-                <a:alpha val="22000"/>
-              </a:srgbClr>
-            </a:outerShdw>
-          </a:effectLst>
-        </p:spPr>
-      </p:pic>
-      <p:pic>
-        <p:nvPicPr>
-          <p:cNvPr id="38" name="Image 7">
-            <a:extLst>
-              <a:ext uri="{FF2B5EF4-FFF2-40B4-BE49-F238E27FC236}">
-                <a16:creationId xmlns:a16="http://schemas.microsoft.com/office/drawing/2014/main" id="{9B38ED17-2A60-13D2-651F-ACAC4543EC24}"/>
-              </a:ext>
-            </a:extLst>
-          </p:cNvPr>
-          <p:cNvPicPr>
-            <a:picLocks noChangeAspect="1"/>
-          </p:cNvPicPr>
-          <p:nvPr/>
-        </p:nvPicPr>
-        <p:blipFill>
-          <a:blip r:embed="rId9"/>
-          <a:srcRect/>
-          <a:stretch/>
-        </p:blipFill>
-        <p:spPr>
-          <a:xfrm>
-            <a:off x="1934718" y="3199598"/>
-            <a:ext cx="530352" cy="545993"/>
-          </a:xfrm>
-          <a:prstGeom prst="ellipse">
-            <a:avLst/>
-          </a:prstGeom>
-          <a:ln w="63500" cap="rnd">
-            <a:noFill/>
-          </a:ln>
-          <a:effectLst>
-            <a:outerShdw blurRad="381000" dist="292100" dir="5400000" sx="-80000" sy="-18000" rotWithShape="0">
-              <a:srgbClr val="000000">
-                <a:alpha val="22000"/>
-              </a:srgbClr>
-            </a:outerShdw>
-          </a:effectLst>
-        </p:spPr>
-      </p:pic>
-      <p:pic>
-        <p:nvPicPr>
-          <p:cNvPr id="39" name="Image 6">
-            <a:extLst>
-              <a:ext uri="{FF2B5EF4-FFF2-40B4-BE49-F238E27FC236}">
-                <a16:creationId xmlns:a16="http://schemas.microsoft.com/office/drawing/2014/main" id="{8E1625A9-48D3-F507-CA8C-02DBB2E499C7}"/>
-              </a:ext>
-            </a:extLst>
-          </p:cNvPr>
-          <p:cNvPicPr>
-            <a:picLocks noChangeAspect="1"/>
-          </p:cNvPicPr>
-          <p:nvPr/>
-        </p:nvPicPr>
-        <p:blipFill>
-          <a:blip r:embed="rId10"/>
-          <a:srcRect/>
-          <a:stretch/>
-        </p:blipFill>
-        <p:spPr>
-          <a:xfrm>
-            <a:off x="4045459" y="3207418"/>
-            <a:ext cx="530352" cy="530352"/>
-          </a:xfrm>
-          <a:prstGeom prst="ellipse">
-            <a:avLst/>
-          </a:prstGeom>
-          <a:ln w="63500" cap="rnd">
-            <a:noFill/>
-          </a:ln>
-          <a:effectLst>
-            <a:outerShdw blurRad="381000" dist="292100" dir="5400000" sx="-80000" sy="-18000" rotWithShape="0">
-              <a:srgbClr val="000000">
-                <a:alpha val="22000"/>
-              </a:srgbClr>
-            </a:outerShdw>
-          </a:effectLst>
-        </p:spPr>
-      </p:pic>
-      <p:pic>
-        <p:nvPicPr>
-          <p:cNvPr id="40" name="Image 3">
-            <a:extLst>
-              <a:ext uri="{FF2B5EF4-FFF2-40B4-BE49-F238E27FC236}">
-                <a16:creationId xmlns:a16="http://schemas.microsoft.com/office/drawing/2014/main" id="{065C9701-9649-0B2B-AA42-1CE53D99DDBB}"/>
-              </a:ext>
-            </a:extLst>
-          </p:cNvPr>
-          <p:cNvPicPr>
-            <a:picLocks noChangeAspect="1"/>
-          </p:cNvPicPr>
-          <p:nvPr/>
-        </p:nvPicPr>
-        <p:blipFill>
-          <a:blip r:embed="rId11"/>
-          <a:srcRect/>
-          <a:stretch/>
-        </p:blipFill>
-        <p:spPr>
-          <a:xfrm>
-            <a:off x="6918198" y="3257910"/>
-            <a:ext cx="493776" cy="493776"/>
-          </a:xfrm>
-          <a:prstGeom prst="ellipse">
-            <a:avLst/>
-          </a:prstGeom>
-          <a:ln w="63500" cap="rnd">
-            <a:noFill/>
-          </a:ln>
-          <a:effectLst>
-            <a:outerShdw blurRad="381000" dist="292100" dir="5400000" sx="-80000" sy="-18000" rotWithShape="0">
-              <a:srgbClr val="000000">
-                <a:alpha val="22000"/>
-              </a:srgbClr>
-            </a:outerShdw>
-          </a:effectLst>
-          <a:scene3d>
-            <a:camera prst="orthographicFront"/>
-            <a:lightRig rig="contrasting" dir="t">
-              <a:rot lat="0" lon="0" rev="3000000"/>
-            </a:lightRig>
-          </a:scene3d>
-          <a:sp3d contourW="7620">
-            <a:bevelT w="95250" h="31750"/>
-            <a:contourClr>
-              <a:srgbClr val="333333"/>
-            </a:contourClr>
-          </a:sp3d>
-        </p:spPr>
-      </p:pic>
-      <p:pic>
-        <p:nvPicPr>
-          <p:cNvPr id="41" name="Image 2">
-            <a:extLst>
-              <a:ext uri="{FF2B5EF4-FFF2-40B4-BE49-F238E27FC236}">
-                <a16:creationId xmlns:a16="http://schemas.microsoft.com/office/drawing/2014/main" id="{49E388BF-3A6E-DCD1-570B-6CE28A844C7F}"/>
-              </a:ext>
-            </a:extLst>
-          </p:cNvPr>
-          <p:cNvPicPr>
-            <a:picLocks noChangeAspect="1"/>
-          </p:cNvPicPr>
-          <p:nvPr/>
-        </p:nvPicPr>
-        <p:blipFill>
-          <a:blip r:embed="rId12"/>
-          <a:srcRect/>
-          <a:stretch/>
-        </p:blipFill>
-        <p:spPr>
-          <a:xfrm>
-            <a:off x="7777734" y="3257910"/>
-            <a:ext cx="493776" cy="508339"/>
-          </a:xfrm>
-          <a:prstGeom prst="ellipse">
-            <a:avLst/>
-          </a:prstGeom>
-          <a:ln w="63500" cap="rnd">
-            <a:noFill/>
-          </a:ln>
-          <a:effectLst>
-            <a:outerShdw blurRad="381000" dist="292100" dir="5400000" sx="-80000" sy="-18000" rotWithShape="0">
-              <a:srgbClr val="000000">
-                <a:alpha val="22000"/>
-              </a:srgbClr>
-            </a:outerShdw>
-          </a:effectLst>
-        </p:spPr>
-      </p:pic>
-      <p:pic>
-        <p:nvPicPr>
-          <p:cNvPr id="42" name="Image 6">
-            <a:extLst>
-              <a:ext uri="{FF2B5EF4-FFF2-40B4-BE49-F238E27FC236}">
-                <a16:creationId xmlns:a16="http://schemas.microsoft.com/office/drawing/2014/main" id="{83849437-EF2E-8967-F329-73C299DBFF46}"/>
-              </a:ext>
-            </a:extLst>
-          </p:cNvPr>
-          <p:cNvPicPr>
-            <a:picLocks noChangeAspect="1"/>
-          </p:cNvPicPr>
-          <p:nvPr/>
-        </p:nvPicPr>
-        <p:blipFill>
-          <a:blip r:embed="rId13"/>
-          <a:srcRect/>
-          <a:stretch/>
-        </p:blipFill>
-        <p:spPr>
-          <a:xfrm>
-            <a:off x="7741158" y="1219200"/>
-            <a:ext cx="530352" cy="530352"/>
-          </a:xfrm>
-          <a:prstGeom prst="ellipse">
-            <a:avLst/>
-          </a:prstGeom>
-          <a:ln w="63500" cap="rnd">
-            <a:noFill/>
-          </a:ln>
-          <a:effectLst>
-            <a:outerShdw blurRad="381000" dist="292100" dir="5400000" sx="-80000" sy="-18000" rotWithShape="0">
-              <a:srgbClr val="000000">
-                <a:alpha val="22000"/>
-              </a:srgbClr>
-            </a:outerShdw>
-          </a:effectLst>
-        </p:spPr>
-      </p:pic>
-      <p:pic>
-        <p:nvPicPr>
-          <p:cNvPr id="43" name="Image 3">
-            <a:extLst>
-              <a:ext uri="{FF2B5EF4-FFF2-40B4-BE49-F238E27FC236}">
-                <a16:creationId xmlns:a16="http://schemas.microsoft.com/office/drawing/2014/main" id="{4E6723D9-576D-9AE7-7B5C-BAC2CA6683A9}"/>
-              </a:ext>
-            </a:extLst>
-          </p:cNvPr>
-          <p:cNvPicPr>
-            <a:picLocks noChangeAspect="1"/>
-          </p:cNvPicPr>
-          <p:nvPr/>
-        </p:nvPicPr>
-        <p:blipFill>
-          <a:blip r:embed="rId14"/>
-          <a:srcRect l="661" r="661"/>
-          <a:stretch/>
-        </p:blipFill>
-        <p:spPr>
-          <a:xfrm>
-            <a:off x="4006597" y="1208025"/>
-            <a:ext cx="530352" cy="537462"/>
-          </a:xfrm>
-          <a:prstGeom prst="ellipse">
-            <a:avLst/>
-          </a:prstGeom>
-          <a:ln w="63500" cap="rnd">
-            <a:noFill/>
-          </a:ln>
-          <a:effectLst>
-            <a:outerShdw blurRad="381000" dist="292100" dir="5400000" sx="-80000" sy="-18000" rotWithShape="0">
-              <a:srgbClr val="000000">
-                <a:alpha val="22000"/>
-              </a:srgbClr>
-            </a:outerShdw>
-          </a:effectLst>
-        </p:spPr>
-      </p:pic>
-      <p:pic>
-        <p:nvPicPr>
-          <p:cNvPr id="31" name="Image 0" descr="preencoded.png">
-            <a:extLst>
-              <a:ext uri="{FF2B5EF4-FFF2-40B4-BE49-F238E27FC236}">
-                <a16:creationId xmlns:a16="http://schemas.microsoft.com/office/drawing/2014/main" id="{F98098BF-D236-042A-A97D-C0531C7CDBDE}"/>
-              </a:ext>
-            </a:extLst>
-          </p:cNvPr>
-          <p:cNvPicPr>
-            <a:picLocks noChangeAspect="1"/>
-          </p:cNvPicPr>
-          <p:nvPr/>
-        </p:nvPicPr>
-        <p:blipFill>
-          <a:blip r:embed="rId15"/>
-          <a:stretch>
-            <a:fillRect/>
-          </a:stretch>
-        </p:blipFill>
-        <p:spPr>
-          <a:xfrm>
-            <a:off x="508254" y="138793"/>
-            <a:ext cx="8229600" cy="914400"/>
-          </a:xfrm>
-          <a:prstGeom prst="rect">
-            <a:avLst/>
-          </a:prstGeom>
-        </p:spPr>
-      </p:pic>
-    </p:spTree>
-  </p:cSld>
-  <p:clrMapOvr>
-    <a:masterClrMapping/>
-  </p:clrMapOvr>
-  <mc:AlternateContent xmlns:mc="http://schemas.openxmlformats.org/markup-compatibility/2006" xmlns:p159="http://schemas.microsoft.com/office/powerpoint/2015/09/main">
-    <mc:Choice Requires="p159">
-      <p:transition xmlns:p14="http://schemas.microsoft.com/office/powerpoint/2010/main" spd="slow" p14:dur="2000">
-        <p159:morph option="byObject"/>
-      </p:transition>
-    </mc:Choice>
-    <mc:Fallback xmlns="">
-      <p:transition spd="slow">
-        <p:fade/>
-      </p:transition>
-    </mc:Fallback>
-  </mc:AlternateContent>
-</p:sld>
-</file>
-
-<file path=ppt/slides/slide8.xml><?xml version="1.0" encoding="utf-8"?>
-<p:sld xmlns:a="http://schemas.openxmlformats.org/drawingml/2006/main" xmlns:r="http://schemas.openxmlformats.org/officeDocument/2006/relationships" xmlns:p="http://schemas.openxmlformats.org/presentationml/2006/main">
-  <p:cSld>
-    <p:bg>
-      <p:bgPr>
-        <a:solidFill>
-          <a:srgbClr val="080D1A"/>
-        </a:solidFill>
-        <a:effectLst/>
-      </p:bgPr>
-    </p:bg>
-    <p:spTree>
-      <p:nvGrpSpPr>
-        <p:cNvPr id="1" name=""/>
-        <p:cNvGrpSpPr/>
-        <p:nvPr/>
-      </p:nvGrpSpPr>
-      <p:grpSpPr>
-        <a:xfrm>
-          <a:off x="0" y="0"/>
-          <a:ext cx="0" cy="0"/>
-          <a:chOff x="0" y="0"/>
-          <a:chExt cx="0" cy="0"/>
-        </a:xfrm>
-      </p:grpSpPr>
       <p:pic>
         <p:nvPicPr>
           <p:cNvPr id="4" name="Imagine 3">
@@ -9637,7 +8283,7 @@
 </p:sld>
 </file>
 
-<file path=ppt/slides/slide9.xml><?xml version="1.0" encoding="utf-8"?>
+<file path=ppt/slides/slide8.xml><?xml version="1.0" encoding="utf-8"?>
 <p:sld xmlns:a="http://schemas.openxmlformats.org/drawingml/2006/main" xmlns:r="http://schemas.openxmlformats.org/officeDocument/2006/relationships" xmlns:p="http://schemas.openxmlformats.org/presentationml/2006/main">
   <p:cSld name="Slide 6">
     <p:bg>
